--- a/docs/XChannel-walkthrough.pptx
+++ b/docs/XChannel-walkthrough.pptx
@@ -121,25 +121,25 @@
   <p:extLst>
     <p:ext uri="{521415D9-36F7-43E2-AB2F-B90AF26B5E84}">
       <p14:sectionLst xmlns:p14="http://schemas.microsoft.com/office/powerpoint/2010/main">
-        <p14:section name="Opening" id="{7d03031e-505d-3072-3372-92381f42dcf9}">
+        <p14:section name="Opening" id="{72185e83-43b5-278e-560b-eb6912f835cc}">
           <p14:sldIdLst>
             <p14:sldId id="256"/>
           </p14:sldIdLst>
         </p14:section>
-        <p14:section name="Product" id="{aa866a2e-5c68-d0b0-500e-7f28dc61b923}">
+        <p14:section name="Product" id="{84814221-c021-54f2-4941-db1f3db9f704}">
           <p14:sldIdLst>
             <p14:sldId id="257"/>
             <p14:sldId id="258"/>
           </p14:sldIdLst>
         </p14:section>
-        <p14:section name="System design" id="{63186283-43d1-3d79-fbde-8f876561c652}">
+        <p14:section name="System design" id="{4fff5a9a-0e8f-e2d4-bed4-2630f99c9fcd}">
           <p14:sldIdLst>
             <p14:sldId id="259"/>
             <p14:sldId id="260"/>
             <p14:sldId id="261"/>
           </p14:sldIdLst>
         </p14:section>
-        <p14:section name="Schedule rules" id="{bafb4401-d889-cf00-b8d0-8c40abdf2379}">
+        <p14:section name="Schedule rules" id="{982c670e-903a-7314-b2ef-52e6fa7cb686}">
           <p14:sldIdLst>
             <p14:sldId id="262"/>
             <p14:sldId id="263"/>
@@ -147,14 +147,14 @@
             <p14:sldId id="265"/>
           </p14:sldIdLst>
         </p14:section>
-        <p14:section name="Code" id="{ac2c2f0a-7f64-0110-077c-427ee75b1a9f}">
+        <p14:section name="Code" id="{ae048d9f-0ffe-28cf-8260-36380ee97575}">
           <p14:sldIdLst>
             <p14:sldId id="266"/>
             <p14:sldId id="267"/>
             <p14:sldId id="268"/>
           </p14:sldIdLst>
         </p14:section>
-        <p14:section name="Closing" id="{b1704706-ff13-8126-5c9f-59e8bf7a7fa7}">
+        <p14:section name="Closing" id="{50233d0f-ec6d-9a9f-2f71-6d4b2a12c208}">
           <p14:sldIdLst>
             <p14:sldId id="269"/>
             <p14:sldId id="270"/>

--- a/docs/XChannel-walkthrough.pptx
+++ b/docs/XChannel-walkthrough.pptx
@@ -121,40 +121,40 @@
   <p:extLst>
     <p:ext uri="{521415D9-36F7-43E2-AB2F-B90AF26B5E84}">
       <p14:sectionLst xmlns:p14="http://schemas.microsoft.com/office/powerpoint/2010/main">
-        <p14:section name="Opening" id="{75c6f0b0-b263-54ee-2199-07e923219743}">
+        <p14:section name="Opening" id="{f6a7ed72-e5b5-0501-3fc1-be2b9e56f63e}">
           <p14:sldIdLst>
             <p14:sldId id="256"/>
           </p14:sldIdLst>
         </p14:section>
-        <p14:section name="Product" id="{d901e536-5915-559b-cf46-4d1b295ea384}">
+        <p14:section name="Product" id="{d94b0b27-ab31-8271-4ce5-09013e79a9cf}">
           <p14:sldIdLst>
             <p14:sldId id="257"/>
             <p14:sldId id="258"/>
           </p14:sldIdLst>
         </p14:section>
-        <p14:section name="System design" id="{80172d28-3de3-493e-2151-a5eb905f0656}">
+        <p14:section name="System design" id="{c0b9dafc-736f-63ef-97ca-f66ba86c25ab}">
           <p14:sldIdLst>
             <p14:sldId id="259"/>
             <p14:sldId id="260"/>
             <p14:sldId id="261"/>
+            <p14:sldId id="262"/>
           </p14:sldIdLst>
         </p14:section>
-        <p14:section name="Schedule rules" id="{2f0bb6e6-dd5d-542b-aa86-80c01b243e1f}">
+        <p14:section name="Schedule rules" id="{aaf41059-291d-78d8-c62e-5beefc77e9c7}">
           <p14:sldIdLst>
-            <p14:sldId id="262"/>
             <p14:sldId id="263"/>
             <p14:sldId id="264"/>
             <p14:sldId id="265"/>
           </p14:sldIdLst>
         </p14:section>
-        <p14:section name="Code" id="{652b8e28-0695-684a-2598-aded6c264878}">
+        <p14:section name="Code" id="{40fab4f8-d5e3-ad9b-f0ee-adf57c09b7e6}">
           <p14:sldIdLst>
             <p14:sldId id="266"/>
             <p14:sldId id="267"/>
             <p14:sldId id="268"/>
           </p14:sldIdLst>
         </p14:section>
-        <p14:section name="Closing" id="{db675a96-9fb1-f73a-81fc-8a41d3946493}">
+        <p14:section name="Closing" id="{019a90b4-8a99-f078-f93b-faba9df13188}">
           <p14:sldIdLst>
             <p14:sldId id="269"/>
             <p14:sldId id="270"/>
@@ -652,7 +652,7 @@
           <a:p>
             <a:r>
               <a:rPr lang="en-US" dirty="0"/>
-              <a:t>For each decision, name its cost too. Interviewers usually care most about the last column.</a:t>
+              <a:t>The dashboard has a day and time picker. Pick Friday 21:00: Banten is playing automated music.</a:t>
             </a:r>
             <a:endParaRPr lang="en-US" dirty="0"/>
           </a:p>
@@ -740,7 +740,7 @@
           <a:p>
             <a:r>
               <a:rPr lang="en-US" dirty="0"/>
-              <a:t>The alternatives column shows the choice was deliberate. Have one example ready for each row.</a:t>
+              <a:t>For each row, have one example from this project ready.</a:t>
             </a:r>
             <a:endParaRPr lang="en-US" dirty="0"/>
           </a:p>
@@ -1532,7 +1532,7 @@
           <a:p>
             <a:r>
               <a:rPr lang="en-US" dirty="0"/>
-              <a:t>This is the strongest design point. The columns are identical; only the station differs. That is data, not schema.</a:t>
+              <a:t>Walk it left to right: master data, then documents, then records.</a:t>
             </a:r>
             <a:endParaRPr lang="en-US" dirty="0"/>
           </a:p>
@@ -1620,7 +1620,7 @@
           <a:p>
             <a:r>
               <a:rPr lang="en-US" dirty="0"/>
-              <a:t>Every example on the left really is in the production data. A TIME column is not used because 24:00 is not valid in it.</a:t>
+              <a:t>This is the strongest design point. The columns are identical; only the station differs. That is data, not schema.</a:t>
             </a:r>
             <a:endParaRPr lang="en-US" dirty="0"/>
           </a:p>
@@ -1708,7 +1708,7 @@
           <a:p>
             <a:r>
               <a:rPr lang="en-US" dirty="0"/>
-              <a:t>Demo it live: Jakarta, Monday to Wednesday 09:00-11:00. Refused with the name of the show in the way, and no day is saved.</a:t>
+              <a:t>Every example on the left really is in the production data. A TIME column is not used because 24:00 is not valid in it.</a:t>
             </a:r>
             <a:endParaRPr lang="en-US" dirty="0"/>
           </a:p>
@@ -1796,7 +1796,7 @@
           <a:p>
             <a:r>
               <a:rPr lang="en-US" dirty="0"/>
-              <a:t>The dashboard has a day and time picker. Pick Friday 21:00: Banten is playing automated music.</a:t>
+              <a:t>Demo it live: Jakarta, Monday to Wednesday 09:00-11:00. Refused with the name of the show in the way, and no day is saved.</a:t>
             </a:r>
             <a:endParaRPr lang="en-US" dirty="0"/>
           </a:p>
@@ -2749,932 +2749,767 @@
                   <a:schemeClr val="bg1"/>
                 </a:solidFill>
               </a:rPr>
-              <a:t>The trade-offs I chose</a:t>
+              <a:t>On air, up next, and empty hours</a:t>
             </a:r>
             <a:endParaRPr lang="en-US" sz="3200" dirty="0"/>
           </a:p>
         </p:txBody>
       </p:sp>
-      <p:graphicFrame>
-        <p:nvGraphicFramePr>
-          <p:cNvPr id="11" name="Table 0"/>
-          <p:cNvGraphicFramePr>
-            <a:graphicFrameLocks noGrp="1"/>
-          </p:cNvGraphicFramePr>
-          <p:nvPr>
-            <p:extLst>
-              <p:ext uri="{D42A27DB-BD31-4B8C-83A1-F6EECF244321}">
-                <p14:modId xmlns:p14="http://schemas.microsoft.com/office/powerpoint/2010/main" val="1579011935"/>
-              </p:ext>
-            </p:extLst>
-          </p:nvPr>
-        </p:nvGraphicFramePr>
-        <p:xfrm>
-          <a:off x="548640" y="1463040"/>
-          <a:ext cx="11064240" cy="914400"/>
-        </p:xfrm>
-        <a:graphic>
-          <a:graphicData uri="http://schemas.openxmlformats.org/drawingml/2006/table">
-            <a:tbl>
-              <a:tblPr/>
-              <a:tblGrid>
-                <a:gridCol w="3291840"/>
-                <a:gridCol w="3931920"/>
-                <a:gridCol w="3840480"/>
-              </a:tblGrid>
-              <a:tr h="0">
-                <a:tc>
-                  <a:txBody>
-                    <a:bodyPr/>
-                    <a:lstStyle/>
-                    <a:p>
-                      <a:pPr indent="0" marL="0">
-                        <a:buNone/>
-                      </a:pPr>
-                      <a:r>
-                        <a:rPr lang="en-US" sz="1500" b="1" dirty="0">
-                          <a:solidFill>
-                            <a:srgbClr val="E0313E"/>
-                          </a:solidFill>
-                        </a:rPr>
-                        <a:t>Decision</a:t>
-                      </a:r>
-                      <a:endParaRPr lang="en-US" sz="1500" dirty="0"/>
-                    </a:p>
-                  </a:txBody>
-                  <a:tcPr marL="164592" marR="164592" marT="182880" marB="182880" anchor="t">
-                    <a:lnL w="9525" cap="flat" cmpd="sng" algn="ctr">
-                      <a:solidFill>
-                        <a:srgbClr val="3A3D46"/>
-                      </a:solidFill>
-                      <a:prstDash val="solid"/>
-                      <a:round/>
-                      <a:headEnd type="none" w="med" len="med"/>
-                      <a:tailEnd type="none" w="med" len="med"/>
-                    </a:lnL>
-                    <a:lnR w="9525" cap="flat" cmpd="sng" algn="ctr">
-                      <a:solidFill>
-                        <a:srgbClr val="3A3D46"/>
-                      </a:solidFill>
-                      <a:prstDash val="solid"/>
-                      <a:round/>
-                      <a:headEnd type="none" w="med" len="med"/>
-                      <a:tailEnd type="none" w="med" len="med"/>
-                    </a:lnR>
-                    <a:lnT w="9525" cap="flat" cmpd="sng" algn="ctr">
-                      <a:solidFill>
-                        <a:srgbClr val="3A3D46"/>
-                      </a:solidFill>
-                      <a:prstDash val="solid"/>
-                      <a:round/>
-                      <a:headEnd type="none" w="med" len="med"/>
-                      <a:tailEnd type="none" w="med" len="med"/>
-                    </a:lnT>
-                    <a:lnB w="9525" cap="flat" cmpd="sng" algn="ctr">
-                      <a:solidFill>
-                        <a:srgbClr val="3A3D46"/>
-                      </a:solidFill>
-                      <a:prstDash val="solid"/>
-                      <a:round/>
-                      <a:headEnd type="none" w="med" len="med"/>
-                      <a:tailEnd type="none" w="med" len="med"/>
-                    </a:lnB>
-                    <a:solidFill>
-                      <a:srgbClr val="25272E"/>
-                    </a:solidFill>
-                  </a:tcPr>
-                </a:tc>
-                <a:tc>
-                  <a:txBody>
-                    <a:bodyPr/>
-                    <a:lstStyle/>
-                    <a:p>
-                      <a:pPr indent="0" marL="0">
-                        <a:buNone/>
-                      </a:pPr>
-                      <a:r>
-                        <a:rPr lang="en-US" sz="1500" b="1" dirty="0">
-                          <a:solidFill>
-                            <a:srgbClr val="E0313E"/>
-                          </a:solidFill>
-                        </a:rPr>
-                        <a:t>Why</a:t>
-                      </a:r>
-                      <a:endParaRPr lang="en-US" sz="1500" dirty="0"/>
-                    </a:p>
-                  </a:txBody>
-                  <a:tcPr marL="164592" marR="164592" marT="182880" marB="182880" anchor="t">
-                    <a:lnL w="9525" cap="flat" cmpd="sng" algn="ctr">
-                      <a:solidFill>
-                        <a:srgbClr val="3A3D46"/>
-                      </a:solidFill>
-                      <a:prstDash val="solid"/>
-                      <a:round/>
-                      <a:headEnd type="none" w="med" len="med"/>
-                      <a:tailEnd type="none" w="med" len="med"/>
-                    </a:lnL>
-                    <a:lnR w="9525" cap="flat" cmpd="sng" algn="ctr">
-                      <a:solidFill>
-                        <a:srgbClr val="3A3D46"/>
-                      </a:solidFill>
-                      <a:prstDash val="solid"/>
-                      <a:round/>
-                      <a:headEnd type="none" w="med" len="med"/>
-                      <a:tailEnd type="none" w="med" len="med"/>
-                    </a:lnR>
-                    <a:lnT w="9525" cap="flat" cmpd="sng" algn="ctr">
-                      <a:solidFill>
-                        <a:srgbClr val="3A3D46"/>
-                      </a:solidFill>
-                      <a:prstDash val="solid"/>
-                      <a:round/>
-                      <a:headEnd type="none" w="med" len="med"/>
-                      <a:tailEnd type="none" w="med" len="med"/>
-                    </a:lnT>
-                    <a:lnB w="9525" cap="flat" cmpd="sng" algn="ctr">
-                      <a:solidFill>
-                        <a:srgbClr val="3A3D46"/>
-                      </a:solidFill>
-                      <a:prstDash val="solid"/>
-                      <a:round/>
-                      <a:headEnd type="none" w="med" len="med"/>
-                      <a:tailEnd type="none" w="med" len="med"/>
-                    </a:lnB>
-                    <a:solidFill>
-                      <a:srgbClr val="25272E"/>
-                    </a:solidFill>
-                  </a:tcPr>
-                </a:tc>
-                <a:tc>
-                  <a:txBody>
-                    <a:bodyPr/>
-                    <a:lstStyle/>
-                    <a:p>
-                      <a:pPr indent="0" marL="0">
-                        <a:buNone/>
-                      </a:pPr>
-                      <a:r>
-                        <a:rPr lang="en-US" sz="1500" b="1" dirty="0">
-                          <a:solidFill>
-                            <a:srgbClr val="E0313E"/>
-                          </a:solidFill>
-                        </a:rPr>
-                        <a:t>What it costs</a:t>
-                      </a:r>
-                      <a:endParaRPr lang="en-US" sz="1500" dirty="0"/>
-                    </a:p>
-                  </a:txBody>
-                  <a:tcPr marL="164592" marR="164592" marT="182880" marB="182880" anchor="t">
-                    <a:lnL w="9525" cap="flat" cmpd="sng" algn="ctr">
-                      <a:solidFill>
-                        <a:srgbClr val="3A3D46"/>
-                      </a:solidFill>
-                      <a:prstDash val="solid"/>
-                      <a:round/>
-                      <a:headEnd type="none" w="med" len="med"/>
-                      <a:tailEnd type="none" w="med" len="med"/>
-                    </a:lnL>
-                    <a:lnR w="9525" cap="flat" cmpd="sng" algn="ctr">
-                      <a:solidFill>
-                        <a:srgbClr val="3A3D46"/>
-                      </a:solidFill>
-                      <a:prstDash val="solid"/>
-                      <a:round/>
-                      <a:headEnd type="none" w="med" len="med"/>
-                      <a:tailEnd type="none" w="med" len="med"/>
-                    </a:lnR>
-                    <a:lnT w="9525" cap="flat" cmpd="sng" algn="ctr">
-                      <a:solidFill>
-                        <a:srgbClr val="3A3D46"/>
-                      </a:solidFill>
-                      <a:prstDash val="solid"/>
-                      <a:round/>
-                      <a:headEnd type="none" w="med" len="med"/>
-                      <a:tailEnd type="none" w="med" len="med"/>
-                    </a:lnT>
-                    <a:lnB w="9525" cap="flat" cmpd="sng" algn="ctr">
-                      <a:solidFill>
-                        <a:srgbClr val="3A3D46"/>
-                      </a:solidFill>
-                      <a:prstDash val="solid"/>
-                      <a:round/>
-                      <a:headEnd type="none" w="med" len="med"/>
-                      <a:tailEnd type="none" w="med" len="med"/>
-                    </a:lnB>
-                    <a:solidFill>
-                      <a:srgbClr val="25272E"/>
-                    </a:solidFill>
-                  </a:tcPr>
-                </a:tc>
-              </a:tr>
-              <a:tr h="0">
-                <a:tc>
-                  <a:txBody>
-                    <a:bodyPr/>
-                    <a:lstStyle/>
-                    <a:p>
-                      <a:pPr indent="0" marL="0">
-                        <a:buNone/>
-                      </a:pPr>
-                      <a:r>
-                        <a:rPr lang="en-US" sz="1700" b="1" dirty="0">
-                          <a:solidFill>
-                            <a:srgbClr val="FFFFFF"/>
-                          </a:solidFill>
-                        </a:rPr>
-                        <a:t>Minutes since midnight, not a TIME column</a:t>
-                      </a:r>
-                      <a:endParaRPr lang="en-US" sz="1700" dirty="0"/>
-                    </a:p>
-                  </a:txBody>
-                  <a:tcPr marL="164592" marR="164592" marT="182880" marB="182880" anchor="t">
-                    <a:lnL w="9525" cap="flat" cmpd="sng" algn="ctr">
-                      <a:solidFill>
-                        <a:srgbClr val="3A3D46"/>
-                      </a:solidFill>
-                      <a:prstDash val="solid"/>
-                      <a:round/>
-                      <a:headEnd type="none" w="med" len="med"/>
-                      <a:tailEnd type="none" w="med" len="med"/>
-                    </a:lnL>
-                    <a:lnR w="9525" cap="flat" cmpd="sng" algn="ctr">
-                      <a:solidFill>
-                        <a:srgbClr val="3A3D46"/>
-                      </a:solidFill>
-                      <a:prstDash val="solid"/>
-                      <a:round/>
-                      <a:headEnd type="none" w="med" len="med"/>
-                      <a:tailEnd type="none" w="med" len="med"/>
-                    </a:lnR>
-                    <a:lnT w="9525" cap="flat" cmpd="sng" algn="ctr">
-                      <a:solidFill>
-                        <a:srgbClr val="3A3D46"/>
-                      </a:solidFill>
-                      <a:prstDash val="solid"/>
-                      <a:round/>
-                      <a:headEnd type="none" w="med" len="med"/>
-                      <a:tailEnd type="none" w="med" len="med"/>
-                    </a:lnT>
-                    <a:lnB w="9525" cap="flat" cmpd="sng" algn="ctr">
-                      <a:solidFill>
-                        <a:srgbClr val="3A3D46"/>
-                      </a:solidFill>
-                      <a:prstDash val="solid"/>
-                      <a:round/>
-                      <a:headEnd type="none" w="med" len="med"/>
-                      <a:tailEnd type="none" w="med" len="med"/>
-                    </a:lnB>
-                  </a:tcPr>
-                </a:tc>
-                <a:tc>
-                  <a:txBody>
-                    <a:bodyPr/>
-                    <a:lstStyle/>
-                    <a:p>
-                      <a:pPr indent="0" marL="0">
-                        <a:buNone/>
-                      </a:pPr>
-                      <a:r>
-                        <a:rPr lang="en-US" sz="1700" dirty="0">
-                          <a:solidFill>
-                            <a:srgbClr val="AEB2BC"/>
-                          </a:solidFill>
-                        </a:rPr>
-                        <a:t>24:00 is valid; overlap checks are integer compares</a:t>
-                      </a:r>
-                      <a:endParaRPr lang="en-US" sz="1700" dirty="0"/>
-                    </a:p>
-                  </a:txBody>
-                  <a:tcPr marL="164592" marR="164592" marT="182880" marB="182880" anchor="t">
-                    <a:lnL w="9525" cap="flat" cmpd="sng" algn="ctr">
-                      <a:solidFill>
-                        <a:srgbClr val="3A3D46"/>
-                      </a:solidFill>
-                      <a:prstDash val="solid"/>
-                      <a:round/>
-                      <a:headEnd type="none" w="med" len="med"/>
-                      <a:tailEnd type="none" w="med" len="med"/>
-                    </a:lnL>
-                    <a:lnR w="9525" cap="flat" cmpd="sng" algn="ctr">
-                      <a:solidFill>
-                        <a:srgbClr val="3A3D46"/>
-                      </a:solidFill>
-                      <a:prstDash val="solid"/>
-                      <a:round/>
-                      <a:headEnd type="none" w="med" len="med"/>
-                      <a:tailEnd type="none" w="med" len="med"/>
-                    </a:lnR>
-                    <a:lnT w="9525" cap="flat" cmpd="sng" algn="ctr">
-                      <a:solidFill>
-                        <a:srgbClr val="3A3D46"/>
-                      </a:solidFill>
-                      <a:prstDash val="solid"/>
-                      <a:round/>
-                      <a:headEnd type="none" w="med" len="med"/>
-                      <a:tailEnd type="none" w="med" len="med"/>
-                    </a:lnT>
-                    <a:lnB w="9525" cap="flat" cmpd="sng" algn="ctr">
-                      <a:solidFill>
-                        <a:srgbClr val="3A3D46"/>
-                      </a:solidFill>
-                      <a:prstDash val="solid"/>
-                      <a:round/>
-                      <a:headEnd type="none" w="med" len="med"/>
-                      <a:tailEnd type="none" w="med" len="med"/>
-                    </a:lnB>
-                  </a:tcPr>
-                </a:tc>
-                <a:tc>
-                  <a:txBody>
-                    <a:bodyPr/>
-                    <a:lstStyle/>
-                    <a:p>
-                      <a:pPr indent="0" marL="0">
-                        <a:buNone/>
-                      </a:pPr>
-                      <a:r>
-                        <a:rPr lang="en-US" sz="1700" dirty="0">
-                          <a:solidFill>
-                            <a:srgbClr val="AEB2BC"/>
-                          </a:solidFill>
-                        </a:rPr>
-                        <a:t>Every screen has to convert (Clock::format)</a:t>
-                      </a:r>
-                      <a:endParaRPr lang="en-US" sz="1700" dirty="0"/>
-                    </a:p>
-                  </a:txBody>
-                  <a:tcPr marL="164592" marR="164592" marT="182880" marB="182880" anchor="t">
-                    <a:lnL w="9525" cap="flat" cmpd="sng" algn="ctr">
-                      <a:solidFill>
-                        <a:srgbClr val="3A3D46"/>
-                      </a:solidFill>
-                      <a:prstDash val="solid"/>
-                      <a:round/>
-                      <a:headEnd type="none" w="med" len="med"/>
-                      <a:tailEnd type="none" w="med" len="med"/>
-                    </a:lnL>
-                    <a:lnR w="9525" cap="flat" cmpd="sng" algn="ctr">
-                      <a:solidFill>
-                        <a:srgbClr val="3A3D46"/>
-                      </a:solidFill>
-                      <a:prstDash val="solid"/>
-                      <a:round/>
-                      <a:headEnd type="none" w="med" len="med"/>
-                      <a:tailEnd type="none" w="med" len="med"/>
-                    </a:lnR>
-                    <a:lnT w="9525" cap="flat" cmpd="sng" algn="ctr">
-                      <a:solidFill>
-                        <a:srgbClr val="3A3D46"/>
-                      </a:solidFill>
-                      <a:prstDash val="solid"/>
-                      <a:round/>
-                      <a:headEnd type="none" w="med" len="med"/>
-                      <a:tailEnd type="none" w="med" len="med"/>
-                    </a:lnT>
-                    <a:lnB w="9525" cap="flat" cmpd="sng" algn="ctr">
-                      <a:solidFill>
-                        <a:srgbClr val="3A3D46"/>
-                      </a:solidFill>
-                      <a:prstDash val="solid"/>
-                      <a:round/>
-                      <a:headEnd type="none" w="med" len="med"/>
-                      <a:tailEnd type="none" w="med" len="med"/>
-                    </a:lnB>
-                  </a:tcPr>
-                </a:tc>
-              </a:tr>
-              <a:tr h="0">
-                <a:tc>
-                  <a:txBody>
-                    <a:bodyPr/>
-                    <a:lstStyle/>
-                    <a:p>
-                      <a:pPr indent="0" marL="0">
-                        <a:buNone/>
-                      </a:pPr>
-                      <a:r>
-                        <a:rPr lang="en-US" sz="1700" b="1" dirty="0">
-                          <a:solidFill>
-                            <a:srgbClr val="FFFFFF"/>
-                          </a:solidFill>
-                        </a:rPr>
-                        <a:t>Late shows are split at midnight</a:t>
-                      </a:r>
-                      <a:endParaRPr lang="en-US" sz="1700" dirty="0"/>
-                    </a:p>
-                  </a:txBody>
-                  <a:tcPr marL="164592" marR="164592" marT="182880" marB="182880" anchor="t">
-                    <a:lnL w="9525" cap="flat" cmpd="sng" algn="ctr">
-                      <a:solidFill>
-                        <a:srgbClr val="3A3D46"/>
-                      </a:solidFill>
-                      <a:prstDash val="solid"/>
-                      <a:round/>
-                      <a:headEnd type="none" w="med" len="med"/>
-                      <a:tailEnd type="none" w="med" len="med"/>
-                    </a:lnL>
-                    <a:lnR w="9525" cap="flat" cmpd="sng" algn="ctr">
-                      <a:solidFill>
-                        <a:srgbClr val="3A3D46"/>
-                      </a:solidFill>
-                      <a:prstDash val="solid"/>
-                      <a:round/>
-                      <a:headEnd type="none" w="med" len="med"/>
-                      <a:tailEnd type="none" w="med" len="med"/>
-                    </a:lnR>
-                    <a:lnT w="9525" cap="flat" cmpd="sng" algn="ctr">
-                      <a:solidFill>
-                        <a:srgbClr val="3A3D46"/>
-                      </a:solidFill>
-                      <a:prstDash val="solid"/>
-                      <a:round/>
-                      <a:headEnd type="none" w="med" len="med"/>
-                      <a:tailEnd type="none" w="med" len="med"/>
-                    </a:lnT>
-                    <a:lnB w="9525" cap="flat" cmpd="sng" algn="ctr">
-                      <a:solidFill>
-                        <a:srgbClr val="3A3D46"/>
-                      </a:solidFill>
-                      <a:prstDash val="solid"/>
-                      <a:round/>
-                      <a:headEnd type="none" w="med" len="med"/>
-                      <a:tailEnd type="none" w="med" len="med"/>
-                    </a:lnB>
-                  </a:tcPr>
-                </a:tc>
-                <a:tc>
-                  <a:txBody>
-                    <a:bodyPr/>
-                    <a:lstStyle/>
-                    <a:p>
-                      <a:pPr indent="0" marL="0">
-                        <a:buNone/>
-                      </a:pPr>
-                      <a:r>
-                        <a:rPr lang="en-US" sz="1700" dirty="0">
-                          <a:solidFill>
-                            <a:srgbClr val="AEB2BC"/>
-                          </a:solidFill>
-                        </a:rPr>
-                        <a:t>One slot = one day, so every query stays simple</a:t>
-                      </a:r>
-                      <a:endParaRPr lang="en-US" sz="1700" dirty="0"/>
-                    </a:p>
-                  </a:txBody>
-                  <a:tcPr marL="164592" marR="164592" marT="182880" marB="182880" anchor="t">
-                    <a:lnL w="9525" cap="flat" cmpd="sng" algn="ctr">
-                      <a:solidFill>
-                        <a:srgbClr val="3A3D46"/>
-                      </a:solidFill>
-                      <a:prstDash val="solid"/>
-                      <a:round/>
-                      <a:headEnd type="none" w="med" len="med"/>
-                      <a:tailEnd type="none" w="med" len="med"/>
-                    </a:lnL>
-                    <a:lnR w="9525" cap="flat" cmpd="sng" algn="ctr">
-                      <a:solidFill>
-                        <a:srgbClr val="3A3D46"/>
-                      </a:solidFill>
-                      <a:prstDash val="solid"/>
-                      <a:round/>
-                      <a:headEnd type="none" w="med" len="med"/>
-                      <a:tailEnd type="none" w="med" len="med"/>
-                    </a:lnR>
-                    <a:lnT w="9525" cap="flat" cmpd="sng" algn="ctr">
-                      <a:solidFill>
-                        <a:srgbClr val="3A3D46"/>
-                      </a:solidFill>
-                      <a:prstDash val="solid"/>
-                      <a:round/>
-                      <a:headEnd type="none" w="med" len="med"/>
-                      <a:tailEnd type="none" w="med" len="med"/>
-                    </a:lnT>
-                    <a:lnB w="9525" cap="flat" cmpd="sng" algn="ctr">
-                      <a:solidFill>
-                        <a:srgbClr val="3A3D46"/>
-                      </a:solidFill>
-                      <a:prstDash val="solid"/>
-                      <a:round/>
-                      <a:headEnd type="none" w="med" len="med"/>
-                      <a:tailEnd type="none" w="med" len="med"/>
-                    </a:lnB>
-                  </a:tcPr>
-                </a:tc>
-                <a:tc>
-                  <a:txBody>
-                    <a:bodyPr/>
-                    <a:lstStyle/>
-                    <a:p>
-                      <a:pPr indent="0" marL="0">
-                        <a:buNone/>
-                      </a:pPr>
-                      <a:r>
-                        <a:rPr lang="en-US" sz="1700" dirty="0">
-                          <a:solidFill>
-                            <a:srgbClr val="AEB2BC"/>
-                          </a:solidFill>
-                        </a:rPr>
-                        <a:t>Friday's late show becomes two rows</a:t>
-                      </a:r>
-                      <a:endParaRPr lang="en-US" sz="1700" dirty="0"/>
-                    </a:p>
-                  </a:txBody>
-                  <a:tcPr marL="164592" marR="164592" marT="182880" marB="182880" anchor="t">
-                    <a:lnL w="9525" cap="flat" cmpd="sng" algn="ctr">
-                      <a:solidFill>
-                        <a:srgbClr val="3A3D46"/>
-                      </a:solidFill>
-                      <a:prstDash val="solid"/>
-                      <a:round/>
-                      <a:headEnd type="none" w="med" len="med"/>
-                      <a:tailEnd type="none" w="med" len="med"/>
-                    </a:lnL>
-                    <a:lnR w="9525" cap="flat" cmpd="sng" algn="ctr">
-                      <a:solidFill>
-                        <a:srgbClr val="3A3D46"/>
-                      </a:solidFill>
-                      <a:prstDash val="solid"/>
-                      <a:round/>
-                      <a:headEnd type="none" w="med" len="med"/>
-                      <a:tailEnd type="none" w="med" len="med"/>
-                    </a:lnR>
-                    <a:lnT w="9525" cap="flat" cmpd="sng" algn="ctr">
-                      <a:solidFill>
-                        <a:srgbClr val="3A3D46"/>
-                      </a:solidFill>
-                      <a:prstDash val="solid"/>
-                      <a:round/>
-                      <a:headEnd type="none" w="med" len="med"/>
-                      <a:tailEnd type="none" w="med" len="med"/>
-                    </a:lnT>
-                    <a:lnB w="9525" cap="flat" cmpd="sng" algn="ctr">
-                      <a:solidFill>
-                        <a:srgbClr val="3A3D46"/>
-                      </a:solidFill>
-                      <a:prstDash val="solid"/>
-                      <a:round/>
-                      <a:headEnd type="none" w="med" len="med"/>
-                      <a:tailEnd type="none" w="med" len="med"/>
-                    </a:lnB>
-                  </a:tcPr>
-                </a:tc>
-              </a:tr>
-              <a:tr h="0">
-                <a:tc>
-                  <a:txBody>
-                    <a:bodyPr/>
-                    <a:lstStyle/>
-                    <a:p>
-                      <a:pPr indent="0" marL="0">
-                        <a:buNone/>
-                      </a:pPr>
-                      <a:r>
-                        <a:rPr lang="en-US" sz="1700" b="1" dirty="0">
-                          <a:solidFill>
-                            <a:srgbClr val="FFFFFF"/>
-                          </a:solidFill>
-                        </a:rPr>
-                        <a:t>Co-hosts count the full slot</a:t>
-                      </a:r>
-                      <a:endParaRPr lang="en-US" sz="1700" dirty="0"/>
-                    </a:p>
-                  </a:txBody>
-                  <a:tcPr marL="164592" marR="164592" marT="182880" marB="182880" anchor="t">
-                    <a:lnL w="9525" cap="flat" cmpd="sng" algn="ctr">
-                      <a:solidFill>
-                        <a:srgbClr val="3A3D46"/>
-                      </a:solidFill>
-                      <a:prstDash val="solid"/>
-                      <a:round/>
-                      <a:headEnd type="none" w="med" len="med"/>
-                      <a:tailEnd type="none" w="med" len="med"/>
-                    </a:lnL>
-                    <a:lnR w="9525" cap="flat" cmpd="sng" algn="ctr">
-                      <a:solidFill>
-                        <a:srgbClr val="3A3D46"/>
-                      </a:solidFill>
-                      <a:prstDash val="solid"/>
-                      <a:round/>
-                      <a:headEnd type="none" w="med" len="med"/>
-                      <a:tailEnd type="none" w="med" len="med"/>
-                    </a:lnR>
-                    <a:lnT w="9525" cap="flat" cmpd="sng" algn="ctr">
-                      <a:solidFill>
-                        <a:srgbClr val="3A3D46"/>
-                      </a:solidFill>
-                      <a:prstDash val="solid"/>
-                      <a:round/>
-                      <a:headEnd type="none" w="med" len="med"/>
-                      <a:tailEnd type="none" w="med" len="med"/>
-                    </a:lnT>
-                    <a:lnB w="9525" cap="flat" cmpd="sng" algn="ctr">
-                      <a:solidFill>
-                        <a:srgbClr val="3A3D46"/>
-                      </a:solidFill>
-                      <a:prstDash val="solid"/>
-                      <a:round/>
-                      <a:headEnd type="none" w="med" len="med"/>
-                      <a:tailEnd type="none" w="med" len="med"/>
-                    </a:lnB>
-                  </a:tcPr>
-                </a:tc>
-                <a:tc>
-                  <a:txBody>
-                    <a:bodyPr/>
-                    <a:lstStyle/>
-                    <a:p>
-                      <a:pPr indent="0" marL="0">
-                        <a:buNone/>
-                      </a:pPr>
-                      <a:r>
-                        <a:rPr lang="en-US" sz="1700" dirty="0">
-                          <a:solidFill>
-                            <a:srgbClr val="AEB2BC"/>
-                          </a:solidFill>
-                        </a:rPr>
-                        <a:t>Both of them work the whole slot</a:t>
-                      </a:r>
-                      <a:endParaRPr lang="en-US" sz="1700" dirty="0"/>
-                    </a:p>
-                  </a:txBody>
-                  <a:tcPr marL="164592" marR="164592" marT="182880" marB="182880" anchor="t">
-                    <a:lnL w="9525" cap="flat" cmpd="sng" algn="ctr">
-                      <a:solidFill>
-                        <a:srgbClr val="3A3D46"/>
-                      </a:solidFill>
-                      <a:prstDash val="solid"/>
-                      <a:round/>
-                      <a:headEnd type="none" w="med" len="med"/>
-                      <a:tailEnd type="none" w="med" len="med"/>
-                    </a:lnL>
-                    <a:lnR w="9525" cap="flat" cmpd="sng" algn="ctr">
-                      <a:solidFill>
-                        <a:srgbClr val="3A3D46"/>
-                      </a:solidFill>
-                      <a:prstDash val="solid"/>
-                      <a:round/>
-                      <a:headEnd type="none" w="med" len="med"/>
-                      <a:tailEnd type="none" w="med" len="med"/>
-                    </a:lnR>
-                    <a:lnT w="9525" cap="flat" cmpd="sng" algn="ctr">
-                      <a:solidFill>
-                        <a:srgbClr val="3A3D46"/>
-                      </a:solidFill>
-                      <a:prstDash val="solid"/>
-                      <a:round/>
-                      <a:headEnd type="none" w="med" len="med"/>
-                      <a:tailEnd type="none" w="med" len="med"/>
-                    </a:lnT>
-                    <a:lnB w="9525" cap="flat" cmpd="sng" algn="ctr">
-                      <a:solidFill>
-                        <a:srgbClr val="3A3D46"/>
-                      </a:solidFill>
-                      <a:prstDash val="solid"/>
-                      <a:round/>
-                      <a:headEnd type="none" w="med" len="med"/>
-                      <a:tailEnd type="none" w="med" len="med"/>
-                    </a:lnB>
-                  </a:tcPr>
-                </a:tc>
-                <a:tc>
-                  <a:txBody>
-                    <a:bodyPr/>
-                    <a:lstStyle/>
-                    <a:p>
-                      <a:pPr indent="0" marL="0">
-                        <a:buNone/>
-                      </a:pPr>
-                      <a:r>
-                        <a:rPr lang="en-US" sz="1700" dirty="0">
-                          <a:solidFill>
-                            <a:srgbClr val="AEB2BC"/>
-                          </a:solidFill>
-                        </a:rPr>
-                        <a:t>Per-host totals add up to more than per-station totals</a:t>
-                      </a:r>
-                      <a:endParaRPr lang="en-US" sz="1700" dirty="0"/>
-                    </a:p>
-                  </a:txBody>
-                  <a:tcPr marL="164592" marR="164592" marT="182880" marB="182880" anchor="t">
-                    <a:lnL w="9525" cap="flat" cmpd="sng" algn="ctr">
-                      <a:solidFill>
-                        <a:srgbClr val="3A3D46"/>
-                      </a:solidFill>
-                      <a:prstDash val="solid"/>
-                      <a:round/>
-                      <a:headEnd type="none" w="med" len="med"/>
-                      <a:tailEnd type="none" w="med" len="med"/>
-                    </a:lnL>
-                    <a:lnR w="9525" cap="flat" cmpd="sng" algn="ctr">
-                      <a:solidFill>
-                        <a:srgbClr val="3A3D46"/>
-                      </a:solidFill>
-                      <a:prstDash val="solid"/>
-                      <a:round/>
-                      <a:headEnd type="none" w="med" len="med"/>
-                      <a:tailEnd type="none" w="med" len="med"/>
-                    </a:lnR>
-                    <a:lnT w="9525" cap="flat" cmpd="sng" algn="ctr">
-                      <a:solidFill>
-                        <a:srgbClr val="3A3D46"/>
-                      </a:solidFill>
-                      <a:prstDash val="solid"/>
-                      <a:round/>
-                      <a:headEnd type="none" w="med" len="med"/>
-                      <a:tailEnd type="none" w="med" len="med"/>
-                    </a:lnT>
-                    <a:lnB w="9525" cap="flat" cmpd="sng" algn="ctr">
-                      <a:solidFill>
-                        <a:srgbClr val="3A3D46"/>
-                      </a:solidFill>
-                      <a:prstDash val="solid"/>
-                      <a:round/>
-                      <a:headEnd type="none" w="med" len="med"/>
-                      <a:tailEnd type="none" w="med" len="med"/>
-                    </a:lnB>
-                  </a:tcPr>
-                </a:tc>
-              </a:tr>
-              <a:tr h="0">
-                <a:tc>
-                  <a:txBody>
-                    <a:bodyPr/>
-                    <a:lstStyle/>
-                    <a:p>
-                      <a:pPr indent="0" marL="0">
-                        <a:buNone/>
-                      </a:pPr>
-                      <a:r>
-                        <a:rPr lang="en-US" sz="1700" b="1" dirty="0">
-                          <a:solidFill>
-                            <a:srgbClr val="FFFFFF"/>
-                          </a:solidFill>
-                        </a:rPr>
-                        <a:t>Deactivate, not delete</a:t>
-                      </a:r>
-                      <a:endParaRPr lang="en-US" sz="1700" dirty="0"/>
-                    </a:p>
-                  </a:txBody>
-                  <a:tcPr marL="164592" marR="164592" marT="182880" marB="182880" anchor="t">
-                    <a:lnL w="9525" cap="flat" cmpd="sng" algn="ctr">
-                      <a:solidFill>
-                        <a:srgbClr val="3A3D46"/>
-                      </a:solidFill>
-                      <a:prstDash val="solid"/>
-                      <a:round/>
-                      <a:headEnd type="none" w="med" len="med"/>
-                      <a:tailEnd type="none" w="med" len="med"/>
-                    </a:lnL>
-                    <a:lnR w="9525" cap="flat" cmpd="sng" algn="ctr">
-                      <a:solidFill>
-                        <a:srgbClr val="3A3D46"/>
-                      </a:solidFill>
-                      <a:prstDash val="solid"/>
-                      <a:round/>
-                      <a:headEnd type="none" w="med" len="med"/>
-                      <a:tailEnd type="none" w="med" len="med"/>
-                    </a:lnR>
-                    <a:lnT w="9525" cap="flat" cmpd="sng" algn="ctr">
-                      <a:solidFill>
-                        <a:srgbClr val="3A3D46"/>
-                      </a:solidFill>
-                      <a:prstDash val="solid"/>
-                      <a:round/>
-                      <a:headEnd type="none" w="med" len="med"/>
-                      <a:tailEnd type="none" w="med" len="med"/>
-                    </a:lnT>
-                    <a:lnB w="9525" cap="flat" cmpd="sng" algn="ctr">
-                      <a:solidFill>
-                        <a:srgbClr val="3A3D46"/>
-                      </a:solidFill>
-                      <a:prstDash val="solid"/>
-                      <a:round/>
-                      <a:headEnd type="none" w="med" len="med"/>
-                      <a:tailEnd type="none" w="med" len="med"/>
-                    </a:lnB>
-                  </a:tcPr>
-                </a:tc>
-                <a:tc>
-                  <a:txBody>
-                    <a:bodyPr/>
-                    <a:lstStyle/>
-                    <a:p>
-                      <a:pPr indent="0" marL="0">
-                        <a:buNone/>
-                      </a:pPr>
-                      <a:r>
-                        <a:rPr lang="en-US" sz="1700" dirty="0">
-                          <a:solidFill>
-                            <a:srgbClr val="AEB2BC"/>
-                          </a:solidFill>
-                        </a:rPr>
-                        <a:t>Schedule history stays intact</a:t>
-                      </a:r>
-                      <a:endParaRPr lang="en-US" sz="1700" dirty="0"/>
-                    </a:p>
-                  </a:txBody>
-                  <a:tcPr marL="164592" marR="164592" marT="182880" marB="182880" anchor="t">
-                    <a:lnL w="9525" cap="flat" cmpd="sng" algn="ctr">
-                      <a:solidFill>
-                        <a:srgbClr val="3A3D46"/>
-                      </a:solidFill>
-                      <a:prstDash val="solid"/>
-                      <a:round/>
-                      <a:headEnd type="none" w="med" len="med"/>
-                      <a:tailEnd type="none" w="med" len="med"/>
-                    </a:lnL>
-                    <a:lnR w="9525" cap="flat" cmpd="sng" algn="ctr">
-                      <a:solidFill>
-                        <a:srgbClr val="3A3D46"/>
-                      </a:solidFill>
-                      <a:prstDash val="solid"/>
-                      <a:round/>
-                      <a:headEnd type="none" w="med" len="med"/>
-                      <a:tailEnd type="none" w="med" len="med"/>
-                    </a:lnR>
-                    <a:lnT w="9525" cap="flat" cmpd="sng" algn="ctr">
-                      <a:solidFill>
-                        <a:srgbClr val="3A3D46"/>
-                      </a:solidFill>
-                      <a:prstDash val="solid"/>
-                      <a:round/>
-                      <a:headEnd type="none" w="med" len="med"/>
-                      <a:tailEnd type="none" w="med" len="med"/>
-                    </a:lnT>
-                    <a:lnB w="9525" cap="flat" cmpd="sng" algn="ctr">
-                      <a:solidFill>
-                        <a:srgbClr val="3A3D46"/>
-                      </a:solidFill>
-                      <a:prstDash val="solid"/>
-                      <a:round/>
-                      <a:headEnd type="none" w="med" len="med"/>
-                      <a:tailEnd type="none" w="med" len="med"/>
-                    </a:lnB>
-                  </a:tcPr>
-                </a:tc>
-                <a:tc>
-                  <a:txBody>
-                    <a:bodyPr/>
-                    <a:lstStyle/>
-                    <a:p>
-                      <a:pPr indent="0" marL="0">
-                        <a:buNone/>
-                      </a:pPr>
-                      <a:r>
-                        <a:rPr lang="en-US" sz="1700" dirty="0">
-                          <a:solidFill>
-                            <a:srgbClr val="AEB2BC"/>
-                          </a:solidFill>
-                        </a:rPr>
-                        <a:t>Lists need an active filter</a:t>
-                      </a:r>
-                      <a:endParaRPr lang="en-US" sz="1700" dirty="0"/>
-                    </a:p>
-                  </a:txBody>
-                  <a:tcPr marL="164592" marR="164592" marT="182880" marB="182880" anchor="t">
-                    <a:lnL w="9525" cap="flat" cmpd="sng" algn="ctr">
-                      <a:solidFill>
-                        <a:srgbClr val="3A3D46"/>
-                      </a:solidFill>
-                      <a:prstDash val="solid"/>
-                      <a:round/>
-                      <a:headEnd type="none" w="med" len="med"/>
-                      <a:tailEnd type="none" w="med" len="med"/>
-                    </a:lnL>
-                    <a:lnR w="9525" cap="flat" cmpd="sng" algn="ctr">
-                      <a:solidFill>
-                        <a:srgbClr val="3A3D46"/>
-                      </a:solidFill>
-                      <a:prstDash val="solid"/>
-                      <a:round/>
-                      <a:headEnd type="none" w="med" len="med"/>
-                      <a:tailEnd type="none" w="med" len="med"/>
-                    </a:lnR>
-                    <a:lnT w="9525" cap="flat" cmpd="sng" algn="ctr">
-                      <a:solidFill>
-                        <a:srgbClr val="3A3D46"/>
-                      </a:solidFill>
-                      <a:prstDash val="solid"/>
-                      <a:round/>
-                      <a:headEnd type="none" w="med" len="med"/>
-                      <a:tailEnd type="none" w="med" len="med"/>
-                    </a:lnT>
-                    <a:lnB w="9525" cap="flat" cmpd="sng" algn="ctr">
-                      <a:solidFill>
-                        <a:srgbClr val="3A3D46"/>
-                      </a:solidFill>
-                      <a:prstDash val="solid"/>
-                      <a:round/>
-                      <a:headEnd type="none" w="med" len="med"/>
-                      <a:tailEnd type="none" w="med" len="med"/>
-                    </a:lnB>
-                  </a:tcPr>
-                </a:tc>
-              </a:tr>
-            </a:tbl>
-          </a:graphicData>
-        </a:graphic>
-      </p:graphicFrame>
+      <p:sp>
+        <p:nvSpPr>
+          <p:cNvPr id="4" name="Text 1"/>
+          <p:cNvSpPr txBox="1"/>
+          <p:nvPr/>
+        </p:nvSpPr>
+        <p:spPr>
+          <a:xfrm>
+            <a:off x="548640" y="1691640"/>
+            <a:ext cx="731520" cy="228600"/>
+          </a:xfrm>
+          <a:prstGeom prst="rect">
+            <a:avLst/>
+          </a:prstGeom>
+          <a:noFill/>
+          <a:ln/>
+        </p:spPr>
+        <p:txBody>
+          <a:bodyPr wrap="square" lIns="0" tIns="0" rIns="0" bIns="0" rtlCol="0" anchor="ctr"/>
+          <a:lstStyle/>
+          <a:p>
+            <a:pPr algn="l" indent="0" marL="0">
+              <a:buNone/>
+            </a:pPr>
+            <a:r>
+              <a:rPr lang="en-US" sz="1000" dirty="0">
+                <a:solidFill>
+                  <a:schemeClr val="accent5"/>
+                </a:solidFill>
+              </a:rPr>
+              <a:t>00:00</a:t>
+            </a:r>
+            <a:endParaRPr lang="en-US" sz="1000" dirty="0"/>
+          </a:p>
+        </p:txBody>
+      </p:sp>
+      <p:sp>
+        <p:nvSpPr>
+          <p:cNvPr id="5" name="Text 2"/>
+          <p:cNvSpPr txBox="1"/>
+          <p:nvPr/>
+        </p:nvSpPr>
+        <p:spPr>
+          <a:xfrm>
+            <a:off x="2948940" y="1691640"/>
+            <a:ext cx="731520" cy="228600"/>
+          </a:xfrm>
+          <a:prstGeom prst="rect">
+            <a:avLst/>
+          </a:prstGeom>
+          <a:noFill/>
+          <a:ln/>
+        </p:spPr>
+        <p:txBody>
+          <a:bodyPr wrap="square" lIns="0" tIns="0" rIns="0" bIns="0" rtlCol="0" anchor="ctr"/>
+          <a:lstStyle/>
+          <a:p>
+            <a:pPr algn="ctr" indent="0" marL="0">
+              <a:buNone/>
+            </a:pPr>
+            <a:r>
+              <a:rPr lang="en-US" sz="1000" dirty="0">
+                <a:solidFill>
+                  <a:schemeClr val="accent5"/>
+                </a:solidFill>
+              </a:rPr>
+              <a:t>06:00</a:t>
+            </a:r>
+            <a:endParaRPr lang="en-US" sz="1000" dirty="0"/>
+          </a:p>
+        </p:txBody>
+      </p:sp>
+      <p:sp>
+        <p:nvSpPr>
+          <p:cNvPr id="6" name="Text 3"/>
+          <p:cNvSpPr txBox="1"/>
+          <p:nvPr/>
+        </p:nvSpPr>
+        <p:spPr>
+          <a:xfrm>
+            <a:off x="5715000" y="1691640"/>
+            <a:ext cx="731520" cy="228600"/>
+          </a:xfrm>
+          <a:prstGeom prst="rect">
+            <a:avLst/>
+          </a:prstGeom>
+          <a:noFill/>
+          <a:ln/>
+        </p:spPr>
+        <p:txBody>
+          <a:bodyPr wrap="square" lIns="0" tIns="0" rIns="0" bIns="0" rtlCol="0" anchor="ctr"/>
+          <a:lstStyle/>
+          <a:p>
+            <a:pPr algn="ctr" indent="0" marL="0">
+              <a:buNone/>
+            </a:pPr>
+            <a:r>
+              <a:rPr lang="en-US" sz="1000" dirty="0">
+                <a:solidFill>
+                  <a:schemeClr val="accent5"/>
+                </a:solidFill>
+              </a:rPr>
+              <a:t>12:00</a:t>
+            </a:r>
+            <a:endParaRPr lang="en-US" sz="1000" dirty="0"/>
+          </a:p>
+        </p:txBody>
+      </p:sp>
+      <p:sp>
+        <p:nvSpPr>
+          <p:cNvPr id="7" name="Text 4"/>
+          <p:cNvSpPr txBox="1"/>
+          <p:nvPr/>
+        </p:nvSpPr>
+        <p:spPr>
+          <a:xfrm>
+            <a:off x="8481060" y="1691640"/>
+            <a:ext cx="731520" cy="228600"/>
+          </a:xfrm>
+          <a:prstGeom prst="rect">
+            <a:avLst/>
+          </a:prstGeom>
+          <a:noFill/>
+          <a:ln/>
+        </p:spPr>
+        <p:txBody>
+          <a:bodyPr wrap="square" lIns="0" tIns="0" rIns="0" bIns="0" rtlCol="0" anchor="ctr"/>
+          <a:lstStyle/>
+          <a:p>
+            <a:pPr algn="ctr" indent="0" marL="0">
+              <a:buNone/>
+            </a:pPr>
+            <a:r>
+              <a:rPr lang="en-US" sz="1000" dirty="0">
+                <a:solidFill>
+                  <a:schemeClr val="accent5"/>
+                </a:solidFill>
+              </a:rPr>
+              <a:t>18:00</a:t>
+            </a:r>
+            <a:endParaRPr lang="en-US" sz="1000" dirty="0"/>
+          </a:p>
+        </p:txBody>
+      </p:sp>
+      <p:sp>
+        <p:nvSpPr>
+          <p:cNvPr id="8" name="Text 5"/>
+          <p:cNvSpPr txBox="1"/>
+          <p:nvPr/>
+        </p:nvSpPr>
+        <p:spPr>
+          <a:xfrm>
+            <a:off x="10881360" y="1691640"/>
+            <a:ext cx="731520" cy="228600"/>
+          </a:xfrm>
+          <a:prstGeom prst="rect">
+            <a:avLst/>
+          </a:prstGeom>
+          <a:noFill/>
+          <a:ln/>
+        </p:spPr>
+        <p:txBody>
+          <a:bodyPr wrap="square" lIns="0" tIns="0" rIns="0" bIns="0" rtlCol="0" anchor="ctr"/>
+          <a:lstStyle/>
+          <a:p>
+            <a:pPr algn="r" indent="0" marL="0">
+              <a:buNone/>
+            </a:pPr>
+            <a:r>
+              <a:rPr lang="en-US" sz="1000" dirty="0">
+                <a:solidFill>
+                  <a:schemeClr val="accent5"/>
+                </a:solidFill>
+              </a:rPr>
+              <a:t>24:00</a:t>
+            </a:r>
+            <a:endParaRPr lang="en-US" sz="1000" dirty="0"/>
+          </a:p>
+        </p:txBody>
+      </p:sp>
+      <p:sp>
+        <p:nvSpPr>
+          <p:cNvPr id="9" name="Shape 6"/>
+          <p:cNvSpPr/>
+          <p:nvPr/>
+        </p:nvSpPr>
+        <p:spPr>
+          <a:xfrm>
+            <a:off x="548640" y="2011680"/>
+            <a:ext cx="11064240" cy="594360"/>
+          </a:xfrm>
+          <a:prstGeom prst="roundRect">
+            <a:avLst>
+              <a:gd name="adj" fmla="val 9231"/>
+            </a:avLst>
+          </a:prstGeom>
+          <a:solidFill>
+            <a:schemeClr val="accent4"/>
+          </a:solidFill>
+          <a:ln w="12700">
+            <a:solidFill>
+              <a:schemeClr val="accent4"/>
+            </a:solidFill>
+            <a:prstDash val="solid"/>
+          </a:ln>
+        </p:spPr>
+      </p:sp>
+      <p:sp>
+        <p:nvSpPr>
+          <p:cNvPr id="10" name="Shape 7"/>
+          <p:cNvSpPr/>
+          <p:nvPr/>
+        </p:nvSpPr>
+        <p:spPr>
+          <a:xfrm>
+            <a:off x="3332988" y="2057400"/>
+            <a:ext cx="1807464" cy="502920"/>
+          </a:xfrm>
+          <a:prstGeom prst="roundRect">
+            <a:avLst>
+              <a:gd name="adj" fmla="val 9091"/>
+            </a:avLst>
+          </a:prstGeom>
+          <a:solidFill>
+            <a:schemeClr val="bg1"/>
+          </a:solidFill>
+          <a:ln w="12700">
+            <a:solidFill>
+              <a:schemeClr val="bg1"/>
+            </a:solidFill>
+            <a:prstDash val="solid"/>
+          </a:ln>
+        </p:spPr>
+      </p:sp>
+      <p:sp>
+        <p:nvSpPr>
+          <p:cNvPr id="11" name="Text 8"/>
+          <p:cNvSpPr txBox="1"/>
+          <p:nvPr/>
+        </p:nvSpPr>
+        <p:spPr>
+          <a:xfrm>
+            <a:off x="3369564" y="2011680"/>
+            <a:ext cx="1752600" cy="594360"/>
+          </a:xfrm>
+          <a:prstGeom prst="rect">
+            <a:avLst/>
+          </a:prstGeom>
+          <a:noFill/>
+          <a:ln/>
+        </p:spPr>
+        <p:txBody>
+          <a:bodyPr wrap="square" lIns="0" tIns="0" rIns="0" bIns="0" rtlCol="0" anchor="ctr"/>
+          <a:lstStyle/>
+          <a:p>
+            <a:pPr indent="0" marL="0">
+              <a:buNone/>
+            </a:pPr>
+            <a:r>
+              <a:rPr lang="en-US" sz="1000" dirty="0">
+                <a:solidFill>
+                  <a:schemeClr val="tx1"/>
+                </a:solidFill>
+              </a:rPr>
+              <a:t>Pagi Banten</a:t>
+            </a:r>
+            <a:endParaRPr lang="en-US" sz="1000" dirty="0"/>
+          </a:p>
+        </p:txBody>
+      </p:sp>
+      <p:sp>
+        <p:nvSpPr>
+          <p:cNvPr id="12" name="Shape 9"/>
+          <p:cNvSpPr/>
+          <p:nvPr/>
+        </p:nvSpPr>
+        <p:spPr>
+          <a:xfrm>
+            <a:off x="7943088" y="2057400"/>
+            <a:ext cx="1346454" cy="502920"/>
+          </a:xfrm>
+          <a:prstGeom prst="roundRect">
+            <a:avLst>
+              <a:gd name="adj" fmla="val 9091"/>
+            </a:avLst>
+          </a:prstGeom>
+          <a:solidFill>
+            <a:schemeClr val="bg1"/>
+          </a:solidFill>
+          <a:ln w="12700">
+            <a:solidFill>
+              <a:schemeClr val="bg1"/>
+            </a:solidFill>
+            <a:prstDash val="solid"/>
+          </a:ln>
+        </p:spPr>
+      </p:sp>
+      <p:sp>
+        <p:nvSpPr>
+          <p:cNvPr id="13" name="Text 10"/>
+          <p:cNvSpPr txBox="1"/>
+          <p:nvPr/>
+        </p:nvSpPr>
+        <p:spPr>
+          <a:xfrm>
+            <a:off x="7979664" y="2011680"/>
+            <a:ext cx="1291590" cy="594360"/>
+          </a:xfrm>
+          <a:prstGeom prst="rect">
+            <a:avLst/>
+          </a:prstGeom>
+          <a:noFill/>
+          <a:ln/>
+        </p:spPr>
+        <p:txBody>
+          <a:bodyPr wrap="square" lIns="0" tIns="0" rIns="0" bIns="0" rtlCol="0" anchor="ctr"/>
+          <a:lstStyle/>
+          <a:p>
+            <a:pPr indent="0" marL="0">
+              <a:buNone/>
+            </a:pPr>
+            <a:r>
+              <a:rPr lang="en-US" sz="1000" dirty="0">
+                <a:solidFill>
+                  <a:schemeClr val="tx1"/>
+                </a:solidFill>
+              </a:rPr>
+              <a:t>Jalan Pulang</a:t>
+            </a:r>
+            <a:endParaRPr lang="en-US" sz="1000" dirty="0"/>
+          </a:p>
+        </p:txBody>
+      </p:sp>
+      <p:sp>
+        <p:nvSpPr>
+          <p:cNvPr id="14" name="Shape 11"/>
+          <p:cNvSpPr/>
+          <p:nvPr/>
+        </p:nvSpPr>
+        <p:spPr>
+          <a:xfrm>
+            <a:off x="4467225" y="1901952"/>
+            <a:ext cx="914" cy="813816"/>
+          </a:xfrm>
+          <a:prstGeom prst="line">
+            <a:avLst/>
+          </a:prstGeom>
+          <a:noFill/>
+          <a:ln w="31750">
+            <a:solidFill>
+              <a:schemeClr val="accent1"/>
+            </a:solidFill>
+            <a:prstDash val="solid"/>
+          </a:ln>
+        </p:spPr>
+      </p:sp>
+      <p:sp>
+        <p:nvSpPr>
+          <p:cNvPr id="15" name="Text 12"/>
+          <p:cNvSpPr txBox="1"/>
+          <p:nvPr/>
+        </p:nvSpPr>
+        <p:spPr>
+          <a:xfrm>
+            <a:off x="548640" y="2743200"/>
+            <a:ext cx="11064240" cy="320040"/>
+          </a:xfrm>
+          <a:prstGeom prst="rect">
+            <a:avLst/>
+          </a:prstGeom>
+          <a:noFill/>
+          <a:ln/>
+        </p:spPr>
+        <p:txBody>
+          <a:bodyPr wrap="square" lIns="0" tIns="0" rIns="0" bIns="0" rtlCol="0" anchor="ctr"/>
+          <a:lstStyle/>
+          <a:p>
+            <a:pPr indent="0" marL="0">
+              <a:buNone/>
+            </a:pPr>
+            <a:r>
+              <a:rPr lang="en-US" sz="1300" dirty="0">
+                <a:solidFill>
+                  <a:schemeClr val="bg2"/>
+                </a:solidFill>
+              </a:rPr>
+              <a:t>XChannel Banten, Monday 08:30. Red line = now; grey = automated music.</a:t>
+            </a:r>
+            <a:endParaRPr lang="en-US" sz="1300" dirty="0"/>
+          </a:p>
+        </p:txBody>
+      </p:sp>
+      <p:sp>
+        <p:nvSpPr>
+          <p:cNvPr id="16" name="Shape 13"/>
+          <p:cNvSpPr/>
+          <p:nvPr/>
+        </p:nvSpPr>
+        <p:spPr>
+          <a:xfrm>
+            <a:off x="548640" y="3657600"/>
+            <a:ext cx="640080" cy="640080"/>
+          </a:xfrm>
+          <a:prstGeom prst="ellipse">
+            <a:avLst/>
+          </a:prstGeom>
+          <a:solidFill>
+            <a:schemeClr val="accent1"/>
+          </a:solidFill>
+          <a:ln w="12700">
+            <a:solidFill>
+              <a:schemeClr val="accent1"/>
+            </a:solidFill>
+            <a:prstDash val="solid"/>
+          </a:ln>
+        </p:spPr>
+      </p:sp>
+      <p:pic>
+        <p:nvPicPr>
+          <p:cNvPr id="17" name="Image 0" descr="preencoded.png">    </p:cNvPr>
+          <p:cNvPicPr>
+            <a:picLocks noChangeAspect="1"/>
+          </p:cNvPicPr>
+          <p:nvPr/>
+        </p:nvPicPr>
+        <p:blipFill>
+          <a:blip r:embed="rId1"/>
+          <a:stretch>
+            <a:fillRect/>
+          </a:stretch>
+        </p:blipFill>
+        <p:spPr>
+          <a:xfrm>
+            <a:off x="702259" y="3811219"/>
+            <a:ext cx="332842" cy="332842"/>
+          </a:xfrm>
+          <a:prstGeom prst="rect">
+            <a:avLst/>
+          </a:prstGeom>
+        </p:spPr>
+      </p:pic>
+      <p:sp>
+        <p:nvSpPr>
+          <p:cNvPr id="18" name="Text 14"/>
+          <p:cNvSpPr txBox="1"/>
+          <p:nvPr/>
+        </p:nvSpPr>
+        <p:spPr>
+          <a:xfrm>
+            <a:off x="548640" y="4526280"/>
+            <a:ext cx="3474720" cy="411480"/>
+          </a:xfrm>
+          <a:prstGeom prst="rect">
+            <a:avLst/>
+          </a:prstGeom>
+          <a:noFill/>
+          <a:ln/>
+        </p:spPr>
+        <p:txBody>
+          <a:bodyPr wrap="square" lIns="0" tIns="0" rIns="0" bIns="0" rtlCol="0" anchor="ctr"/>
+          <a:lstStyle/>
+          <a:p>
+            <a:pPr indent="0" marL="0">
+              <a:buNone/>
+            </a:pPr>
+            <a:r>
+              <a:rPr lang="en-US" sz="1800" b="1" dirty="0">
+                <a:solidFill>
+                  <a:schemeClr val="bg1"/>
+                </a:solidFill>
+              </a:rPr>
+              <a:t>On air</a:t>
+            </a:r>
+            <a:endParaRPr lang="en-US" sz="1800" dirty="0"/>
+          </a:p>
+        </p:txBody>
+      </p:sp>
+      <p:sp>
+        <p:nvSpPr>
+          <p:cNvPr id="19" name="Text 15"/>
+          <p:cNvSpPr txBox="1"/>
+          <p:nvPr/>
+        </p:nvSpPr>
+        <p:spPr>
+          <a:xfrm>
+            <a:off x="548640" y="4983480"/>
+            <a:ext cx="3474720" cy="1097280"/>
+          </a:xfrm>
+          <a:prstGeom prst="rect">
+            <a:avLst/>
+          </a:prstGeom>
+          <a:noFill/>
+          <a:ln/>
+        </p:spPr>
+        <p:txBody>
+          <a:bodyPr wrap="square" lIns="0" tIns="0" rIns="0" bIns="0" rtlCol="0" anchor="t"/>
+          <a:lstStyle/>
+          <a:p>
+            <a:pPr indent="0" marL="0">
+              <a:buNone/>
+            </a:pPr>
+            <a:r>
+              <a:rPr lang="en-US" sz="1500" dirty="0">
+                <a:solidFill>
+                  <a:schemeClr val="bg2"/>
+                </a:solidFill>
+              </a:rPr>
+              <a:t>Today's slot with start &lt;= now &lt; end. One indexed query.</a:t>
+            </a:r>
+            <a:endParaRPr lang="en-US" sz="1500" dirty="0"/>
+          </a:p>
+        </p:txBody>
+      </p:sp>
+      <p:sp>
+        <p:nvSpPr>
+          <p:cNvPr id="20" name="Shape 16"/>
+          <p:cNvSpPr/>
+          <p:nvPr/>
+        </p:nvSpPr>
+        <p:spPr>
+          <a:xfrm>
+            <a:off x="4297680" y="3657600"/>
+            <a:ext cx="640080" cy="640080"/>
+          </a:xfrm>
+          <a:prstGeom prst="ellipse">
+            <a:avLst/>
+          </a:prstGeom>
+          <a:solidFill>
+            <a:schemeClr val="accent1"/>
+          </a:solidFill>
+          <a:ln w="12700">
+            <a:solidFill>
+              <a:schemeClr val="accent1"/>
+            </a:solidFill>
+            <a:prstDash val="solid"/>
+          </a:ln>
+        </p:spPr>
+      </p:sp>
+      <p:pic>
+        <p:nvPicPr>
+          <p:cNvPr id="21" name="Image 1" descr="preencoded.png">    </p:cNvPr>
+          <p:cNvPicPr>
+            <a:picLocks noChangeAspect="1"/>
+          </p:cNvPicPr>
+          <p:nvPr/>
+        </p:nvPicPr>
+        <p:blipFill>
+          <a:blip r:embed="rId2"/>
+          <a:stretch>
+            <a:fillRect/>
+          </a:stretch>
+        </p:blipFill>
+        <p:spPr>
+          <a:xfrm>
+            <a:off x="4451299" y="3811219"/>
+            <a:ext cx="332842" cy="332842"/>
+          </a:xfrm>
+          <a:prstGeom prst="rect">
+            <a:avLst/>
+          </a:prstGeom>
+        </p:spPr>
+      </p:pic>
+      <p:sp>
+        <p:nvSpPr>
+          <p:cNvPr id="22" name="Text 17"/>
+          <p:cNvSpPr txBox="1"/>
+          <p:nvPr/>
+        </p:nvSpPr>
+        <p:spPr>
+          <a:xfrm>
+            <a:off x="4297680" y="4526280"/>
+            <a:ext cx="3474720" cy="411480"/>
+          </a:xfrm>
+          <a:prstGeom prst="rect">
+            <a:avLst/>
+          </a:prstGeom>
+          <a:noFill/>
+          <a:ln/>
+        </p:spPr>
+        <p:txBody>
+          <a:bodyPr wrap="square" lIns="0" tIns="0" rIns="0" bIns="0" rtlCol="0" anchor="ctr"/>
+          <a:lstStyle/>
+          <a:p>
+            <a:pPr indent="0" marL="0">
+              <a:buNone/>
+            </a:pPr>
+            <a:r>
+              <a:rPr lang="en-US" sz="1800" b="1" dirty="0">
+                <a:solidFill>
+                  <a:schemeClr val="bg1"/>
+                </a:solidFill>
+              </a:rPr>
+              <a:t>Up next</a:t>
+            </a:r>
+            <a:endParaRPr lang="en-US" sz="1800" dirty="0"/>
+          </a:p>
+        </p:txBody>
+      </p:sp>
+      <p:sp>
+        <p:nvSpPr>
+          <p:cNvPr id="23" name="Text 18"/>
+          <p:cNvSpPr txBox="1"/>
+          <p:nvPr/>
+        </p:nvSpPr>
+        <p:spPr>
+          <a:xfrm>
+            <a:off x="4297680" y="4983480"/>
+            <a:ext cx="3474720" cy="1097280"/>
+          </a:xfrm>
+          <a:prstGeom prst="rect">
+            <a:avLst/>
+          </a:prstGeom>
+          <a:noFill/>
+          <a:ln/>
+        </p:spPr>
+        <p:txBody>
+          <a:bodyPr wrap="square" lIns="0" tIns="0" rIns="0" bIns="0" rtlCol="0" anchor="t"/>
+          <a:lstStyle/>
+          <a:p>
+            <a:pPr indent="0" marL="0">
+              <a:buNone/>
+            </a:pPr>
+            <a:r>
+              <a:rPr lang="en-US" sz="1500" dirty="0">
+                <a:solidFill>
+                  <a:schemeClr val="bg2"/>
+                </a:solidFill>
+              </a:rPr>
+              <a:t>The first slot after now, rolling into the next days for up to a week.</a:t>
+            </a:r>
+            <a:endParaRPr lang="en-US" sz="1500" dirty="0"/>
+          </a:p>
+        </p:txBody>
+      </p:sp>
+      <p:sp>
+        <p:nvSpPr>
+          <p:cNvPr id="24" name="Shape 19"/>
+          <p:cNvSpPr/>
+          <p:nvPr/>
+        </p:nvSpPr>
+        <p:spPr>
+          <a:xfrm>
+            <a:off x="8046720" y="3657600"/>
+            <a:ext cx="640080" cy="640080"/>
+          </a:xfrm>
+          <a:prstGeom prst="ellipse">
+            <a:avLst/>
+          </a:prstGeom>
+          <a:solidFill>
+            <a:schemeClr val="accent1"/>
+          </a:solidFill>
+          <a:ln w="12700">
+            <a:solidFill>
+              <a:schemeClr val="accent1"/>
+            </a:solidFill>
+            <a:prstDash val="solid"/>
+          </a:ln>
+        </p:spPr>
+      </p:sp>
+      <p:pic>
+        <p:nvPicPr>
+          <p:cNvPr id="25" name="Image 2" descr="preencoded.png">    </p:cNvPr>
+          <p:cNvPicPr>
+            <a:picLocks noChangeAspect="1"/>
+          </p:cNvPicPr>
+          <p:nvPr/>
+        </p:nvPicPr>
+        <p:blipFill>
+          <a:blip r:embed="rId3"/>
+          <a:stretch>
+            <a:fillRect/>
+          </a:stretch>
+        </p:blipFill>
+        <p:spPr>
+          <a:xfrm>
+            <a:off x="8200339" y="3811219"/>
+            <a:ext cx="332842" cy="332842"/>
+          </a:xfrm>
+          <a:prstGeom prst="rect">
+            <a:avLst/>
+          </a:prstGeom>
+        </p:spPr>
+      </p:pic>
+      <p:sp>
+        <p:nvSpPr>
+          <p:cNvPr id="26" name="Text 20"/>
+          <p:cNvSpPr txBox="1"/>
+          <p:nvPr/>
+        </p:nvSpPr>
+        <p:spPr>
+          <a:xfrm>
+            <a:off x="8046720" y="4526280"/>
+            <a:ext cx="3474720" cy="411480"/>
+          </a:xfrm>
+          <a:prstGeom prst="rect">
+            <a:avLst/>
+          </a:prstGeom>
+          <a:noFill/>
+          <a:ln/>
+        </p:spPr>
+        <p:txBody>
+          <a:bodyPr wrap="square" lIns="0" tIns="0" rIns="0" bIns="0" rtlCol="0" anchor="ctr"/>
+          <a:lstStyle/>
+          <a:p>
+            <a:pPr indent="0" marL="0">
+              <a:buNone/>
+            </a:pPr>
+            <a:r>
+              <a:rPr lang="en-US" sz="1800" b="1" dirty="0">
+                <a:solidFill>
+                  <a:schemeClr val="bg1"/>
+                </a:solidFill>
+              </a:rPr>
+              <a:t>Empty hours</a:t>
+            </a:r>
+            <a:endParaRPr lang="en-US" sz="1800" dirty="0"/>
+          </a:p>
+        </p:txBody>
+      </p:sp>
+      <p:sp>
+        <p:nvSpPr>
+          <p:cNvPr id="27" name="Text 21"/>
+          <p:cNvSpPr txBox="1"/>
+          <p:nvPr/>
+        </p:nvSpPr>
+        <p:spPr>
+          <a:xfrm>
+            <a:off x="8046720" y="4983480"/>
+            <a:ext cx="3474720" cy="1097280"/>
+          </a:xfrm>
+          <a:prstGeom prst="rect">
+            <a:avLst/>
+          </a:prstGeom>
+          <a:noFill/>
+          <a:ln/>
+        </p:spPr>
+        <p:txBody>
+          <a:bodyPr wrap="square" lIns="0" tIns="0" rIns="0" bIns="0" rtlCol="0" anchor="t"/>
+          <a:lstStyle/>
+          <a:p>
+            <a:pPr indent="0" marL="0">
+              <a:buNone/>
+            </a:pPr>
+            <a:r>
+              <a:rPr lang="en-US" sz="1500" dirty="0">
+                <a:solidFill>
+                  <a:schemeClr val="bg2"/>
+                </a:solidFill>
+              </a:rPr>
+              <a:t>Worked out from the schedule, not stored. Airtime per station out of 168 hours.</a:t>
+            </a:r>
+            <a:endParaRPr lang="en-US" sz="1500" dirty="0"/>
+          </a:p>
+        </p:txBody>
+      </p:sp>
       <p:sp>
         <p:nvSpPr>
           <p:cNvPr id="25" name="Slide Number Placeholder 0"/>
@@ -3777,7 +3612,7 @@
                   <a:schemeClr val="bg1"/>
                 </a:solidFill>
               </a:rPr>
-              <a:t>Why this stack, and what else I considered</a:t>
+              <a:t>Why this stack</a:t>
             </a:r>
             <a:endParaRPr lang="en-US" sz="3200" dirty="0"/>
           </a:p>
@@ -3806,9 +3641,8 @@
             <a:tbl>
               <a:tblPr/>
               <a:tblGrid>
-                <a:gridCol w="2194560"/>
-                <a:gridCol w="3840480"/>
-                <a:gridCol w="5029200"/>
+                <a:gridCol w="3108960"/>
+                <a:gridCol w="7955280"/>
               </a:tblGrid>
               <a:tr h="0">
                 <a:tc>
@@ -3887,67 +3721,6 @@
                           </a:solidFill>
                         </a:rPr>
                         <a:t>Why</a:t>
-                      </a:r>
-                      <a:endParaRPr lang="en-US" sz="1500" dirty="0"/>
-                    </a:p>
-                  </a:txBody>
-                  <a:tcPr marL="164592" marR="164592" marT="182880" marB="182880" anchor="t">
-                    <a:lnL w="9525" cap="flat" cmpd="sng" algn="ctr">
-                      <a:solidFill>
-                        <a:srgbClr val="3A3D46"/>
-                      </a:solidFill>
-                      <a:prstDash val="solid"/>
-                      <a:round/>
-                      <a:headEnd type="none" w="med" len="med"/>
-                      <a:tailEnd type="none" w="med" len="med"/>
-                    </a:lnL>
-                    <a:lnR w="9525" cap="flat" cmpd="sng" algn="ctr">
-                      <a:solidFill>
-                        <a:srgbClr val="3A3D46"/>
-                      </a:solidFill>
-                      <a:prstDash val="solid"/>
-                      <a:round/>
-                      <a:headEnd type="none" w="med" len="med"/>
-                      <a:tailEnd type="none" w="med" len="med"/>
-                    </a:lnR>
-                    <a:lnT w="9525" cap="flat" cmpd="sng" algn="ctr">
-                      <a:solidFill>
-                        <a:srgbClr val="3A3D46"/>
-                      </a:solidFill>
-                      <a:prstDash val="solid"/>
-                      <a:round/>
-                      <a:headEnd type="none" w="med" len="med"/>
-                      <a:tailEnd type="none" w="med" len="med"/>
-                    </a:lnT>
-                    <a:lnB w="9525" cap="flat" cmpd="sng" algn="ctr">
-                      <a:solidFill>
-                        <a:srgbClr val="3A3D46"/>
-                      </a:solidFill>
-                      <a:prstDash val="solid"/>
-                      <a:round/>
-                      <a:headEnd type="none" w="med" len="med"/>
-                      <a:tailEnd type="none" w="med" len="med"/>
-                    </a:lnB>
-                    <a:solidFill>
-                      <a:srgbClr val="25272E"/>
-                    </a:solidFill>
-                  </a:tcPr>
-                </a:tc>
-                <a:tc>
-                  <a:txBody>
-                    <a:bodyPr/>
-                    <a:lstStyle/>
-                    <a:p>
-                      <a:pPr indent="0" marL="0">
-                        <a:buNone/>
-                      </a:pPr>
-                      <a:r>
-                        <a:rPr lang="en-US" sz="1500" b="1" dirty="0">
-                          <a:solidFill>
-                            <a:srgbClr val="E0313E"/>
-                          </a:solidFill>
-                        </a:rPr>
-                        <a:t>What I considered instead</a:t>
                       </a:r>
                       <a:endParaRPr lang="en-US" sz="1500" dirty="0"/>
                     </a:p>
@@ -4112,64 +3885,6 @@
                     </a:lnB>
                   </a:tcPr>
                 </a:tc>
-                <a:tc>
-                  <a:txBody>
-                    <a:bodyPr/>
-                    <a:lstStyle/>
-                    <a:p>
-                      <a:pPr indent="0" marL="0">
-                        <a:buNone/>
-                      </a:pPr>
-                      <a:r>
-                        <a:rPr lang="en-US" sz="1700" dirty="0">
-                          <a:solidFill>
-                            <a:srgbClr val="AEB2BC"/>
-                          </a:solidFill>
-                        </a:rPr>
-                        <a:t>An admin generator (Filament): faster, but the schedule rules end up scattered in config</a:t>
-                      </a:r>
-                      <a:endParaRPr lang="en-US" sz="1700" dirty="0"/>
-                    </a:p>
-                  </a:txBody>
-                  <a:tcPr marL="164592" marR="164592" marT="182880" marB="182880" anchor="t">
-                    <a:lnL w="9525" cap="flat" cmpd="sng" algn="ctr">
-                      <a:solidFill>
-                        <a:srgbClr val="3A3D46"/>
-                      </a:solidFill>
-                      <a:prstDash val="solid"/>
-                      <a:round/>
-                      <a:headEnd type="none" w="med" len="med"/>
-                      <a:tailEnd type="none" w="med" len="med"/>
-                    </a:lnL>
-                    <a:lnR w="9525" cap="flat" cmpd="sng" algn="ctr">
-                      <a:solidFill>
-                        <a:srgbClr val="3A3D46"/>
-                      </a:solidFill>
-                      <a:prstDash val="solid"/>
-                      <a:round/>
-                      <a:headEnd type="none" w="med" len="med"/>
-                      <a:tailEnd type="none" w="med" len="med"/>
-                    </a:lnR>
-                    <a:lnT w="9525" cap="flat" cmpd="sng" algn="ctr">
-                      <a:solidFill>
-                        <a:srgbClr val="3A3D46"/>
-                      </a:solidFill>
-                      <a:prstDash val="solid"/>
-                      <a:round/>
-                      <a:headEnd type="none" w="med" len="med"/>
-                      <a:tailEnd type="none" w="med" len="med"/>
-                    </a:lnT>
-                    <a:lnB w="9525" cap="flat" cmpd="sng" algn="ctr">
-                      <a:solidFill>
-                        <a:srgbClr val="3A3D46"/>
-                      </a:solidFill>
-                      <a:prstDash val="solid"/>
-                      <a:round/>
-                      <a:headEnd type="none" w="med" len="med"/>
-                      <a:tailEnd type="none" w="med" len="med"/>
-                    </a:lnB>
-                  </a:tcPr>
-                </a:tc>
               </a:tr>
               <a:tr h="0">
                 <a:tc>
@@ -4244,65 +3959,7 @@
                             <a:srgbClr val="AEB2BC"/>
                           </a:solidFill>
                         </a:rPr>
-                        <a:t>The production database</a:t>
-                      </a:r>
-                      <a:endParaRPr lang="en-US" sz="1700" dirty="0"/>
-                    </a:p>
-                  </a:txBody>
-                  <a:tcPr marL="164592" marR="164592" marT="182880" marB="182880" anchor="t">
-                    <a:lnL w="9525" cap="flat" cmpd="sng" algn="ctr">
-                      <a:solidFill>
-                        <a:srgbClr val="3A3D46"/>
-                      </a:solidFill>
-                      <a:prstDash val="solid"/>
-                      <a:round/>
-                      <a:headEnd type="none" w="med" len="med"/>
-                      <a:tailEnd type="none" w="med" len="med"/>
-                    </a:lnL>
-                    <a:lnR w="9525" cap="flat" cmpd="sng" algn="ctr">
-                      <a:solidFill>
-                        <a:srgbClr val="3A3D46"/>
-                      </a:solidFill>
-                      <a:prstDash val="solid"/>
-                      <a:round/>
-                      <a:headEnd type="none" w="med" len="med"/>
-                      <a:tailEnd type="none" w="med" len="med"/>
-                    </a:lnR>
-                    <a:lnT w="9525" cap="flat" cmpd="sng" algn="ctr">
-                      <a:solidFill>
-                        <a:srgbClr val="3A3D46"/>
-                      </a:solidFill>
-                      <a:prstDash val="solid"/>
-                      <a:round/>
-                      <a:headEnd type="none" w="med" len="med"/>
-                      <a:tailEnd type="none" w="med" len="med"/>
-                    </a:lnT>
-                    <a:lnB w="9525" cap="flat" cmpd="sng" algn="ctr">
-                      <a:solidFill>
-                        <a:srgbClr val="3A3D46"/>
-                      </a:solidFill>
-                      <a:prstDash val="solid"/>
-                      <a:round/>
-                      <a:headEnd type="none" w="med" len="med"/>
-                      <a:tailEnd type="none" w="med" len="med"/>
-                    </a:lnB>
-                  </a:tcPr>
-                </a:tc>
-                <a:tc>
-                  <a:txBody>
-                    <a:bodyPr/>
-                    <a:lstStyle/>
-                    <a:p>
-                      <a:pPr indent="0" marL="0">
-                        <a:buNone/>
-                      </a:pPr>
-                      <a:r>
-                        <a:rPr lang="en-US" sz="1700" dirty="0">
-                          <a:solidFill>
-                            <a:srgbClr val="AEB2BC"/>
-                          </a:solidFill>
-                        </a:rPr>
-                        <a:t>PostgreSQL has exclusion constraints that could block overlaps in the database. Not used, to match production; the rule lives in a service</a:t>
+                        <a:t>The production database. The same code runs on SQLite (tests) and PostgreSQL (online demo)</a:t>
                       </a:r>
                       <a:endParaRPr lang="en-US" sz="1700" dirty="0"/>
                     </a:p>
@@ -4464,64 +4121,6 @@
                     </a:lnB>
                   </a:tcPr>
                 </a:tc>
-                <a:tc>
-                  <a:txBody>
-                    <a:bodyPr/>
-                    <a:lstStyle/>
-                    <a:p>
-                      <a:pPr indent="0" marL="0">
-                        <a:buNone/>
-                      </a:pPr>
-                      <a:r>
-                        <a:rPr lang="en-US" sz="1700" dirty="0">
-                          <a:solidFill>
-                            <a:srgbClr val="AEB2BC"/>
-                          </a:solidFill>
-                        </a:rPr>
-                        <a:t>Vue or React: not needed for these admin pages</a:t>
-                      </a:r>
-                      <a:endParaRPr lang="en-US" sz="1700" dirty="0"/>
-                    </a:p>
-                  </a:txBody>
-                  <a:tcPr marL="164592" marR="164592" marT="182880" marB="182880" anchor="t">
-                    <a:lnL w="9525" cap="flat" cmpd="sng" algn="ctr">
-                      <a:solidFill>
-                        <a:srgbClr val="3A3D46"/>
-                      </a:solidFill>
-                      <a:prstDash val="solid"/>
-                      <a:round/>
-                      <a:headEnd type="none" w="med" len="med"/>
-                      <a:tailEnd type="none" w="med" len="med"/>
-                    </a:lnL>
-                    <a:lnR w="9525" cap="flat" cmpd="sng" algn="ctr">
-                      <a:solidFill>
-                        <a:srgbClr val="3A3D46"/>
-                      </a:solidFill>
-                      <a:prstDash val="solid"/>
-                      <a:round/>
-                      <a:headEnd type="none" w="med" len="med"/>
-                      <a:tailEnd type="none" w="med" len="med"/>
-                    </a:lnR>
-                    <a:lnT w="9525" cap="flat" cmpd="sng" algn="ctr">
-                      <a:solidFill>
-                        <a:srgbClr val="3A3D46"/>
-                      </a:solidFill>
-                      <a:prstDash val="solid"/>
-                      <a:round/>
-                      <a:headEnd type="none" w="med" len="med"/>
-                      <a:tailEnd type="none" w="med" len="med"/>
-                    </a:lnT>
-                    <a:lnB w="9525" cap="flat" cmpd="sng" algn="ctr">
-                      <a:solidFill>
-                        <a:srgbClr val="3A3D46"/>
-                      </a:solidFill>
-                      <a:prstDash val="solid"/>
-                      <a:round/>
-                      <a:headEnd type="none" w="med" len="med"/>
-                      <a:tailEnd type="none" w="med" len="med"/>
-                    </a:lnB>
-                  </a:tcPr>
-                </a:tc>
               </a:tr>
               <a:tr h="0">
                 <a:tc>
@@ -4597,64 +4196,6 @@
                           </a:solidFill>
                         </a:rPr>
                         <a:t>19 feature tests on the schedule rules</a:t>
-                      </a:r>
-                      <a:endParaRPr lang="en-US" sz="1700" dirty="0"/>
-                    </a:p>
-                  </a:txBody>
-                  <a:tcPr marL="164592" marR="164592" marT="182880" marB="182880" anchor="t">
-                    <a:lnL w="9525" cap="flat" cmpd="sng" algn="ctr">
-                      <a:solidFill>
-                        <a:srgbClr val="3A3D46"/>
-                      </a:solidFill>
-                      <a:prstDash val="solid"/>
-                      <a:round/>
-                      <a:headEnd type="none" w="med" len="med"/>
-                      <a:tailEnd type="none" w="med" len="med"/>
-                    </a:lnL>
-                    <a:lnR w="9525" cap="flat" cmpd="sng" algn="ctr">
-                      <a:solidFill>
-                        <a:srgbClr val="3A3D46"/>
-                      </a:solidFill>
-                      <a:prstDash val="solid"/>
-                      <a:round/>
-                      <a:headEnd type="none" w="med" len="med"/>
-                      <a:tailEnd type="none" w="med" len="med"/>
-                    </a:lnR>
-                    <a:lnT w="9525" cap="flat" cmpd="sng" algn="ctr">
-                      <a:solidFill>
-                        <a:srgbClr val="3A3D46"/>
-                      </a:solidFill>
-                      <a:prstDash val="solid"/>
-                      <a:round/>
-                      <a:headEnd type="none" w="med" len="med"/>
-                      <a:tailEnd type="none" w="med" len="med"/>
-                    </a:lnT>
-                    <a:lnB w="9525" cap="flat" cmpd="sng" algn="ctr">
-                      <a:solidFill>
-                        <a:srgbClr val="3A3D46"/>
-                      </a:solidFill>
-                      <a:prstDash val="solid"/>
-                      <a:round/>
-                      <a:headEnd type="none" w="med" len="med"/>
-                      <a:tailEnd type="none" w="med" len="med"/>
-                    </a:lnB>
-                  </a:tcPr>
-                </a:tc>
-                <a:tc>
-                  <a:txBody>
-                    <a:bodyPr/>
-                    <a:lstStyle/>
-                    <a:p>
-                      <a:pPr indent="0" marL="0">
-                        <a:buNone/>
-                      </a:pPr>
-                      <a:r>
-                        <a:rPr lang="en-US" sz="1700" dirty="0">
-                          <a:solidFill>
-                            <a:srgbClr val="AEB2BC"/>
-                          </a:solidFill>
-                        </a:rPr>
-                        <a:t>Pest: a matter of taste; PHPUnit ships with Laravel 10</a:t>
                       </a:r>
                       <a:endParaRPr lang="en-US" sz="1700" dirty="0"/>
                     </a:p>
@@ -9565,49 +9106,46 @@
                   <a:schemeClr val="bg1"/>
                 </a:solidFill>
               </a:rPr>
-              <a:t>From a table per city to one table</a:t>
+              <a:t>Database structure (ERD)</a:t>
             </a:r>
             <a:endParaRPr lang="en-US" sz="3200" dirty="0"/>
           </a:p>
         </p:txBody>
       </p:sp>
-      <p:sp>
-        <p:nvSpPr>
-          <p:cNvPr id="4" name="panel"/>
-          <p:cNvSpPr/>
-          <p:nvPr/>
-        </p:nvSpPr>
-        <p:spPr>
-          <a:xfrm>
-            <a:off x="548640" y="1691640"/>
-            <a:ext cx="5349240" cy="3794760"/>
-          </a:xfrm>
-          <a:prstGeom prst="roundRect">
-            <a:avLst>
-              <a:gd name="adj" fmla="val 1928"/>
-            </a:avLst>
-          </a:prstGeom>
-          <a:solidFill>
-            <a:schemeClr val="tx2"/>
-          </a:solidFill>
-          <a:ln w="12700">
-            <a:solidFill>
-              <a:schemeClr val="tx2"/>
-            </a:solidFill>
-            <a:prstDash val="solid"/>
-          </a:ln>
-        </p:spPr>
-      </p:sp>
-      <p:sp>
-        <p:nvSpPr>
-          <p:cNvPr id="5" name="Text 2"/>
+      <p:pic>
+        <p:nvPicPr>
+          <p:cNvPr id="4" name="ERD" descr="/workspaces/.xc-work/erd/xchannel-en.png">    </p:cNvPr>
+          <p:cNvPicPr>
+            <a:picLocks noChangeAspect="1"/>
+          </p:cNvPicPr>
+          <p:nvPr/>
+        </p:nvPicPr>
+        <p:blipFill>
+          <a:blip r:embed="rId1"/>
+          <a:stretch>
+            <a:fillRect/>
+          </a:stretch>
+        </p:blipFill>
+        <p:spPr>
+          <a:xfrm>
+            <a:off x="548640" y="1417320"/>
+            <a:ext cx="4793673" cy="4800600"/>
+          </a:xfrm>
+          <a:prstGeom prst="rect">
+            <a:avLst/>
+          </a:prstGeom>
+        </p:spPr>
+      </p:pic>
+      <p:sp>
+        <p:nvSpPr>
+          <p:cNvPr id="5" name="Text 1"/>
           <p:cNvSpPr txBox="1"/>
           <p:nvPr/>
         </p:nvSpPr>
         <p:spPr>
           <a:xfrm>
-            <a:off x="822960" y="1874520"/>
-            <a:ext cx="2743200" cy="365760"/>
+            <a:off x="5753793" y="1417320"/>
+            <a:ext cx="5859087" cy="365760"/>
           </a:xfrm>
           <a:prstGeom prst="rect">
             <a:avLst/>
@@ -9623,220 +9161,255 @@
               <a:buNone/>
             </a:pPr>
             <a:r>
-              <a:rPr lang="en-US" sz="1800" b="1" dirty="0">
+              <a:rPr lang="en-US" sz="1400" b="1" dirty="0">
                 <a:solidFill>
                   <a:schemeClr val="bg1"/>
-                </a:solidFill>
-              </a:rPr>
-              <a:t>Production</a:t>
-            </a:r>
-            <a:endParaRPr lang="en-US" sz="1800" dirty="0"/>
-          </a:p>
-        </p:txBody>
-      </p:sp>
-      <p:sp>
-        <p:nvSpPr>
-          <p:cNvPr id="6" name="pill"/>
-          <p:cNvSpPr/>
-          <p:nvPr/>
-        </p:nvSpPr>
-        <p:spPr>
-          <a:xfrm>
-            <a:off x="4581144" y="1920240"/>
-            <a:ext cx="1042416" cy="274320"/>
-          </a:xfrm>
-          <a:prstGeom prst="roundRect">
-            <a:avLst>
-              <a:gd name="adj" fmla="val 50000"/>
-            </a:avLst>
-          </a:prstGeom>
-          <a:solidFill>
-            <a:schemeClr val="accent2"/>
-          </a:solidFill>
-          <a:ln w="12700">
-            <a:solidFill>
-              <a:schemeClr val="accent2"/>
-            </a:solidFill>
-            <a:prstDash val="solid"/>
-          </a:ln>
-        </p:spPr>
-      </p:sp>
-      <p:sp>
-        <p:nvSpPr>
-          <p:cNvPr id="7" name="Text 4"/>
-          <p:cNvSpPr txBox="1"/>
-          <p:nvPr/>
-        </p:nvSpPr>
-        <p:spPr>
-          <a:xfrm>
-            <a:off x="4581144" y="1920240"/>
-            <a:ext cx="1042416" cy="274320"/>
-          </a:xfrm>
-          <a:prstGeom prst="rect">
-            <a:avLst/>
-          </a:prstGeom>
-          <a:noFill/>
-          <a:ln/>
-        </p:spPr>
-        <p:txBody>
-          <a:bodyPr wrap="square" lIns="0" tIns="0" rIns="0" bIns="0" rtlCol="0" anchor="ctr"/>
-          <a:lstStyle/>
-          <a:p>
-            <a:pPr algn="ctr" indent="0" marL="0">
-              <a:buNone/>
-            </a:pPr>
-            <a:r>
-              <a:rPr lang="en-US" sz="1000" b="1" spc="150" kern="0" dirty="0">
-                <a:solidFill>
-                  <a:schemeClr val="tx1"/>
-                </a:solidFill>
-              </a:rPr>
-              <a:t>7 TABLES</a:t>
-            </a:r>
-            <a:endParaRPr lang="en-US" sz="1000" dirty="0"/>
-          </a:p>
-        </p:txBody>
-      </p:sp>
-      <p:sp>
-        <p:nvSpPr>
-          <p:cNvPr id="8" name="Text 5"/>
-          <p:cNvSpPr txBox="1"/>
-          <p:nvPr/>
-        </p:nvSpPr>
-        <p:spPr>
-          <a:xfrm>
-            <a:off x="822960" y="2423160"/>
-            <a:ext cx="4846320" cy="2103120"/>
-          </a:xfrm>
-          <a:prstGeom prst="rect">
-            <a:avLst/>
-          </a:prstGeom>
-          <a:noFill/>
-          <a:ln/>
-        </p:spPr>
-        <p:txBody>
-          <a:bodyPr wrap="square" lIns="0" tIns="0" rIns="0" bIns="0" rtlCol="0" anchor="t"/>
-          <a:lstStyle/>
-          <a:p>
-            <a:pPr indent="0" marL="0">
-              <a:buNone/>
-            </a:pPr>
-            <a:r>
-              <a:rPr lang="en-US" sz="1200" dirty="0">
-                <a:solidFill>
-                  <a:schemeClr val="accent6"/>
                 </a:solidFill>
                 <a:latin typeface="Courier New" pitchFamily="34" charset="0"/>
                 <a:ea typeface="Courier New" pitchFamily="34" charset="-122"/>
                 <a:cs typeface="Courier New" pitchFamily="34" charset="-120"/>
               </a:rPr>
-              <a:t>radio.api_jadwal = 'jadwal_radio_woman'</a:t>
-            </a:r>
-            <a:endParaRPr lang="en-US" sz="1200" dirty="0"/>
-          </a:p>
-          <a:p>
-            <a:pPr indent="0" marL="0">
-              <a:buNone/>
-            </a:pPr>
-            <a:endParaRPr lang="en-US" sz="1200" dirty="0"/>
-          </a:p>
-          <a:p>
-            <a:pPr indent="0" marL="0">
-              <a:buNone/>
-            </a:pPr>
-            <a:r>
-              <a:rPr lang="en-US" sz="1200" dirty="0">
-                <a:solidFill>
-                  <a:schemeClr val="accent6"/>
+              <a:t>schedule_slots</a:t>
+            </a:r>
+            <a:endParaRPr lang="en-US" sz="1400" dirty="0"/>
+          </a:p>
+        </p:txBody>
+      </p:sp>
+      <p:sp>
+        <p:nvSpPr>
+          <p:cNvPr id="6" name="Text 2"/>
+          <p:cNvSpPr txBox="1"/>
+          <p:nvPr/>
+        </p:nvSpPr>
+        <p:spPr>
+          <a:xfrm>
+            <a:off x="5753793" y="1801368"/>
+            <a:ext cx="5859087" cy="731520"/>
+          </a:xfrm>
+          <a:prstGeom prst="rect">
+            <a:avLst/>
+          </a:prstGeom>
+          <a:noFill/>
+          <a:ln/>
+        </p:spPr>
+        <p:txBody>
+          <a:bodyPr wrap="square" lIns="0" tIns="0" rIns="0" bIns="0" rtlCol="0" anchor="t"/>
+          <a:lstStyle/>
+          <a:p>
+            <a:pPr indent="0" marL="0">
+              <a:buNone/>
+            </a:pPr>
+            <a:r>
+              <a:rPr lang="en-US" sz="1400" dirty="0">
+                <a:solidFill>
+                  <a:schemeClr val="bg2"/>
+                </a:solidFill>
+              </a:rPr>
+              <a:t>One row = one show, one day, one station.</a:t>
+            </a:r>
+            <a:endParaRPr lang="en-US" sz="1400" dirty="0"/>
+          </a:p>
+        </p:txBody>
+      </p:sp>
+      <p:sp>
+        <p:nvSpPr>
+          <p:cNvPr id="7" name="Text 3"/>
+          <p:cNvSpPr txBox="1"/>
+          <p:nvPr/>
+        </p:nvSpPr>
+        <p:spPr>
+          <a:xfrm>
+            <a:off x="5753793" y="2606040"/>
+            <a:ext cx="5859087" cy="365760"/>
+          </a:xfrm>
+          <a:prstGeom prst="rect">
+            <a:avLst/>
+          </a:prstGeom>
+          <a:noFill/>
+          <a:ln/>
+        </p:spPr>
+        <p:txBody>
+          <a:bodyPr wrap="square" lIns="0" tIns="0" rIns="0" bIns="0" rtlCol="0" anchor="ctr"/>
+          <a:lstStyle/>
+          <a:p>
+            <a:pPr indent="0" marL="0">
+              <a:buNone/>
+            </a:pPr>
+            <a:r>
+              <a:rPr lang="en-US" sz="1400" b="1" dirty="0">
+                <a:solidFill>
+                  <a:schemeClr val="bg1"/>
                 </a:solidFill>
                 <a:latin typeface="Courier New" pitchFamily="34" charset="0"/>
                 <a:ea typeface="Courier New" pitchFamily="34" charset="-122"/>
                 <a:cs typeface="Courier New" pitchFamily="34" charset="-120"/>
               </a:rPr>
-              <a:t>jdwl_radio_bandung</a:t>
-            </a:r>
-            <a:endParaRPr lang="en-US" sz="1200" dirty="0"/>
-          </a:p>
-          <a:p>
-            <a:pPr indent="0" marL="0">
-              <a:buNone/>
-            </a:pPr>
-            <a:r>
-              <a:rPr lang="en-US" sz="1200" dirty="0">
-                <a:solidFill>
-                  <a:schemeClr val="accent6"/>
+              <a:t>starts_at, ends_at</a:t>
+            </a:r>
+            <a:endParaRPr lang="en-US" sz="1400" dirty="0"/>
+          </a:p>
+        </p:txBody>
+      </p:sp>
+      <p:sp>
+        <p:nvSpPr>
+          <p:cNvPr id="8" name="Text 4"/>
+          <p:cNvSpPr txBox="1"/>
+          <p:nvPr/>
+        </p:nvSpPr>
+        <p:spPr>
+          <a:xfrm>
+            <a:off x="5753793" y="2990088"/>
+            <a:ext cx="5859087" cy="731520"/>
+          </a:xfrm>
+          <a:prstGeom prst="rect">
+            <a:avLst/>
+          </a:prstGeom>
+          <a:noFill/>
+          <a:ln/>
+        </p:spPr>
+        <p:txBody>
+          <a:bodyPr wrap="square" lIns="0" tIns="0" rIns="0" bIns="0" rtlCol="0" anchor="t"/>
+          <a:lstStyle/>
+          <a:p>
+            <a:pPr indent="0" marL="0">
+              <a:buNone/>
+            </a:pPr>
+            <a:r>
+              <a:rPr lang="en-US" sz="1400" dirty="0">
+                <a:solidFill>
+                  <a:schemeClr val="bg2"/>
+                </a:solidFill>
+              </a:rPr>
+              <a:t>Minutes since 00:00, from 0 to 1440.</a:t>
+            </a:r>
+            <a:endParaRPr lang="en-US" sz="1400" dirty="0"/>
+          </a:p>
+        </p:txBody>
+      </p:sp>
+      <p:sp>
+        <p:nvSpPr>
+          <p:cNvPr id="9" name="Text 5"/>
+          <p:cNvSpPr txBox="1"/>
+          <p:nvPr/>
+        </p:nvSpPr>
+        <p:spPr>
+          <a:xfrm>
+            <a:off x="5753793" y="3794760"/>
+            <a:ext cx="5859087" cy="365760"/>
+          </a:xfrm>
+          <a:prstGeom prst="rect">
+            <a:avLst/>
+          </a:prstGeom>
+          <a:noFill/>
+          <a:ln/>
+        </p:spPr>
+        <p:txBody>
+          <a:bodyPr wrap="square" lIns="0" tIns="0" rIns="0" bIns="0" rtlCol="0" anchor="ctr"/>
+          <a:lstStyle/>
+          <a:p>
+            <a:pPr indent="0" marL="0">
+              <a:buNone/>
+            </a:pPr>
+            <a:r>
+              <a:rPr lang="en-US" sz="1400" b="1" dirty="0">
+                <a:solidFill>
+                  <a:schemeClr val="bg1"/>
                 </a:solidFill>
                 <a:latin typeface="Courier New" pitchFamily="34" charset="0"/>
                 <a:ea typeface="Courier New" pitchFamily="34" charset="-122"/>
                 <a:cs typeface="Courier New" pitchFamily="34" charset="-120"/>
               </a:rPr>
-              <a:t>jdwl_radio_surabaya</a:t>
-            </a:r>
-            <a:endParaRPr lang="en-US" sz="1200" dirty="0"/>
-          </a:p>
-          <a:p>
-            <a:pPr indent="0" marL="0">
-              <a:buNone/>
-            </a:pPr>
-            <a:r>
-              <a:rPr lang="en-US" sz="1200" dirty="0">
-                <a:solidFill>
-                  <a:schemeClr val="accent6"/>
+              <a:t>host_show</a:t>
+            </a:r>
+            <a:endParaRPr lang="en-US" sz="1400" dirty="0"/>
+          </a:p>
+        </p:txBody>
+      </p:sp>
+      <p:sp>
+        <p:nvSpPr>
+          <p:cNvPr id="10" name="Text 6"/>
+          <p:cNvSpPr txBox="1"/>
+          <p:nvPr/>
+        </p:nvSpPr>
+        <p:spPr>
+          <a:xfrm>
+            <a:off x="5753793" y="4178808"/>
+            <a:ext cx="5859087" cy="731520"/>
+          </a:xfrm>
+          <a:prstGeom prst="rect">
+            <a:avLst/>
+          </a:prstGeom>
+          <a:noFill/>
+          <a:ln/>
+        </p:spPr>
+        <p:txBody>
+          <a:bodyPr wrap="square" lIns="0" tIns="0" rIns="0" bIns="0" rtlCol="0" anchor="t"/>
+          <a:lstStyle/>
+          <a:p>
+            <a:pPr indent="0" marL="0">
+              <a:buNone/>
+            </a:pPr>
+            <a:r>
+              <a:rPr lang="en-US" sz="1400" dirty="0">
+                <a:solidFill>
+                  <a:schemeClr val="bg2"/>
+                </a:solidFill>
+              </a:rPr>
+              <a:t>Many-to-many between shows and hosts.</a:t>
+            </a:r>
+            <a:endParaRPr lang="en-US" sz="1400" dirty="0"/>
+          </a:p>
+        </p:txBody>
+      </p:sp>
+      <p:sp>
+        <p:nvSpPr>
+          <p:cNvPr id="11" name="Text 7"/>
+          <p:cNvSpPr txBox="1"/>
+          <p:nvPr/>
+        </p:nvSpPr>
+        <p:spPr>
+          <a:xfrm>
+            <a:off x="5753793" y="4983480"/>
+            <a:ext cx="5859087" cy="365760"/>
+          </a:xfrm>
+          <a:prstGeom prst="rect">
+            <a:avLst/>
+          </a:prstGeom>
+          <a:noFill/>
+          <a:ln/>
+        </p:spPr>
+        <p:txBody>
+          <a:bodyPr wrap="square" lIns="0" tIns="0" rIns="0" bIns="0" rtlCol="0" anchor="ctr"/>
+          <a:lstStyle/>
+          <a:p>
+            <a:pPr indent="0" marL="0">
+              <a:buNone/>
+            </a:pPr>
+            <a:r>
+              <a:rPr lang="en-US" sz="1400" b="1" dirty="0">
+                <a:solidFill>
+                  <a:schemeClr val="bg1"/>
                 </a:solidFill>
                 <a:latin typeface="Courier New" pitchFamily="34" charset="0"/>
                 <a:ea typeface="Courier New" pitchFamily="34" charset="-122"/>
                 <a:cs typeface="Courier New" pitchFamily="34" charset="-120"/>
               </a:rPr>
-              <a:t>jdwl_radio_suramadu  ...</a:t>
-            </a:r>
-            <a:endParaRPr lang="en-US" sz="1200" dirty="0"/>
-          </a:p>
-          <a:p>
-            <a:pPr indent="0" marL="0">
-              <a:buNone/>
-            </a:pPr>
-            <a:r>
-              <a:rPr lang="en-US" sz="1200" dirty="0">
-                <a:solidFill>
-                  <a:schemeClr val="accent6"/>
-                </a:solidFill>
-                <a:latin typeface="Courier New" pitchFamily="34" charset="0"/>
-                <a:ea typeface="Courier New" pitchFamily="34" charset="-122"/>
-                <a:cs typeface="Courier New" pitchFamily="34" charset="-120"/>
-              </a:rPr>
-              <a:t>  judul_siaran, hari_siaran,</a:t>
-            </a:r>
-            <a:endParaRPr lang="en-US" sz="1200" dirty="0"/>
-          </a:p>
-          <a:p>
-            <a:pPr indent="0" marL="0">
-              <a:buNone/>
-            </a:pPr>
-            <a:r>
-              <a:rPr lang="en-US" sz="1200" dirty="0">
-                <a:solidFill>
-                  <a:schemeClr val="accent6"/>
-                </a:solidFill>
-                <a:latin typeface="Courier New" pitchFamily="34" charset="0"/>
-                <a:ea typeface="Courier New" pitchFamily="34" charset="-122"/>
-                <a:cs typeface="Courier New" pitchFamily="34" charset="-120"/>
-              </a:rPr>
-              <a:t>  waktu_siaran, penyiar (text)</a:t>
-            </a:r>
-            <a:endParaRPr lang="en-US" sz="1200" dirty="0"/>
-          </a:p>
-        </p:txBody>
-      </p:sp>
-      <p:sp>
-        <p:nvSpPr>
-          <p:cNvPr id="9" name="Text 6"/>
+              <a:t>Foreign key</a:t>
+            </a:r>
+            <a:endParaRPr lang="en-US" sz="1400" dirty="0"/>
+          </a:p>
+        </p:txBody>
+      </p:sp>
+      <p:sp>
+        <p:nvSpPr>
+          <p:cNvPr id="12" name="Text 8"/>
           <p:cNvSpPr txBox="1"/>
           <p:nvPr/>
         </p:nvSpPr>
         <p:spPr>
           <a:xfrm>
-            <a:off x="822960" y="4572000"/>
-            <a:ext cx="4846320" cy="822960"/>
+            <a:off x="5753793" y="5367528"/>
+            <a:ext cx="5859087" cy="731520"/>
           </a:xfrm>
           <a:prstGeom prst="rect">
             <a:avLst/>
@@ -9852,323 +9425,12 @@
               <a:buNone/>
             </a:pPr>
             <a:r>
-              <a:rPr lang="en-US" sz="1300" dirty="0">
+              <a:rPr lang="en-US" sz="1400" dirty="0">
                 <a:solidFill>
                   <a:schemeClr val="bg2"/>
                 </a:solidFill>
               </a:rPr>
-              <a:t>A new station means a new table. One name in api_jadwal does not match the real table.</a:t>
-            </a:r>
-            <a:endParaRPr lang="en-US" sz="1300" dirty="0"/>
-          </a:p>
-        </p:txBody>
-      </p:sp>
-      <p:sp>
-        <p:nvSpPr>
-          <p:cNvPr id="10" name="panel"/>
-          <p:cNvSpPr/>
-          <p:nvPr/>
-        </p:nvSpPr>
-        <p:spPr>
-          <a:xfrm>
-            <a:off x="6263640" y="1691640"/>
-            <a:ext cx="5349240" cy="3794760"/>
-          </a:xfrm>
-          <a:prstGeom prst="roundRect">
-            <a:avLst>
-              <a:gd name="adj" fmla="val 1928"/>
-            </a:avLst>
-          </a:prstGeom>
-          <a:solidFill>
-            <a:schemeClr val="tx2"/>
-          </a:solidFill>
-          <a:ln w="12700">
-            <a:solidFill>
-              <a:schemeClr val="tx2"/>
-            </a:solidFill>
-            <a:prstDash val="solid"/>
-          </a:ln>
-        </p:spPr>
-      </p:sp>
-      <p:sp>
-        <p:nvSpPr>
-          <p:cNvPr id="11" name="Text 8"/>
-          <p:cNvSpPr txBox="1"/>
-          <p:nvPr/>
-        </p:nvSpPr>
-        <p:spPr>
-          <a:xfrm>
-            <a:off x="6537960" y="1874520"/>
-            <a:ext cx="2743200" cy="365760"/>
-          </a:xfrm>
-          <a:prstGeom prst="rect">
-            <a:avLst/>
-          </a:prstGeom>
-          <a:noFill/>
-          <a:ln/>
-        </p:spPr>
-        <p:txBody>
-          <a:bodyPr wrap="square" lIns="0" tIns="0" rIns="0" bIns="0" rtlCol="0" anchor="ctr"/>
-          <a:lstStyle/>
-          <a:p>
-            <a:pPr indent="0" marL="0">
-              <a:buNone/>
-            </a:pPr>
-            <a:r>
-              <a:rPr lang="en-US" sz="1800" b="1" dirty="0">
-                <a:solidFill>
-                  <a:schemeClr val="bg1"/>
-                </a:solidFill>
-              </a:rPr>
-              <a:t>Demo</a:t>
-            </a:r>
-            <a:endParaRPr lang="en-US" sz="1800" dirty="0"/>
-          </a:p>
-        </p:txBody>
-      </p:sp>
-      <p:sp>
-        <p:nvSpPr>
-          <p:cNvPr id="12" name="pill"/>
-          <p:cNvSpPr/>
-          <p:nvPr/>
-        </p:nvSpPr>
-        <p:spPr>
-          <a:xfrm>
-            <a:off x="10392156" y="1920240"/>
-            <a:ext cx="946404" cy="274320"/>
-          </a:xfrm>
-          <a:prstGeom prst="roundRect">
-            <a:avLst>
-              <a:gd name="adj" fmla="val 50000"/>
-            </a:avLst>
-          </a:prstGeom>
-          <a:solidFill>
-            <a:schemeClr val="accent3"/>
-          </a:solidFill>
-          <a:ln w="12700">
-            <a:solidFill>
-              <a:schemeClr val="accent3"/>
-            </a:solidFill>
-            <a:prstDash val="solid"/>
-          </a:ln>
-        </p:spPr>
-      </p:sp>
-      <p:sp>
-        <p:nvSpPr>
-          <p:cNvPr id="13" name="Text 10"/>
-          <p:cNvSpPr txBox="1"/>
-          <p:nvPr/>
-        </p:nvSpPr>
-        <p:spPr>
-          <a:xfrm>
-            <a:off x="10392156" y="1920240"/>
-            <a:ext cx="946404" cy="274320"/>
-          </a:xfrm>
-          <a:prstGeom prst="rect">
-            <a:avLst/>
-          </a:prstGeom>
-          <a:noFill/>
-          <a:ln/>
-        </p:spPr>
-        <p:txBody>
-          <a:bodyPr wrap="square" lIns="0" tIns="0" rIns="0" bIns="0" rtlCol="0" anchor="ctr"/>
-          <a:lstStyle/>
-          <a:p>
-            <a:pPr algn="ctr" indent="0" marL="0">
-              <a:buNone/>
-            </a:pPr>
-            <a:r>
-              <a:rPr lang="en-US" sz="1000" b="1" spc="150" kern="0" dirty="0">
-                <a:solidFill>
-                  <a:schemeClr val="tx1"/>
-                </a:solidFill>
-              </a:rPr>
-              <a:t>1 TABLE</a:t>
-            </a:r>
-            <a:endParaRPr lang="en-US" sz="1000" dirty="0"/>
-          </a:p>
-        </p:txBody>
-      </p:sp>
-      <p:sp>
-        <p:nvSpPr>
-          <p:cNvPr id="14" name="Text 11"/>
-          <p:cNvSpPr txBox="1"/>
-          <p:nvPr/>
-        </p:nvSpPr>
-        <p:spPr>
-          <a:xfrm>
-            <a:off x="6537960" y="2423160"/>
-            <a:ext cx="4846320" cy="2103120"/>
-          </a:xfrm>
-          <a:prstGeom prst="rect">
-            <a:avLst/>
-          </a:prstGeom>
-          <a:noFill/>
-          <a:ln/>
-        </p:spPr>
-        <p:txBody>
-          <a:bodyPr wrap="square" lIns="0" tIns="0" rIns="0" bIns="0" rtlCol="0" anchor="t"/>
-          <a:lstStyle/>
-          <a:p>
-            <a:pPr indent="0" marL="0">
-              <a:buNone/>
-            </a:pPr>
-            <a:r>
-              <a:rPr lang="en-US" sz="1200" dirty="0">
-                <a:solidFill>
-                  <a:schemeClr val="accent6"/>
-                </a:solidFill>
-                <a:latin typeface="Courier New" pitchFamily="34" charset="0"/>
-                <a:ea typeface="Courier New" pitchFamily="34" charset="-122"/>
-                <a:cs typeface="Courier New" pitchFamily="34" charset="-120"/>
-              </a:rPr>
-              <a:t>schedule_slots</a:t>
-            </a:r>
-            <a:endParaRPr lang="en-US" sz="1200" dirty="0"/>
-          </a:p>
-          <a:p>
-            <a:pPr indent="0" marL="0">
-              <a:buNone/>
-            </a:pPr>
-            <a:r>
-              <a:rPr lang="en-US" sz="1200" dirty="0">
-                <a:solidFill>
-                  <a:schemeClr val="accent6"/>
-                </a:solidFill>
-                <a:latin typeface="Courier New" pitchFamily="34" charset="0"/>
-                <a:ea typeface="Courier New" pitchFamily="34" charset="-122"/>
-                <a:cs typeface="Courier New" pitchFamily="34" charset="-120"/>
-              </a:rPr>
-              <a:t>  station_id  -&gt; stations</a:t>
-            </a:r>
-            <a:endParaRPr lang="en-US" sz="1200" dirty="0"/>
-          </a:p>
-          <a:p>
-            <a:pPr indent="0" marL="0">
-              <a:buNone/>
-            </a:pPr>
-            <a:r>
-              <a:rPr lang="en-US" sz="1200" dirty="0">
-                <a:solidFill>
-                  <a:schemeClr val="accent6"/>
-                </a:solidFill>
-                <a:latin typeface="Courier New" pitchFamily="34" charset="0"/>
-                <a:ea typeface="Courier New" pitchFamily="34" charset="-122"/>
-                <a:cs typeface="Courier New" pitchFamily="34" charset="-120"/>
-              </a:rPr>
-              <a:t>  show_id     -&gt; shows</a:t>
-            </a:r>
-            <a:endParaRPr lang="en-US" sz="1200" dirty="0"/>
-          </a:p>
-          <a:p>
-            <a:pPr indent="0" marL="0">
-              <a:buNone/>
-            </a:pPr>
-            <a:r>
-              <a:rPr lang="en-US" sz="1200" dirty="0">
-                <a:solidFill>
-                  <a:schemeClr val="accent6"/>
-                </a:solidFill>
-                <a:latin typeface="Courier New" pitchFamily="34" charset="0"/>
-                <a:ea typeface="Courier New" pitchFamily="34" charset="-122"/>
-                <a:cs typeface="Courier New" pitchFamily="34" charset="-120"/>
-              </a:rPr>
-              <a:t>  day_of_week, starts_at, ends_at</a:t>
-            </a:r>
-            <a:endParaRPr lang="en-US" sz="1200" dirty="0"/>
-          </a:p>
-          <a:p>
-            <a:pPr indent="0" marL="0">
-              <a:buNone/>
-            </a:pPr>
-            <a:endParaRPr lang="en-US" sz="1200" dirty="0"/>
-          </a:p>
-          <a:p>
-            <a:pPr indent="0" marL="0">
-              <a:buNone/>
-            </a:pPr>
-            <a:r>
-              <a:rPr lang="en-US" sz="1200" dirty="0">
-                <a:solidFill>
-                  <a:schemeClr val="accent6"/>
-                </a:solidFill>
-                <a:latin typeface="Courier New" pitchFamily="34" charset="0"/>
-                <a:ea typeface="Courier New" pitchFamily="34" charset="-122"/>
-                <a:cs typeface="Courier New" pitchFamily="34" charset="-120"/>
-              </a:rPr>
-              <a:t>host_show (show_id, host_id)</a:t>
-            </a:r>
-            <a:endParaRPr lang="en-US" sz="1200" dirty="0"/>
-          </a:p>
-        </p:txBody>
-      </p:sp>
-      <p:sp>
-        <p:nvSpPr>
-          <p:cNvPr id="15" name="Text 12"/>
-          <p:cNvSpPr txBox="1"/>
-          <p:nvPr/>
-        </p:nvSpPr>
-        <p:spPr>
-          <a:xfrm>
-            <a:off x="6537960" y="4572000"/>
-            <a:ext cx="4846320" cy="822960"/>
-          </a:xfrm>
-          <a:prstGeom prst="rect">
-            <a:avLst/>
-          </a:prstGeom>
-          <a:noFill/>
-          <a:ln/>
-        </p:spPr>
-        <p:txBody>
-          <a:bodyPr wrap="square" lIns="0" tIns="0" rIns="0" bIns="0" rtlCol="0" anchor="t"/>
-          <a:lstStyle/>
-          <a:p>
-            <a:pPr indent="0" marL="0">
-              <a:buNone/>
-            </a:pPr>
-            <a:r>
-              <a:rPr lang="en-US" sz="1300" dirty="0">
-                <a:solidFill>
-                  <a:schemeClr val="bg2"/>
-                </a:solidFill>
-              </a:rPr>
-              <a:t>A new station is one row. Foreign keys keep it consistent.</a:t>
-            </a:r>
-            <a:endParaRPr lang="en-US" sz="1300" dirty="0"/>
-          </a:p>
-        </p:txBody>
-      </p:sp>
-      <p:sp>
-        <p:nvSpPr>
-          <p:cNvPr id="16" name="Text 13"/>
-          <p:cNvSpPr txBox="1"/>
-          <p:nvPr/>
-        </p:nvSpPr>
-        <p:spPr>
-          <a:xfrm>
-            <a:off x="548640" y="5669280"/>
-            <a:ext cx="11064240" cy="457200"/>
-          </a:xfrm>
-          <a:prstGeom prst="rect">
-            <a:avLst/>
-          </a:prstGeom>
-          <a:noFill/>
-          <a:ln/>
-        </p:spPr>
-        <p:txBody>
-          <a:bodyPr wrap="square" lIns="0" tIns="0" rIns="0" bIns="0" rtlCol="0" anchor="ctr"/>
-          <a:lstStyle/>
-          <a:p>
-            <a:pPr indent="0" marL="0">
-              <a:buNone/>
-            </a:pPr>
-            <a:r>
-              <a:rPr lang="en-US" sz="1400" dirty="0">
-                <a:solidFill>
-                  <a:schemeClr val="bg1"/>
-                </a:solidFill>
-              </a:rPr>
-              <a:t>No-downtime migration: fill the new table from the old ones, keep a view per city for the old API, move readers one by one.</a:t>
+              <a:t>All restrict on delete: anything in use cannot be deleted.</a:t>
             </a:r>
             <a:endParaRPr lang="en-US" sz="1400" dirty="0"/>
           </a:p>
@@ -10276,7 +9538,7 @@
                   <a:schemeClr val="bg1"/>
                 </a:solidFill>
               </a:rPr>
-              <a:t>Time as numbers, not text</a:t>
+              <a:t>From a table per city to one table</a:t>
             </a:r>
             <a:endParaRPr lang="en-US" sz="3200" dirty="0"/>
           </a:p>
@@ -10284,696 +9546,18 @@
       </p:sp>
       <p:sp>
         <p:nvSpPr>
-          <p:cNvPr id="4" name="Text 1"/>
-          <p:cNvSpPr txBox="1"/>
+          <p:cNvPr id="4" name="panel"/>
+          <p:cNvSpPr/>
           <p:nvPr/>
         </p:nvSpPr>
         <p:spPr>
           <a:xfrm>
             <a:off x="548640" y="1691640"/>
-            <a:ext cx="4572000" cy="365760"/>
-          </a:xfrm>
-          <a:prstGeom prst="rect">
-            <a:avLst/>
-          </a:prstGeom>
-          <a:noFill/>
-          <a:ln/>
-        </p:spPr>
-        <p:txBody>
-          <a:bodyPr wrap="square" lIns="0" tIns="0" rIns="0" bIns="0" rtlCol="0" anchor="ctr"/>
-          <a:lstStyle/>
-          <a:p>
-            <a:pPr indent="0" marL="0">
-              <a:buNone/>
-            </a:pPr>
-            <a:r>
-              <a:rPr lang="en-US" sz="1600" b="1" dirty="0">
-                <a:solidFill>
-                  <a:schemeClr val="bg2"/>
-                </a:solidFill>
-              </a:rPr>
-              <a:t>In production</a:t>
-            </a:r>
-            <a:endParaRPr lang="en-US" sz="1600" dirty="0"/>
-          </a:p>
-        </p:txBody>
-      </p:sp>
-      <p:sp>
-        <p:nvSpPr>
-          <p:cNvPr id="5" name="Shape 2"/>
-          <p:cNvSpPr/>
-          <p:nvPr/>
-        </p:nvSpPr>
-        <p:spPr>
-          <a:xfrm>
-            <a:off x="548640" y="2194560"/>
-            <a:ext cx="2423160" cy="457200"/>
+            <a:ext cx="5349240" cy="3794760"/>
           </a:xfrm>
           <a:prstGeom prst="roundRect">
             <a:avLst>
-              <a:gd name="adj" fmla="val 50000"/>
-            </a:avLst>
-          </a:prstGeom>
-          <a:solidFill>
-            <a:schemeClr val="accent4"/>
-          </a:solidFill>
-          <a:ln w="12700">
-            <a:solidFill>
-              <a:schemeClr val="accent4"/>
-            </a:solidFill>
-            <a:prstDash val="solid"/>
-          </a:ln>
-        </p:spPr>
-      </p:sp>
-      <p:sp>
-        <p:nvSpPr>
-          <p:cNvPr id="6" name="Text 3"/>
-          <p:cNvSpPr txBox="1"/>
-          <p:nvPr/>
-        </p:nvSpPr>
-        <p:spPr>
-          <a:xfrm>
-            <a:off x="548640" y="2194560"/>
-            <a:ext cx="2423160" cy="457200"/>
-          </a:xfrm>
-          <a:prstGeom prst="rect">
-            <a:avLst/>
-          </a:prstGeom>
-          <a:noFill/>
-          <a:ln/>
-        </p:spPr>
-        <p:txBody>
-          <a:bodyPr wrap="square" lIns="0" tIns="0" rIns="0" bIns="0" rtlCol="0" anchor="ctr"/>
-          <a:lstStyle/>
-          <a:p>
-            <a:pPr algn="ctr" indent="0" marL="0">
-              <a:buNone/>
-            </a:pPr>
-            <a:r>
-              <a:rPr lang="en-US" sz="1200" dirty="0">
-                <a:solidFill>
-                  <a:schemeClr val="bg1"/>
-                </a:solidFill>
-                <a:latin typeface="Courier New" pitchFamily="34" charset="0"/>
-                <a:ea typeface="Courier New" pitchFamily="34" charset="-122"/>
-                <a:cs typeface="Courier New" pitchFamily="34" charset="-120"/>
-              </a:rPr>
-              <a:t>senin-jumat</a:t>
-            </a:r>
-            <a:endParaRPr lang="en-US" sz="1200" dirty="0"/>
-          </a:p>
-        </p:txBody>
-      </p:sp>
-      <p:sp>
-        <p:nvSpPr>
-          <p:cNvPr id="7" name="Shape 4"/>
-          <p:cNvSpPr/>
-          <p:nvPr/>
-        </p:nvSpPr>
-        <p:spPr>
-          <a:xfrm>
-            <a:off x="3154680" y="2194560"/>
-            <a:ext cx="2423160" cy="457200"/>
-          </a:xfrm>
-          <a:prstGeom prst="roundRect">
-            <a:avLst>
-              <a:gd name="adj" fmla="val 50000"/>
-            </a:avLst>
-          </a:prstGeom>
-          <a:solidFill>
-            <a:schemeClr val="accent4"/>
-          </a:solidFill>
-          <a:ln w="12700">
-            <a:solidFill>
-              <a:schemeClr val="accent4"/>
-            </a:solidFill>
-            <a:prstDash val="solid"/>
-          </a:ln>
-        </p:spPr>
-      </p:sp>
-      <p:sp>
-        <p:nvSpPr>
-          <p:cNvPr id="8" name="Text 5"/>
-          <p:cNvSpPr txBox="1"/>
-          <p:nvPr/>
-        </p:nvSpPr>
-        <p:spPr>
-          <a:xfrm>
-            <a:off x="3154680" y="2194560"/>
-            <a:ext cx="2423160" cy="457200"/>
-          </a:xfrm>
-          <a:prstGeom prst="rect">
-            <a:avLst/>
-          </a:prstGeom>
-          <a:noFill/>
-          <a:ln/>
-        </p:spPr>
-        <p:txBody>
-          <a:bodyPr wrap="square" lIns="0" tIns="0" rIns="0" bIns="0" rtlCol="0" anchor="ctr"/>
-          <a:lstStyle/>
-          <a:p>
-            <a:pPr algn="ctr" indent="0" marL="0">
-              <a:buNone/>
-            </a:pPr>
-            <a:r>
-              <a:rPr lang="en-US" sz="1200" dirty="0">
-                <a:solidFill>
-                  <a:schemeClr val="bg1"/>
-                </a:solidFill>
-                <a:latin typeface="Courier New" pitchFamily="34" charset="0"/>
-                <a:ea typeface="Courier New" pitchFamily="34" charset="-122"/>
-                <a:cs typeface="Courier New" pitchFamily="34" charset="-120"/>
-              </a:rPr>
-              <a:t>Senin- Jumat</a:t>
-            </a:r>
-            <a:endParaRPr lang="en-US" sz="1200" dirty="0"/>
-          </a:p>
-        </p:txBody>
-      </p:sp>
-      <p:sp>
-        <p:nvSpPr>
-          <p:cNvPr id="9" name="Shape 6"/>
-          <p:cNvSpPr/>
-          <p:nvPr/>
-        </p:nvSpPr>
-        <p:spPr>
-          <a:xfrm>
-            <a:off x="548640" y="2834640"/>
-            <a:ext cx="2423160" cy="457200"/>
-          </a:xfrm>
-          <a:prstGeom prst="roundRect">
-            <a:avLst>
-              <a:gd name="adj" fmla="val 50000"/>
-            </a:avLst>
-          </a:prstGeom>
-          <a:solidFill>
-            <a:schemeClr val="accent4"/>
-          </a:solidFill>
-          <a:ln w="12700">
-            <a:solidFill>
-              <a:schemeClr val="accent4"/>
-            </a:solidFill>
-            <a:prstDash val="solid"/>
-          </a:ln>
-        </p:spPr>
-      </p:sp>
-      <p:sp>
-        <p:nvSpPr>
-          <p:cNvPr id="10" name="Text 7"/>
-          <p:cNvSpPr txBox="1"/>
-          <p:nvPr/>
-        </p:nvSpPr>
-        <p:spPr>
-          <a:xfrm>
-            <a:off x="548640" y="2834640"/>
-            <a:ext cx="2423160" cy="457200"/>
-          </a:xfrm>
-          <a:prstGeom prst="rect">
-            <a:avLst/>
-          </a:prstGeom>
-          <a:noFill/>
-          <a:ln/>
-        </p:spPr>
-        <p:txBody>
-          <a:bodyPr wrap="square" lIns="0" tIns="0" rIns="0" bIns="0" rtlCol="0" anchor="ctr"/>
-          <a:lstStyle/>
-          <a:p>
-            <a:pPr algn="ctr" indent="0" marL="0">
-              <a:buNone/>
-            </a:pPr>
-            <a:r>
-              <a:rPr lang="en-US" sz="1200" dirty="0">
-                <a:solidFill>
-                  <a:schemeClr val="bg1"/>
-                </a:solidFill>
-                <a:latin typeface="Courier New" pitchFamily="34" charset="0"/>
-                <a:ea typeface="Courier New" pitchFamily="34" charset="-122"/>
-                <a:cs typeface="Courier New" pitchFamily="34" charset="-120"/>
-              </a:rPr>
-              <a:t>Monday-Friday</a:t>
-            </a:r>
-            <a:endParaRPr lang="en-US" sz="1200" dirty="0"/>
-          </a:p>
-        </p:txBody>
-      </p:sp>
-      <p:sp>
-        <p:nvSpPr>
-          <p:cNvPr id="11" name="Shape 8"/>
-          <p:cNvSpPr/>
-          <p:nvPr/>
-        </p:nvSpPr>
-        <p:spPr>
-          <a:xfrm>
-            <a:off x="3154680" y="2834640"/>
-            <a:ext cx="2423160" cy="457200"/>
-          </a:xfrm>
-          <a:prstGeom prst="roundRect">
-            <a:avLst>
-              <a:gd name="adj" fmla="val 50000"/>
-            </a:avLst>
-          </a:prstGeom>
-          <a:solidFill>
-            <a:schemeClr val="accent4"/>
-          </a:solidFill>
-          <a:ln w="12700">
-            <a:solidFill>
-              <a:schemeClr val="accent4"/>
-            </a:solidFill>
-            <a:prstDash val="solid"/>
-          </a:ln>
-        </p:spPr>
-      </p:sp>
-      <p:sp>
-        <p:nvSpPr>
-          <p:cNvPr id="12" name="Text 9"/>
-          <p:cNvSpPr txBox="1"/>
-          <p:nvPr/>
-        </p:nvSpPr>
-        <p:spPr>
-          <a:xfrm>
-            <a:off x="3154680" y="2834640"/>
-            <a:ext cx="2423160" cy="457200"/>
-          </a:xfrm>
-          <a:prstGeom prst="rect">
-            <a:avLst/>
-          </a:prstGeom>
-          <a:noFill/>
-          <a:ln/>
-        </p:spPr>
-        <p:txBody>
-          <a:bodyPr wrap="square" lIns="0" tIns="0" rIns="0" bIns="0" rtlCol="0" anchor="ctr"/>
-          <a:lstStyle/>
-          <a:p>
-            <a:pPr algn="ctr" indent="0" marL="0">
-              <a:buNone/>
-            </a:pPr>
-            <a:r>
-              <a:rPr lang="en-US" sz="1200" dirty="0">
-                <a:solidFill>
-                  <a:schemeClr val="bg1"/>
-                </a:solidFill>
-                <a:latin typeface="Courier New" pitchFamily="34" charset="0"/>
-                <a:ea typeface="Courier New" pitchFamily="34" charset="-122"/>
-                <a:cs typeface="Courier New" pitchFamily="34" charset="-120"/>
-              </a:rPr>
-              <a:t>6:00 AM - 10:00 AM</a:t>
-            </a:r>
-            <a:endParaRPr lang="en-US" sz="1200" dirty="0"/>
-          </a:p>
-        </p:txBody>
-      </p:sp>
-      <p:sp>
-        <p:nvSpPr>
-          <p:cNvPr id="13" name="Shape 10"/>
-          <p:cNvSpPr/>
-          <p:nvPr/>
-        </p:nvSpPr>
-        <p:spPr>
-          <a:xfrm>
-            <a:off x="548640" y="3474720"/>
-            <a:ext cx="2423160" cy="457200"/>
-          </a:xfrm>
-          <a:prstGeom prst="roundRect">
-            <a:avLst>
-              <a:gd name="adj" fmla="val 50000"/>
-            </a:avLst>
-          </a:prstGeom>
-          <a:solidFill>
-            <a:schemeClr val="accent4"/>
-          </a:solidFill>
-          <a:ln w="12700">
-            <a:solidFill>
-              <a:schemeClr val="accent4"/>
-            </a:solidFill>
-            <a:prstDash val="solid"/>
-          </a:ln>
-        </p:spPr>
-      </p:sp>
-      <p:sp>
-        <p:nvSpPr>
-          <p:cNvPr id="14" name="Text 11"/>
-          <p:cNvSpPr txBox="1"/>
-          <p:nvPr/>
-        </p:nvSpPr>
-        <p:spPr>
-          <a:xfrm>
-            <a:off x="548640" y="3474720"/>
-            <a:ext cx="2423160" cy="457200"/>
-          </a:xfrm>
-          <a:prstGeom prst="rect">
-            <a:avLst/>
-          </a:prstGeom>
-          <a:noFill/>
-          <a:ln/>
-        </p:spPr>
-        <p:txBody>
-          <a:bodyPr wrap="square" lIns="0" tIns="0" rIns="0" bIns="0" rtlCol="0" anchor="ctr"/>
-          <a:lstStyle/>
-          <a:p>
-            <a:pPr algn="ctr" indent="0" marL="0">
-              <a:buNone/>
-            </a:pPr>
-            <a:r>
-              <a:rPr lang="en-US" sz="1200" dirty="0">
-                <a:solidFill>
-                  <a:schemeClr val="bg1"/>
-                </a:solidFill>
-                <a:latin typeface="Courier New" pitchFamily="34" charset="0"/>
-                <a:ea typeface="Courier New" pitchFamily="34" charset="-122"/>
-                <a:cs typeface="Courier New" pitchFamily="34" charset="-120"/>
-              </a:rPr>
-              <a:t>08.00-09.00</a:t>
-            </a:r>
-            <a:endParaRPr lang="en-US" sz="1200" dirty="0"/>
-          </a:p>
-        </p:txBody>
-      </p:sp>
-      <p:sp>
-        <p:nvSpPr>
-          <p:cNvPr id="15" name="Shape 12"/>
-          <p:cNvSpPr/>
-          <p:nvPr/>
-        </p:nvSpPr>
-        <p:spPr>
-          <a:xfrm>
-            <a:off x="3154680" y="3474720"/>
-            <a:ext cx="2423160" cy="457200"/>
-          </a:xfrm>
-          <a:prstGeom prst="roundRect">
-            <a:avLst>
-              <a:gd name="adj" fmla="val 50000"/>
-            </a:avLst>
-          </a:prstGeom>
-          <a:solidFill>
-            <a:schemeClr val="accent4"/>
-          </a:solidFill>
-          <a:ln w="12700">
-            <a:solidFill>
-              <a:schemeClr val="accent4"/>
-            </a:solidFill>
-            <a:prstDash val="solid"/>
-          </a:ln>
-        </p:spPr>
-      </p:sp>
-      <p:sp>
-        <p:nvSpPr>
-          <p:cNvPr id="16" name="Text 13"/>
-          <p:cNvSpPr txBox="1"/>
-          <p:nvPr/>
-        </p:nvSpPr>
-        <p:spPr>
-          <a:xfrm>
-            <a:off x="3154680" y="3474720"/>
-            <a:ext cx="2423160" cy="457200"/>
-          </a:xfrm>
-          <a:prstGeom prst="rect">
-            <a:avLst/>
-          </a:prstGeom>
-          <a:noFill/>
-          <a:ln/>
-        </p:spPr>
-        <p:txBody>
-          <a:bodyPr wrap="square" lIns="0" tIns="0" rIns="0" bIns="0" rtlCol="0" anchor="ctr"/>
-          <a:lstStyle/>
-          <a:p>
-            <a:pPr algn="ctr" indent="0" marL="0">
-              <a:buNone/>
-            </a:pPr>
-            <a:r>
-              <a:rPr lang="en-US" sz="1200" dirty="0">
-                <a:solidFill>
-                  <a:schemeClr val="bg1"/>
-                </a:solidFill>
-                <a:latin typeface="Courier New" pitchFamily="34" charset="0"/>
-                <a:ea typeface="Courier New" pitchFamily="34" charset="-122"/>
-                <a:cs typeface="Courier New" pitchFamily="34" charset="-120"/>
-              </a:rPr>
-              <a:t>20:00-24:00</a:t>
-            </a:r>
-            <a:endParaRPr lang="en-US" sz="1200" dirty="0"/>
-          </a:p>
-        </p:txBody>
-      </p:sp>
-      <p:sp>
-        <p:nvSpPr>
-          <p:cNvPr id="17" name="Shape 14"/>
-          <p:cNvSpPr/>
-          <p:nvPr/>
-        </p:nvSpPr>
-        <p:spPr>
-          <a:xfrm>
-            <a:off x="5852160" y="3108960"/>
-            <a:ext cx="822960" cy="914"/>
-          </a:xfrm>
-          <a:prstGeom prst="line">
-            <a:avLst/>
-          </a:prstGeom>
-          <a:noFill/>
-          <a:ln w="19050">
-            <a:solidFill>
-              <a:schemeClr val="accent5"/>
-            </a:solidFill>
-            <a:prstDash val="solid"/>
-            <a:tailEnd type="triangle"/>
-          </a:ln>
-        </p:spPr>
-      </p:sp>
-      <p:sp>
-        <p:nvSpPr>
-          <p:cNvPr id="18" name="Text 15"/>
-          <p:cNvSpPr txBox="1"/>
-          <p:nvPr/>
-        </p:nvSpPr>
-        <p:spPr>
-          <a:xfrm>
-            <a:off x="6949440" y="1691640"/>
-            <a:ext cx="4572000" cy="365760"/>
-          </a:xfrm>
-          <a:prstGeom prst="rect">
-            <a:avLst/>
-          </a:prstGeom>
-          <a:noFill/>
-          <a:ln/>
-        </p:spPr>
-        <p:txBody>
-          <a:bodyPr wrap="square" lIns="0" tIns="0" rIns="0" bIns="0" rtlCol="0" anchor="ctr"/>
-          <a:lstStyle/>
-          <a:p>
-            <a:pPr indent="0" marL="0">
-              <a:buNone/>
-            </a:pPr>
-            <a:r>
-              <a:rPr lang="en-US" sz="1600" b="1" dirty="0">
-                <a:solidFill>
-                  <a:schemeClr val="bg2"/>
-                </a:solidFill>
-              </a:rPr>
-              <a:t>In the demo</a:t>
-            </a:r>
-            <a:endParaRPr lang="en-US" sz="1600" dirty="0"/>
-          </a:p>
-        </p:txBody>
-      </p:sp>
-      <p:sp>
-        <p:nvSpPr>
-          <p:cNvPr id="19" name="Text 16"/>
-          <p:cNvSpPr txBox="1"/>
-          <p:nvPr/>
-        </p:nvSpPr>
-        <p:spPr>
-          <a:xfrm>
-            <a:off x="6949440" y="2148840"/>
-            <a:ext cx="2194560" cy="914400"/>
-          </a:xfrm>
-          <a:prstGeom prst="rect">
-            <a:avLst/>
-          </a:prstGeom>
-          <a:noFill/>
-          <a:ln/>
-        </p:spPr>
-        <p:txBody>
-          <a:bodyPr wrap="square" lIns="0" tIns="0" rIns="0" bIns="0" rtlCol="0" anchor="ctr"/>
-          <a:lstStyle/>
-          <a:p>
-            <a:pPr indent="0" marL="0">
-              <a:buNone/>
-            </a:pPr>
-            <a:r>
-              <a:rPr lang="en-US" sz="4800" b="1" dirty="0">
-                <a:solidFill>
-                  <a:schemeClr val="accent1"/>
-                </a:solidFill>
-                <a:latin typeface="+mj-lt" pitchFamily="34" charset="0"/>
-                <a:ea typeface="+mj-lt" pitchFamily="34" charset="-122"/>
-                <a:cs typeface="+mj-lt" pitchFamily="34" charset="-120"/>
-              </a:rPr>
-              <a:t>450</a:t>
-            </a:r>
-            <a:endParaRPr lang="en-US" sz="4800" dirty="0"/>
-          </a:p>
-        </p:txBody>
-      </p:sp>
-      <p:sp>
-        <p:nvSpPr>
-          <p:cNvPr id="20" name="Text 17"/>
-          <p:cNvSpPr txBox="1"/>
-          <p:nvPr/>
-        </p:nvSpPr>
-        <p:spPr>
-          <a:xfrm>
-            <a:off x="6949440" y="3063240"/>
-            <a:ext cx="2194560" cy="320040"/>
-          </a:xfrm>
-          <a:prstGeom prst="rect">
-            <a:avLst/>
-          </a:prstGeom>
-          <a:noFill/>
-          <a:ln/>
-        </p:spPr>
-        <p:txBody>
-          <a:bodyPr wrap="square" lIns="0" tIns="0" rIns="0" bIns="0" rtlCol="0" anchor="ctr"/>
-          <a:lstStyle/>
-          <a:p>
-            <a:pPr indent="0" marL="0">
-              <a:buNone/>
-            </a:pPr>
-            <a:r>
-              <a:rPr lang="en-US" sz="1400" dirty="0">
-                <a:solidFill>
-                  <a:schemeClr val="bg2"/>
-                </a:solidFill>
-              </a:rPr>
-              <a:t>minutes = 07:30</a:t>
-            </a:r>
-            <a:endParaRPr lang="en-US" sz="1400" dirty="0"/>
-          </a:p>
-        </p:txBody>
-      </p:sp>
-      <p:sp>
-        <p:nvSpPr>
-          <p:cNvPr id="21" name="Text 18"/>
-          <p:cNvSpPr txBox="1"/>
-          <p:nvPr/>
-        </p:nvSpPr>
-        <p:spPr>
-          <a:xfrm>
-            <a:off x="9326880" y="2148840"/>
-            <a:ext cx="2194560" cy="914400"/>
-          </a:xfrm>
-          <a:prstGeom prst="rect">
-            <a:avLst/>
-          </a:prstGeom>
-          <a:noFill/>
-          <a:ln/>
-        </p:spPr>
-        <p:txBody>
-          <a:bodyPr wrap="square" lIns="0" tIns="0" rIns="0" bIns="0" rtlCol="0" anchor="ctr"/>
-          <a:lstStyle/>
-          <a:p>
-            <a:pPr indent="0" marL="0">
-              <a:buNone/>
-            </a:pPr>
-            <a:r>
-              <a:rPr lang="en-US" sz="4800" b="1" dirty="0">
-                <a:solidFill>
-                  <a:schemeClr val="accent1"/>
-                </a:solidFill>
-                <a:latin typeface="+mj-lt" pitchFamily="34" charset="0"/>
-                <a:ea typeface="+mj-lt" pitchFamily="34" charset="-122"/>
-                <a:cs typeface="+mj-lt" pitchFamily="34" charset="-120"/>
-              </a:rPr>
-              <a:t>1440</a:t>
-            </a:r>
-            <a:endParaRPr lang="en-US" sz="4800" dirty="0"/>
-          </a:p>
-        </p:txBody>
-      </p:sp>
-      <p:sp>
-        <p:nvSpPr>
-          <p:cNvPr id="22" name="Text 19"/>
-          <p:cNvSpPr txBox="1"/>
-          <p:nvPr/>
-        </p:nvSpPr>
-        <p:spPr>
-          <a:xfrm>
-            <a:off x="9326880" y="3063240"/>
-            <a:ext cx="2194560" cy="320040"/>
-          </a:xfrm>
-          <a:prstGeom prst="rect">
-            <a:avLst/>
-          </a:prstGeom>
-          <a:noFill/>
-          <a:ln/>
-        </p:spPr>
-        <p:txBody>
-          <a:bodyPr wrap="square" lIns="0" tIns="0" rIns="0" bIns="0" rtlCol="0" anchor="ctr"/>
-          <a:lstStyle/>
-          <a:p>
-            <a:pPr indent="0" marL="0">
-              <a:buNone/>
-            </a:pPr>
-            <a:r>
-              <a:rPr lang="en-US" sz="1400" dirty="0">
-                <a:solidFill>
-                  <a:schemeClr val="bg2"/>
-                </a:solidFill>
-              </a:rPr>
-              <a:t>minutes = 24:00</a:t>
-            </a:r>
-            <a:endParaRPr lang="en-US" sz="1400" dirty="0"/>
-          </a:p>
-        </p:txBody>
-      </p:sp>
-      <p:sp>
-        <p:nvSpPr>
-          <p:cNvPr id="23" name="Text 20"/>
-          <p:cNvSpPr txBox="1"/>
-          <p:nvPr/>
-        </p:nvSpPr>
-        <p:spPr>
-          <a:xfrm>
-            <a:off x="6949440" y="3566160"/>
-            <a:ext cx="4663440" cy="640080"/>
-          </a:xfrm>
-          <a:prstGeom prst="rect">
-            <a:avLst/>
-          </a:prstGeom>
-          <a:noFill/>
-          <a:ln/>
-        </p:spPr>
-        <p:txBody>
-          <a:bodyPr wrap="square" lIns="0" tIns="0" rIns="0" bIns="0" rtlCol="0" anchor="t"/>
-          <a:lstStyle/>
-          <a:p>
-            <a:pPr indent="0" marL="0">
-              <a:buNone/>
-            </a:pPr>
-            <a:r>
-              <a:rPr lang="en-US" sz="1400" dirty="0">
-                <a:solidFill>
-                  <a:schemeClr val="bg1"/>
-                </a:solidFill>
-              </a:rPr>
-              <a:t>day_of_week 1-7 (ISO), one row per day. The form takes HH:MM only.</a:t>
-            </a:r>
-            <a:endParaRPr lang="en-US" sz="1400" dirty="0"/>
-          </a:p>
-        </p:txBody>
-      </p:sp>
-      <p:sp>
-        <p:nvSpPr>
-          <p:cNvPr id="24" name="panel"/>
-          <p:cNvSpPr/>
-          <p:nvPr/>
-        </p:nvSpPr>
-        <p:spPr>
-          <a:xfrm>
-            <a:off x="548640" y="4526280"/>
-            <a:ext cx="11064240" cy="1554480"/>
-          </a:xfrm>
-          <a:prstGeom prst="roundRect">
-            <a:avLst>
-              <a:gd name="adj" fmla="val 4706"/>
+              <a:gd name="adj" fmla="val 1928"/>
             </a:avLst>
           </a:prstGeom>
           <a:solidFill>
@@ -10989,14 +9573,14 @@
       </p:sp>
       <p:sp>
         <p:nvSpPr>
-          <p:cNvPr id="25" name="Text 22"/>
+          <p:cNvPr id="5" name="Text 2"/>
           <p:cNvSpPr txBox="1"/>
           <p:nvPr/>
         </p:nvSpPr>
         <p:spPr>
           <a:xfrm>
-            <a:off x="822960" y="4709160"/>
-            <a:ext cx="10515600" cy="365760"/>
+            <a:off x="822960" y="1874520"/>
+            <a:ext cx="2743200" cy="365760"/>
           </a:xfrm>
           <a:prstGeom prst="rect">
             <a:avLst/>
@@ -11012,27 +9596,54 @@
               <a:buNone/>
             </a:pPr>
             <a:r>
-              <a:rPr lang="en-US" sz="1600" b="1" dirty="0">
+              <a:rPr lang="en-US" sz="1800" b="1" dirty="0">
                 <a:solidFill>
                   <a:schemeClr val="bg1"/>
                 </a:solidFill>
               </a:rPr>
-              <a:t>Two slots overlap when each starts before the other ends</a:t>
-            </a:r>
-            <a:endParaRPr lang="en-US" sz="1600" dirty="0"/>
-          </a:p>
-        </p:txBody>
-      </p:sp>
-      <p:sp>
-        <p:nvSpPr>
-          <p:cNvPr id="26" name="Text 23"/>
+              <a:t>Production</a:t>
+            </a:r>
+            <a:endParaRPr lang="en-US" sz="1800" dirty="0"/>
+          </a:p>
+        </p:txBody>
+      </p:sp>
+      <p:sp>
+        <p:nvSpPr>
+          <p:cNvPr id="6" name="pill"/>
+          <p:cNvSpPr/>
+          <p:nvPr/>
+        </p:nvSpPr>
+        <p:spPr>
+          <a:xfrm>
+            <a:off x="4581144" y="1920240"/>
+            <a:ext cx="1042416" cy="274320"/>
+          </a:xfrm>
+          <a:prstGeom prst="roundRect">
+            <a:avLst>
+              <a:gd name="adj" fmla="val 50000"/>
+            </a:avLst>
+          </a:prstGeom>
+          <a:solidFill>
+            <a:schemeClr val="accent2"/>
+          </a:solidFill>
+          <a:ln w="12700">
+            <a:solidFill>
+              <a:schemeClr val="accent2"/>
+            </a:solidFill>
+            <a:prstDash val="solid"/>
+          </a:ln>
+        </p:spPr>
+      </p:sp>
+      <p:sp>
+        <p:nvSpPr>
+          <p:cNvPr id="7" name="Text 4"/>
           <p:cNvSpPr txBox="1"/>
           <p:nvPr/>
         </p:nvSpPr>
         <p:spPr>
           <a:xfrm>
-            <a:off x="822960" y="5166360"/>
-            <a:ext cx="6400800" cy="411480"/>
+            <a:off x="4581144" y="1920240"/>
+            <a:ext cx="1042416" cy="274320"/>
           </a:xfrm>
           <a:prstGeom prst="rect">
             <a:avLst/>
@@ -11044,19 +9655,245 @@
           <a:bodyPr wrap="square" lIns="0" tIns="0" rIns="0" bIns="0" rtlCol="0" anchor="ctr"/>
           <a:lstStyle/>
           <a:p>
-            <a:pPr indent="0" marL="0">
-              <a:buNone/>
-            </a:pPr>
-            <a:r>
-              <a:rPr lang="en-US" sz="1800" b="1" dirty="0">
-                <a:solidFill>
-                  <a:schemeClr val="accent1"/>
+            <a:pPr algn="ctr" indent="0" marL="0">
+              <a:buNone/>
+            </a:pPr>
+            <a:r>
+              <a:rPr lang="en-US" sz="1000" b="1" spc="150" kern="0" dirty="0">
+                <a:solidFill>
+                  <a:schemeClr val="tx1"/>
+                </a:solidFill>
+              </a:rPr>
+              <a:t>7 TABLES</a:t>
+            </a:r>
+            <a:endParaRPr lang="en-US" sz="1000" dirty="0"/>
+          </a:p>
+        </p:txBody>
+      </p:sp>
+      <p:sp>
+        <p:nvSpPr>
+          <p:cNvPr id="8" name="Text 5"/>
+          <p:cNvSpPr txBox="1"/>
+          <p:nvPr/>
+        </p:nvSpPr>
+        <p:spPr>
+          <a:xfrm>
+            <a:off x="822960" y="2423160"/>
+            <a:ext cx="4846320" cy="2103120"/>
+          </a:xfrm>
+          <a:prstGeom prst="rect">
+            <a:avLst/>
+          </a:prstGeom>
+          <a:noFill/>
+          <a:ln/>
+        </p:spPr>
+        <p:txBody>
+          <a:bodyPr wrap="square" lIns="0" tIns="0" rIns="0" bIns="0" rtlCol="0" anchor="t"/>
+          <a:lstStyle/>
+          <a:p>
+            <a:pPr indent="0" marL="0">
+              <a:buNone/>
+            </a:pPr>
+            <a:r>
+              <a:rPr lang="en-US" sz="1200" dirty="0">
+                <a:solidFill>
+                  <a:schemeClr val="accent6"/>
                 </a:solidFill>
                 <a:latin typeface="Courier New" pitchFamily="34" charset="0"/>
                 <a:ea typeface="Courier New" pitchFamily="34" charset="-122"/>
                 <a:cs typeface="Courier New" pitchFamily="34" charset="-120"/>
               </a:rPr>
-              <a:t>starts_at &lt; :end  AND  ends_at &gt; :start</a:t>
+              <a:t>radio.api_jadwal = 'jadwal_radio_woman'</a:t>
+            </a:r>
+            <a:endParaRPr lang="en-US" sz="1200" dirty="0"/>
+          </a:p>
+          <a:p>
+            <a:pPr indent="0" marL="0">
+              <a:buNone/>
+            </a:pPr>
+            <a:endParaRPr lang="en-US" sz="1200" dirty="0"/>
+          </a:p>
+          <a:p>
+            <a:pPr indent="0" marL="0">
+              <a:buNone/>
+            </a:pPr>
+            <a:r>
+              <a:rPr lang="en-US" sz="1200" dirty="0">
+                <a:solidFill>
+                  <a:schemeClr val="accent6"/>
+                </a:solidFill>
+                <a:latin typeface="Courier New" pitchFamily="34" charset="0"/>
+                <a:ea typeface="Courier New" pitchFamily="34" charset="-122"/>
+                <a:cs typeface="Courier New" pitchFamily="34" charset="-120"/>
+              </a:rPr>
+              <a:t>jdwl_radio_bandung</a:t>
+            </a:r>
+            <a:endParaRPr lang="en-US" sz="1200" dirty="0"/>
+          </a:p>
+          <a:p>
+            <a:pPr indent="0" marL="0">
+              <a:buNone/>
+            </a:pPr>
+            <a:r>
+              <a:rPr lang="en-US" sz="1200" dirty="0">
+                <a:solidFill>
+                  <a:schemeClr val="accent6"/>
+                </a:solidFill>
+                <a:latin typeface="Courier New" pitchFamily="34" charset="0"/>
+                <a:ea typeface="Courier New" pitchFamily="34" charset="-122"/>
+                <a:cs typeface="Courier New" pitchFamily="34" charset="-120"/>
+              </a:rPr>
+              <a:t>jdwl_radio_surabaya</a:t>
+            </a:r>
+            <a:endParaRPr lang="en-US" sz="1200" dirty="0"/>
+          </a:p>
+          <a:p>
+            <a:pPr indent="0" marL="0">
+              <a:buNone/>
+            </a:pPr>
+            <a:r>
+              <a:rPr lang="en-US" sz="1200" dirty="0">
+                <a:solidFill>
+                  <a:schemeClr val="accent6"/>
+                </a:solidFill>
+                <a:latin typeface="Courier New" pitchFamily="34" charset="0"/>
+                <a:ea typeface="Courier New" pitchFamily="34" charset="-122"/>
+                <a:cs typeface="Courier New" pitchFamily="34" charset="-120"/>
+              </a:rPr>
+              <a:t>jdwl_radio_suramadu  ...</a:t>
+            </a:r>
+            <a:endParaRPr lang="en-US" sz="1200" dirty="0"/>
+          </a:p>
+          <a:p>
+            <a:pPr indent="0" marL="0">
+              <a:buNone/>
+            </a:pPr>
+            <a:r>
+              <a:rPr lang="en-US" sz="1200" dirty="0">
+                <a:solidFill>
+                  <a:schemeClr val="accent6"/>
+                </a:solidFill>
+                <a:latin typeface="Courier New" pitchFamily="34" charset="0"/>
+                <a:ea typeface="Courier New" pitchFamily="34" charset="-122"/>
+                <a:cs typeface="Courier New" pitchFamily="34" charset="-120"/>
+              </a:rPr>
+              <a:t>  judul_siaran, hari_siaran,</a:t>
+            </a:r>
+            <a:endParaRPr lang="en-US" sz="1200" dirty="0"/>
+          </a:p>
+          <a:p>
+            <a:pPr indent="0" marL="0">
+              <a:buNone/>
+            </a:pPr>
+            <a:r>
+              <a:rPr lang="en-US" sz="1200" dirty="0">
+                <a:solidFill>
+                  <a:schemeClr val="accent6"/>
+                </a:solidFill>
+                <a:latin typeface="Courier New" pitchFamily="34" charset="0"/>
+                <a:ea typeface="Courier New" pitchFamily="34" charset="-122"/>
+                <a:cs typeface="Courier New" pitchFamily="34" charset="-120"/>
+              </a:rPr>
+              <a:t>  waktu_siaran, penyiar (text)</a:t>
+            </a:r>
+            <a:endParaRPr lang="en-US" sz="1200" dirty="0"/>
+          </a:p>
+        </p:txBody>
+      </p:sp>
+      <p:sp>
+        <p:nvSpPr>
+          <p:cNvPr id="9" name="Text 6"/>
+          <p:cNvSpPr txBox="1"/>
+          <p:nvPr/>
+        </p:nvSpPr>
+        <p:spPr>
+          <a:xfrm>
+            <a:off x="822960" y="4572000"/>
+            <a:ext cx="4846320" cy="822960"/>
+          </a:xfrm>
+          <a:prstGeom prst="rect">
+            <a:avLst/>
+          </a:prstGeom>
+          <a:noFill/>
+          <a:ln/>
+        </p:spPr>
+        <p:txBody>
+          <a:bodyPr wrap="square" lIns="0" tIns="0" rIns="0" bIns="0" rtlCol="0" anchor="t"/>
+          <a:lstStyle/>
+          <a:p>
+            <a:pPr indent="0" marL="0">
+              <a:buNone/>
+            </a:pPr>
+            <a:r>
+              <a:rPr lang="en-US" sz="1300" dirty="0">
+                <a:solidFill>
+                  <a:schemeClr val="bg2"/>
+                </a:solidFill>
+              </a:rPr>
+              <a:t>A new station means a new table. One name in api_jadwal does not match the real table.</a:t>
+            </a:r>
+            <a:endParaRPr lang="en-US" sz="1300" dirty="0"/>
+          </a:p>
+        </p:txBody>
+      </p:sp>
+      <p:sp>
+        <p:nvSpPr>
+          <p:cNvPr id="10" name="panel"/>
+          <p:cNvSpPr/>
+          <p:nvPr/>
+        </p:nvSpPr>
+        <p:spPr>
+          <a:xfrm>
+            <a:off x="6263640" y="1691640"/>
+            <a:ext cx="5349240" cy="3794760"/>
+          </a:xfrm>
+          <a:prstGeom prst="roundRect">
+            <a:avLst>
+              <a:gd name="adj" fmla="val 1928"/>
+            </a:avLst>
+          </a:prstGeom>
+          <a:solidFill>
+            <a:schemeClr val="tx2"/>
+          </a:solidFill>
+          <a:ln w="12700">
+            <a:solidFill>
+              <a:schemeClr val="tx2"/>
+            </a:solidFill>
+            <a:prstDash val="solid"/>
+          </a:ln>
+        </p:spPr>
+      </p:sp>
+      <p:sp>
+        <p:nvSpPr>
+          <p:cNvPr id="11" name="Text 8"/>
+          <p:cNvSpPr txBox="1"/>
+          <p:nvPr/>
+        </p:nvSpPr>
+        <p:spPr>
+          <a:xfrm>
+            <a:off x="6537960" y="1874520"/>
+            <a:ext cx="2743200" cy="365760"/>
+          </a:xfrm>
+          <a:prstGeom prst="rect">
+            <a:avLst/>
+          </a:prstGeom>
+          <a:noFill/>
+          <a:ln/>
+        </p:spPr>
+        <p:txBody>
+          <a:bodyPr wrap="square" lIns="0" tIns="0" rIns="0" bIns="0" rtlCol="0" anchor="ctr"/>
+          <a:lstStyle/>
+          <a:p>
+            <a:pPr indent="0" marL="0">
+              <a:buNone/>
+            </a:pPr>
+            <a:r>
+              <a:rPr lang="en-US" sz="1800" b="1" dirty="0">
+                <a:solidFill>
+                  <a:schemeClr val="bg1"/>
+                </a:solidFill>
+              </a:rPr>
+              <a:t>Demo</a:t>
             </a:r>
             <a:endParaRPr lang="en-US" sz="1800" dirty="0"/>
           </a:p>
@@ -11064,14 +9901,41 @@
       </p:sp>
       <p:sp>
         <p:nvSpPr>
-          <p:cNvPr id="27" name="Text 24"/>
+          <p:cNvPr id="12" name="pill"/>
+          <p:cNvSpPr/>
+          <p:nvPr/>
+        </p:nvSpPr>
+        <p:spPr>
+          <a:xfrm>
+            <a:off x="10392156" y="1920240"/>
+            <a:ext cx="946404" cy="274320"/>
+          </a:xfrm>
+          <a:prstGeom prst="roundRect">
+            <a:avLst>
+              <a:gd name="adj" fmla="val 50000"/>
+            </a:avLst>
+          </a:prstGeom>
+          <a:solidFill>
+            <a:schemeClr val="accent3"/>
+          </a:solidFill>
+          <a:ln w="12700">
+            <a:solidFill>
+              <a:schemeClr val="accent3"/>
+            </a:solidFill>
+            <a:prstDash val="solid"/>
+          </a:ln>
+        </p:spPr>
+      </p:sp>
+      <p:sp>
+        <p:nvSpPr>
+          <p:cNvPr id="13" name="Text 10"/>
           <p:cNvSpPr txBox="1"/>
           <p:nvPr/>
         </p:nvSpPr>
         <p:spPr>
           <a:xfrm>
-            <a:off x="822960" y="5623560"/>
-            <a:ext cx="10058400" cy="320040"/>
+            <a:off x="10392156" y="1920240"/>
+            <a:ext cx="946404" cy="274320"/>
           </a:xfrm>
           <a:prstGeom prst="rect">
             <a:avLst/>
@@ -11083,16 +9947,201 @@
           <a:bodyPr wrap="square" lIns="0" tIns="0" rIns="0" bIns="0" rtlCol="0" anchor="ctr"/>
           <a:lstStyle/>
           <a:p>
+            <a:pPr algn="ctr" indent="0" marL="0">
+              <a:buNone/>
+            </a:pPr>
+            <a:r>
+              <a:rPr lang="en-US" sz="1000" b="1" spc="150" kern="0" dirty="0">
+                <a:solidFill>
+                  <a:schemeClr val="tx1"/>
+                </a:solidFill>
+              </a:rPr>
+              <a:t>1 TABLE</a:t>
+            </a:r>
+            <a:endParaRPr lang="en-US" sz="1000" dirty="0"/>
+          </a:p>
+        </p:txBody>
+      </p:sp>
+      <p:sp>
+        <p:nvSpPr>
+          <p:cNvPr id="14" name="Text 11"/>
+          <p:cNvSpPr txBox="1"/>
+          <p:nvPr/>
+        </p:nvSpPr>
+        <p:spPr>
+          <a:xfrm>
+            <a:off x="6537960" y="2423160"/>
+            <a:ext cx="4846320" cy="2103120"/>
+          </a:xfrm>
+          <a:prstGeom prst="rect">
+            <a:avLst/>
+          </a:prstGeom>
+          <a:noFill/>
+          <a:ln/>
+        </p:spPr>
+        <p:txBody>
+          <a:bodyPr wrap="square" lIns="0" tIns="0" rIns="0" bIns="0" rtlCol="0" anchor="t"/>
+          <a:lstStyle/>
+          <a:p>
+            <a:pPr indent="0" marL="0">
+              <a:buNone/>
+            </a:pPr>
+            <a:r>
+              <a:rPr lang="en-US" sz="1200" dirty="0">
+                <a:solidFill>
+                  <a:schemeClr val="accent6"/>
+                </a:solidFill>
+                <a:latin typeface="Courier New" pitchFamily="34" charset="0"/>
+                <a:ea typeface="Courier New" pitchFamily="34" charset="-122"/>
+                <a:cs typeface="Courier New" pitchFamily="34" charset="-120"/>
+              </a:rPr>
+              <a:t>schedule_slots</a:t>
+            </a:r>
+            <a:endParaRPr lang="en-US" sz="1200" dirty="0"/>
+          </a:p>
+          <a:p>
+            <a:pPr indent="0" marL="0">
+              <a:buNone/>
+            </a:pPr>
+            <a:r>
+              <a:rPr lang="en-US" sz="1200" dirty="0">
+                <a:solidFill>
+                  <a:schemeClr val="accent6"/>
+                </a:solidFill>
+                <a:latin typeface="Courier New" pitchFamily="34" charset="0"/>
+                <a:ea typeface="Courier New" pitchFamily="34" charset="-122"/>
+                <a:cs typeface="Courier New" pitchFamily="34" charset="-120"/>
+              </a:rPr>
+              <a:t>  station_id  -&gt; stations</a:t>
+            </a:r>
+            <a:endParaRPr lang="en-US" sz="1200" dirty="0"/>
+          </a:p>
+          <a:p>
+            <a:pPr indent="0" marL="0">
+              <a:buNone/>
+            </a:pPr>
+            <a:r>
+              <a:rPr lang="en-US" sz="1200" dirty="0">
+                <a:solidFill>
+                  <a:schemeClr val="accent6"/>
+                </a:solidFill>
+                <a:latin typeface="Courier New" pitchFamily="34" charset="0"/>
+                <a:ea typeface="Courier New" pitchFamily="34" charset="-122"/>
+                <a:cs typeface="Courier New" pitchFamily="34" charset="-120"/>
+              </a:rPr>
+              <a:t>  show_id     -&gt; shows</a:t>
+            </a:r>
+            <a:endParaRPr lang="en-US" sz="1200" dirty="0"/>
+          </a:p>
+          <a:p>
+            <a:pPr indent="0" marL="0">
+              <a:buNone/>
+            </a:pPr>
+            <a:r>
+              <a:rPr lang="en-US" sz="1200" dirty="0">
+                <a:solidFill>
+                  <a:schemeClr val="accent6"/>
+                </a:solidFill>
+                <a:latin typeface="Courier New" pitchFamily="34" charset="0"/>
+                <a:ea typeface="Courier New" pitchFamily="34" charset="-122"/>
+                <a:cs typeface="Courier New" pitchFamily="34" charset="-120"/>
+              </a:rPr>
+              <a:t>  day_of_week, starts_at, ends_at</a:t>
+            </a:r>
+            <a:endParaRPr lang="en-US" sz="1200" dirty="0"/>
+          </a:p>
+          <a:p>
+            <a:pPr indent="0" marL="0">
+              <a:buNone/>
+            </a:pPr>
+            <a:endParaRPr lang="en-US" sz="1200" dirty="0"/>
+          </a:p>
+          <a:p>
+            <a:pPr indent="0" marL="0">
+              <a:buNone/>
+            </a:pPr>
+            <a:r>
+              <a:rPr lang="en-US" sz="1200" dirty="0">
+                <a:solidFill>
+                  <a:schemeClr val="accent6"/>
+                </a:solidFill>
+                <a:latin typeface="Courier New" pitchFamily="34" charset="0"/>
+                <a:ea typeface="Courier New" pitchFamily="34" charset="-122"/>
+                <a:cs typeface="Courier New" pitchFamily="34" charset="-120"/>
+              </a:rPr>
+              <a:t>host_show (show_id, host_id)</a:t>
+            </a:r>
+            <a:endParaRPr lang="en-US" sz="1200" dirty="0"/>
+          </a:p>
+        </p:txBody>
+      </p:sp>
+      <p:sp>
+        <p:nvSpPr>
+          <p:cNvPr id="15" name="Text 12"/>
+          <p:cNvSpPr txBox="1"/>
+          <p:nvPr/>
+        </p:nvSpPr>
+        <p:spPr>
+          <a:xfrm>
+            <a:off x="6537960" y="4572000"/>
+            <a:ext cx="4846320" cy="822960"/>
+          </a:xfrm>
+          <a:prstGeom prst="rect">
+            <a:avLst/>
+          </a:prstGeom>
+          <a:noFill/>
+          <a:ln/>
+        </p:spPr>
+        <p:txBody>
+          <a:bodyPr wrap="square" lIns="0" tIns="0" rIns="0" bIns="0" rtlCol="0" anchor="t"/>
+          <a:lstStyle/>
+          <a:p>
+            <a:pPr indent="0" marL="0">
+              <a:buNone/>
+            </a:pPr>
+            <a:r>
+              <a:rPr lang="en-US" sz="1300" dirty="0">
+                <a:solidFill>
+                  <a:schemeClr val="bg2"/>
+                </a:solidFill>
+              </a:rPr>
+              <a:t>A new station is one row. Foreign keys keep it consistent.</a:t>
+            </a:r>
+            <a:endParaRPr lang="en-US" sz="1300" dirty="0"/>
+          </a:p>
+        </p:txBody>
+      </p:sp>
+      <p:sp>
+        <p:nvSpPr>
+          <p:cNvPr id="16" name="Text 13"/>
+          <p:cNvSpPr txBox="1"/>
+          <p:nvPr/>
+        </p:nvSpPr>
+        <p:spPr>
+          <a:xfrm>
+            <a:off x="548640" y="5669280"/>
+            <a:ext cx="11064240" cy="457200"/>
+          </a:xfrm>
+          <a:prstGeom prst="rect">
+            <a:avLst/>
+          </a:prstGeom>
+          <a:noFill/>
+          <a:ln/>
+        </p:spPr>
+        <p:txBody>
+          <a:bodyPr wrap="square" lIns="0" tIns="0" rIns="0" bIns="0" rtlCol="0" anchor="ctr"/>
+          <a:lstStyle/>
+          <a:p>
             <a:pPr indent="0" marL="0">
               <a:buNone/>
             </a:pPr>
             <a:r>
               <a:rPr lang="en-US" sz="1400" dirty="0">
                 <a:solidFill>
-                  <a:schemeClr val="bg2"/>
-                </a:solidFill>
-              </a:rPr>
-              <a:t>Touching (10:00 then 10:00) is fine.</a:t>
+                  <a:schemeClr val="bg1"/>
+                </a:solidFill>
+              </a:rPr>
+              <a:t>No-downtime migration: fill the new table from the old ones, keep a view per city for the old API, move readers one by one.</a:t>
             </a:r>
             <a:endParaRPr lang="en-US" sz="1400" dirty="0"/>
           </a:p>
@@ -11200,7 +10249,7 @@
                   <a:schemeClr val="bg1"/>
                 </a:solidFill>
               </a:rPr>
-              <a:t>The overlap rule on save</a:t>
+              <a:t>Time as numbers, not text</a:t>
             </a:r>
             <a:endParaRPr lang="en-US" sz="3200" dirty="0"/>
           </a:p>
@@ -11214,8 +10263,8 @@
         </p:nvSpPr>
         <p:spPr>
           <a:xfrm>
-            <a:off x="2651760" y="1691640"/>
-            <a:ext cx="731520" cy="228600"/>
+            <a:off x="548640" y="1691640"/>
+            <a:ext cx="4572000" cy="365760"/>
           </a:xfrm>
           <a:prstGeom prst="rect">
             <a:avLst/>
@@ -11227,215 +10276,35 @@
           <a:bodyPr wrap="square" lIns="0" tIns="0" rIns="0" bIns="0" rtlCol="0" anchor="ctr"/>
           <a:lstStyle/>
           <a:p>
-            <a:pPr algn="l" indent="0" marL="0">
-              <a:buNone/>
-            </a:pPr>
-            <a:r>
-              <a:rPr lang="en-US" sz="1000" dirty="0">
-                <a:solidFill>
-                  <a:schemeClr val="accent5"/>
-                </a:solidFill>
-              </a:rPr>
-              <a:t>00:00</a:t>
-            </a:r>
-            <a:endParaRPr lang="en-US" sz="1000" dirty="0"/>
-          </a:p>
-        </p:txBody>
-      </p:sp>
-      <p:sp>
-        <p:nvSpPr>
-          <p:cNvPr id="5" name="Text 2"/>
-          <p:cNvSpPr txBox="1"/>
-          <p:nvPr/>
-        </p:nvSpPr>
-        <p:spPr>
-          <a:xfrm>
-            <a:off x="4526280" y="1691640"/>
-            <a:ext cx="731520" cy="228600"/>
-          </a:xfrm>
-          <a:prstGeom prst="rect">
-            <a:avLst/>
-          </a:prstGeom>
-          <a:noFill/>
-          <a:ln/>
-        </p:spPr>
-        <p:txBody>
-          <a:bodyPr wrap="square" lIns="0" tIns="0" rIns="0" bIns="0" rtlCol="0" anchor="ctr"/>
-          <a:lstStyle/>
-          <a:p>
-            <a:pPr algn="ctr" indent="0" marL="0">
-              <a:buNone/>
-            </a:pPr>
-            <a:r>
-              <a:rPr lang="en-US" sz="1000" dirty="0">
-                <a:solidFill>
-                  <a:schemeClr val="accent5"/>
-                </a:solidFill>
-              </a:rPr>
-              <a:t>06:00</a:t>
-            </a:r>
-            <a:endParaRPr lang="en-US" sz="1000" dirty="0"/>
-          </a:p>
-        </p:txBody>
-      </p:sp>
-      <p:sp>
-        <p:nvSpPr>
-          <p:cNvPr id="6" name="Text 3"/>
-          <p:cNvSpPr txBox="1"/>
-          <p:nvPr/>
-        </p:nvSpPr>
-        <p:spPr>
-          <a:xfrm>
-            <a:off x="6766560" y="1691640"/>
-            <a:ext cx="731520" cy="228600"/>
-          </a:xfrm>
-          <a:prstGeom prst="rect">
-            <a:avLst/>
-          </a:prstGeom>
-          <a:noFill/>
-          <a:ln/>
-        </p:spPr>
-        <p:txBody>
-          <a:bodyPr wrap="square" lIns="0" tIns="0" rIns="0" bIns="0" rtlCol="0" anchor="ctr"/>
-          <a:lstStyle/>
-          <a:p>
-            <a:pPr algn="ctr" indent="0" marL="0">
-              <a:buNone/>
-            </a:pPr>
-            <a:r>
-              <a:rPr lang="en-US" sz="1000" dirty="0">
-                <a:solidFill>
-                  <a:schemeClr val="accent5"/>
-                </a:solidFill>
-              </a:rPr>
-              <a:t>12:00</a:t>
-            </a:r>
-            <a:endParaRPr lang="en-US" sz="1000" dirty="0"/>
-          </a:p>
-        </p:txBody>
-      </p:sp>
-      <p:sp>
-        <p:nvSpPr>
-          <p:cNvPr id="7" name="Text 4"/>
-          <p:cNvSpPr txBox="1"/>
-          <p:nvPr/>
-        </p:nvSpPr>
-        <p:spPr>
-          <a:xfrm>
-            <a:off x="9006840" y="1691640"/>
-            <a:ext cx="731520" cy="228600"/>
-          </a:xfrm>
-          <a:prstGeom prst="rect">
-            <a:avLst/>
-          </a:prstGeom>
-          <a:noFill/>
-          <a:ln/>
-        </p:spPr>
-        <p:txBody>
-          <a:bodyPr wrap="square" lIns="0" tIns="0" rIns="0" bIns="0" rtlCol="0" anchor="ctr"/>
-          <a:lstStyle/>
-          <a:p>
-            <a:pPr algn="ctr" indent="0" marL="0">
-              <a:buNone/>
-            </a:pPr>
-            <a:r>
-              <a:rPr lang="en-US" sz="1000" dirty="0">
-                <a:solidFill>
-                  <a:schemeClr val="accent5"/>
-                </a:solidFill>
-              </a:rPr>
-              <a:t>18:00</a:t>
-            </a:r>
-            <a:endParaRPr lang="en-US" sz="1000" dirty="0"/>
-          </a:p>
-        </p:txBody>
-      </p:sp>
-      <p:sp>
-        <p:nvSpPr>
-          <p:cNvPr id="8" name="Text 5"/>
-          <p:cNvSpPr txBox="1"/>
-          <p:nvPr/>
-        </p:nvSpPr>
-        <p:spPr>
-          <a:xfrm>
-            <a:off x="10881360" y="1691640"/>
-            <a:ext cx="731520" cy="228600"/>
-          </a:xfrm>
-          <a:prstGeom prst="rect">
-            <a:avLst/>
-          </a:prstGeom>
-          <a:noFill/>
-          <a:ln/>
-        </p:spPr>
-        <p:txBody>
-          <a:bodyPr wrap="square" lIns="0" tIns="0" rIns="0" bIns="0" rtlCol="0" anchor="ctr"/>
-          <a:lstStyle/>
-          <a:p>
-            <a:pPr algn="r" indent="0" marL="0">
-              <a:buNone/>
-            </a:pPr>
-            <a:r>
-              <a:rPr lang="en-US" sz="1000" dirty="0">
-                <a:solidFill>
-                  <a:schemeClr val="accent5"/>
-                </a:solidFill>
-              </a:rPr>
-              <a:t>24:00</a:t>
-            </a:r>
-            <a:endParaRPr lang="en-US" sz="1000" dirty="0"/>
-          </a:p>
-        </p:txBody>
-      </p:sp>
-      <p:sp>
-        <p:nvSpPr>
-          <p:cNvPr id="9" name="Text 6"/>
-          <p:cNvSpPr txBox="1"/>
-          <p:nvPr/>
-        </p:nvSpPr>
-        <p:spPr>
-          <a:xfrm>
-            <a:off x="548640" y="2011680"/>
-            <a:ext cx="2011680" cy="457200"/>
-          </a:xfrm>
-          <a:prstGeom prst="rect">
-            <a:avLst/>
-          </a:prstGeom>
-          <a:noFill/>
-          <a:ln/>
-        </p:spPr>
-        <p:txBody>
-          <a:bodyPr wrap="square" lIns="0" tIns="0" rIns="0" bIns="0" rtlCol="0" anchor="ctr"/>
-          <a:lstStyle/>
-          <a:p>
-            <a:pPr indent="0" marL="0">
-              <a:buNone/>
-            </a:pPr>
-            <a:r>
-              <a:rPr lang="en-US" sz="1400" dirty="0">
-                <a:solidFill>
-                  <a:schemeClr val="bg1"/>
-                </a:solidFill>
-              </a:rPr>
-              <a:t>Monday, Jakarta</a:t>
-            </a:r>
-            <a:endParaRPr lang="en-US" sz="1400" dirty="0"/>
-          </a:p>
-        </p:txBody>
-      </p:sp>
-      <p:sp>
-        <p:nvSpPr>
-          <p:cNvPr id="10" name="Shape 7"/>
+            <a:pPr indent="0" marL="0">
+              <a:buNone/>
+            </a:pPr>
+            <a:r>
+              <a:rPr lang="en-US" sz="1600" b="1" dirty="0">
+                <a:solidFill>
+                  <a:schemeClr val="bg2"/>
+                </a:solidFill>
+              </a:rPr>
+              <a:t>In production</a:t>
+            </a:r>
+            <a:endParaRPr lang="en-US" sz="1600" dirty="0"/>
+          </a:p>
+        </p:txBody>
+      </p:sp>
+      <p:sp>
+        <p:nvSpPr>
+          <p:cNvPr id="5" name="Shape 2"/>
           <p:cNvSpPr/>
           <p:nvPr/>
         </p:nvSpPr>
         <p:spPr>
           <a:xfrm>
-            <a:off x="2651760" y="2011680"/>
-            <a:ext cx="8961120" cy="457200"/>
+            <a:off x="548640" y="2194560"/>
+            <a:ext cx="2423160" cy="457200"/>
           </a:xfrm>
           <a:prstGeom prst="roundRect">
             <a:avLst>
-              <a:gd name="adj" fmla="val 12000"/>
+              <a:gd name="adj" fmla="val 50000"/>
             </a:avLst>
           </a:prstGeom>
           <a:solidFill>
@@ -11451,180 +10320,57 @@
       </p:sp>
       <p:sp>
         <p:nvSpPr>
-          <p:cNvPr id="11" name="Shape 8"/>
+          <p:cNvPr id="6" name="Text 3"/>
+          <p:cNvSpPr txBox="1"/>
+          <p:nvPr/>
+        </p:nvSpPr>
+        <p:spPr>
+          <a:xfrm>
+            <a:off x="548640" y="2194560"/>
+            <a:ext cx="2423160" cy="457200"/>
+          </a:xfrm>
+          <a:prstGeom prst="rect">
+            <a:avLst/>
+          </a:prstGeom>
+          <a:noFill/>
+          <a:ln/>
+        </p:spPr>
+        <p:txBody>
+          <a:bodyPr wrap="square" lIns="0" tIns="0" rIns="0" bIns="0" rtlCol="0" anchor="ctr"/>
+          <a:lstStyle/>
+          <a:p>
+            <a:pPr algn="ctr" indent="0" marL="0">
+              <a:buNone/>
+            </a:pPr>
+            <a:r>
+              <a:rPr lang="en-US" sz="1200" dirty="0">
+                <a:solidFill>
+                  <a:schemeClr val="bg1"/>
+                </a:solidFill>
+                <a:latin typeface="Courier New" pitchFamily="34" charset="0"/>
+                <a:ea typeface="Courier New" pitchFamily="34" charset="-122"/>
+                <a:cs typeface="Courier New" pitchFamily="34" charset="-120"/>
+              </a:rPr>
+              <a:t>senin-jumat</a:t>
+            </a:r>
+            <a:endParaRPr lang="en-US" sz="1200" dirty="0"/>
+          </a:p>
+        </p:txBody>
+      </p:sp>
+      <p:sp>
+        <p:nvSpPr>
+          <p:cNvPr id="7" name="Shape 4"/>
           <p:cNvSpPr/>
           <p:nvPr/>
         </p:nvSpPr>
         <p:spPr>
           <a:xfrm>
-            <a:off x="4910328" y="2057400"/>
-            <a:ext cx="1456944" cy="365760"/>
+            <a:off x="3154680" y="2194560"/>
+            <a:ext cx="2423160" cy="457200"/>
           </a:xfrm>
           <a:prstGeom prst="roundRect">
             <a:avLst>
-              <a:gd name="adj" fmla="val 12500"/>
-            </a:avLst>
-          </a:prstGeom>
-          <a:solidFill>
-            <a:schemeClr val="bg1"/>
-          </a:solidFill>
-          <a:ln w="12700">
-            <a:solidFill>
-              <a:schemeClr val="bg1"/>
-            </a:solidFill>
-            <a:prstDash val="solid"/>
-          </a:ln>
-        </p:spPr>
-      </p:sp>
-      <p:sp>
-        <p:nvSpPr>
-          <p:cNvPr id="12" name="Text 9"/>
-          <p:cNvSpPr txBox="1"/>
-          <p:nvPr/>
-        </p:nvSpPr>
-        <p:spPr>
-          <a:xfrm>
-            <a:off x="4946904" y="2011680"/>
-            <a:ext cx="1402080" cy="457200"/>
-          </a:xfrm>
-          <a:prstGeom prst="rect">
-            <a:avLst/>
-          </a:prstGeom>
-          <a:noFill/>
-          <a:ln/>
-        </p:spPr>
-        <p:txBody>
-          <a:bodyPr wrap="square" lIns="0" tIns="0" rIns="0" bIns="0" rtlCol="0" anchor="ctr"/>
-          <a:lstStyle/>
-          <a:p>
-            <a:pPr indent="0" marL="0">
-              <a:buNone/>
-            </a:pPr>
-            <a:r>
-              <a:rPr lang="en-US" sz="1000" dirty="0">
-                <a:solidFill>
-                  <a:schemeClr val="tx1"/>
-                </a:solidFill>
-              </a:rPr>
-              <a:t>Pagi Jakarta</a:t>
-            </a:r>
-            <a:endParaRPr lang="en-US" sz="1000" dirty="0"/>
-          </a:p>
-        </p:txBody>
-      </p:sp>
-      <p:sp>
-        <p:nvSpPr>
-          <p:cNvPr id="13" name="Shape 10"/>
-          <p:cNvSpPr/>
-          <p:nvPr/>
-        </p:nvSpPr>
-        <p:spPr>
-          <a:xfrm>
-            <a:off x="6403848" y="2057400"/>
-            <a:ext cx="1083564" cy="365760"/>
-          </a:xfrm>
-          <a:prstGeom prst="roundRect">
-            <a:avLst>
-              <a:gd name="adj" fmla="val 12500"/>
-            </a:avLst>
-          </a:prstGeom>
-          <a:solidFill>
-            <a:schemeClr val="bg1"/>
-          </a:solidFill>
-          <a:ln w="12700">
-            <a:solidFill>
-              <a:schemeClr val="bg1"/>
-            </a:solidFill>
-            <a:prstDash val="solid"/>
-          </a:ln>
-        </p:spPr>
-      </p:sp>
-      <p:sp>
-        <p:nvSpPr>
-          <p:cNvPr id="14" name="Text 11"/>
-          <p:cNvSpPr txBox="1"/>
-          <p:nvPr/>
-        </p:nvSpPr>
-        <p:spPr>
-          <a:xfrm>
-            <a:off x="6440424" y="2011680"/>
-            <a:ext cx="1028700" cy="457200"/>
-          </a:xfrm>
-          <a:prstGeom prst="rect">
-            <a:avLst/>
-          </a:prstGeom>
-          <a:noFill/>
-          <a:ln/>
-        </p:spPr>
-        <p:txBody>
-          <a:bodyPr wrap="square" lIns="0" tIns="0" rIns="0" bIns="0" rtlCol="0" anchor="ctr"/>
-          <a:lstStyle/>
-          <a:p>
-            <a:pPr indent="0" marL="0">
-              <a:buNone/>
-            </a:pPr>
-            <a:r>
-              <a:rPr lang="en-US" sz="1000" dirty="0">
-                <a:solidFill>
-                  <a:schemeClr val="tx1"/>
-                </a:solidFill>
-              </a:rPr>
-              <a:t>Jam Makan Siang</a:t>
-            </a:r>
-            <a:endParaRPr lang="en-US" sz="1000" dirty="0"/>
-          </a:p>
-        </p:txBody>
-      </p:sp>
-      <p:sp>
-        <p:nvSpPr>
-          <p:cNvPr id="15" name="Text 12"/>
-          <p:cNvSpPr txBox="1"/>
-          <p:nvPr/>
-        </p:nvSpPr>
-        <p:spPr>
-          <a:xfrm>
-            <a:off x="548640" y="2788920"/>
-            <a:ext cx="2011680" cy="457200"/>
-          </a:xfrm>
-          <a:prstGeom prst="rect">
-            <a:avLst/>
-          </a:prstGeom>
-          <a:noFill/>
-          <a:ln/>
-        </p:spPr>
-        <p:txBody>
-          <a:bodyPr wrap="square" lIns="0" tIns="0" rIns="0" bIns="0" rtlCol="0" anchor="ctr"/>
-          <a:lstStyle/>
-          <a:p>
-            <a:pPr indent="0" marL="0">
-              <a:buNone/>
-            </a:pPr>
-            <a:r>
-              <a:rPr lang="en-US" sz="1400" dirty="0">
-                <a:solidFill>
-                  <a:schemeClr val="bg1"/>
-                </a:solidFill>
-              </a:rPr>
-              <a:t>New 09:00-11:00</a:t>
-            </a:r>
-            <a:endParaRPr lang="en-US" sz="1400" dirty="0"/>
-          </a:p>
-        </p:txBody>
-      </p:sp>
-      <p:sp>
-        <p:nvSpPr>
-          <p:cNvPr id="16" name="Shape 13"/>
-          <p:cNvSpPr/>
-          <p:nvPr/>
-        </p:nvSpPr>
-        <p:spPr>
-          <a:xfrm>
-            <a:off x="2651760" y="2788920"/>
-            <a:ext cx="8961120" cy="457200"/>
-          </a:xfrm>
-          <a:prstGeom prst="roundRect">
-            <a:avLst>
-              <a:gd name="adj" fmla="val 12000"/>
+              <a:gd name="adj" fmla="val 50000"/>
             </a:avLst>
           </a:prstGeom>
           <a:solidFill>
@@ -11640,153 +10386,57 @@
       </p:sp>
       <p:sp>
         <p:nvSpPr>
-          <p:cNvPr id="17" name="Shape 14"/>
+          <p:cNvPr id="8" name="Text 5"/>
+          <p:cNvSpPr txBox="1"/>
+          <p:nvPr/>
+        </p:nvSpPr>
+        <p:spPr>
+          <a:xfrm>
+            <a:off x="3154680" y="2194560"/>
+            <a:ext cx="2423160" cy="457200"/>
+          </a:xfrm>
+          <a:prstGeom prst="rect">
+            <a:avLst/>
+          </a:prstGeom>
+          <a:noFill/>
+          <a:ln/>
+        </p:spPr>
+        <p:txBody>
+          <a:bodyPr wrap="square" lIns="0" tIns="0" rIns="0" bIns="0" rtlCol="0" anchor="ctr"/>
+          <a:lstStyle/>
+          <a:p>
+            <a:pPr algn="ctr" indent="0" marL="0">
+              <a:buNone/>
+            </a:pPr>
+            <a:r>
+              <a:rPr lang="en-US" sz="1200" dirty="0">
+                <a:solidFill>
+                  <a:schemeClr val="bg1"/>
+                </a:solidFill>
+                <a:latin typeface="Courier New" pitchFamily="34" charset="0"/>
+                <a:ea typeface="Courier New" pitchFamily="34" charset="-122"/>
+                <a:cs typeface="Courier New" pitchFamily="34" charset="-120"/>
+              </a:rPr>
+              <a:t>Senin- Jumat</a:t>
+            </a:r>
+            <a:endParaRPr lang="en-US" sz="1200" dirty="0"/>
+          </a:p>
+        </p:txBody>
+      </p:sp>
+      <p:sp>
+        <p:nvSpPr>
+          <p:cNvPr id="9" name="Shape 6"/>
           <p:cNvSpPr/>
           <p:nvPr/>
         </p:nvSpPr>
         <p:spPr>
           <a:xfrm>
-            <a:off x="6030468" y="2834640"/>
-            <a:ext cx="710184" cy="365760"/>
+            <a:off x="548640" y="2834640"/>
+            <a:ext cx="2423160" cy="457200"/>
           </a:xfrm>
           <a:prstGeom prst="roundRect">
             <a:avLst>
-              <a:gd name="adj" fmla="val 12500"/>
-            </a:avLst>
-          </a:prstGeom>
-          <a:solidFill>
-            <a:schemeClr val="accent1"/>
-          </a:solidFill>
-          <a:ln w="12700">
-            <a:solidFill>
-              <a:schemeClr val="accent1"/>
-            </a:solidFill>
-            <a:prstDash val="solid"/>
-          </a:ln>
-        </p:spPr>
-      </p:sp>
-      <p:sp>
-        <p:nvSpPr>
-          <p:cNvPr id="18" name="Text 15"/>
-          <p:cNvSpPr txBox="1"/>
-          <p:nvPr/>
-        </p:nvSpPr>
-        <p:spPr>
-          <a:xfrm>
-            <a:off x="6067044" y="2788920"/>
-            <a:ext cx="655320" cy="457200"/>
-          </a:xfrm>
-          <a:prstGeom prst="rect">
-            <a:avLst/>
-          </a:prstGeom>
-          <a:noFill/>
-          <a:ln/>
-        </p:spPr>
-        <p:txBody>
-          <a:bodyPr wrap="square" lIns="0" tIns="0" rIns="0" bIns="0" rtlCol="0" anchor="ctr"/>
-          <a:lstStyle/>
-          <a:p>
-            <a:pPr indent="0" marL="0">
-              <a:buNone/>
-            </a:pPr>
-            <a:r>
-              <a:rPr lang="en-US" sz="1000" dirty="0">
-                <a:solidFill>
-                  <a:schemeClr val="bg1"/>
-                </a:solidFill>
-              </a:rPr>
-              <a:t>Ngobrol</a:t>
-            </a:r>
-            <a:endParaRPr lang="en-US" sz="1000" dirty="0"/>
-          </a:p>
-        </p:txBody>
-      </p:sp>
-      <p:sp>
-        <p:nvSpPr>
-          <p:cNvPr id="19" name="Text 16"/>
-          <p:cNvSpPr txBox="1"/>
-          <p:nvPr/>
-        </p:nvSpPr>
-        <p:spPr>
-          <a:xfrm>
-            <a:off x="2651760" y="3319272"/>
-            <a:ext cx="8961120" cy="274320"/>
-          </a:xfrm>
-          <a:prstGeom prst="rect">
-            <a:avLst/>
-          </a:prstGeom>
-          <a:noFill/>
-          <a:ln/>
-        </p:spPr>
-        <p:txBody>
-          <a:bodyPr wrap="square" lIns="0" tIns="0" rIns="0" bIns="0" rtlCol="0" anchor="ctr"/>
-          <a:lstStyle/>
-          <a:p>
-            <a:pPr indent="0" marL="0">
-              <a:buNone/>
-            </a:pPr>
-            <a:r>
-              <a:rPr lang="en-US" sz="1300" dirty="0">
-                <a:solidFill>
-                  <a:schemeClr val="accent1"/>
-                </a:solidFill>
-              </a:rPr>
-              <a:t>Refused: clashes with "Pagi Jakarta" (06:00 - 10:00)</a:t>
-            </a:r>
-            <a:endParaRPr lang="en-US" sz="1300" dirty="0"/>
-          </a:p>
-        </p:txBody>
-      </p:sp>
-      <p:sp>
-        <p:nvSpPr>
-          <p:cNvPr id="20" name="Text 17"/>
-          <p:cNvSpPr txBox="1"/>
-          <p:nvPr/>
-        </p:nvSpPr>
-        <p:spPr>
-          <a:xfrm>
-            <a:off x="548640" y="3749040"/>
-            <a:ext cx="2011680" cy="457200"/>
-          </a:xfrm>
-          <a:prstGeom prst="rect">
-            <a:avLst/>
-          </a:prstGeom>
-          <a:noFill/>
-          <a:ln/>
-        </p:spPr>
-        <p:txBody>
-          <a:bodyPr wrap="square" lIns="0" tIns="0" rIns="0" bIns="0" rtlCol="0" anchor="ctr"/>
-          <a:lstStyle/>
-          <a:p>
-            <a:pPr indent="0" marL="0">
-              <a:buNone/>
-            </a:pPr>
-            <a:r>
-              <a:rPr lang="en-US" sz="1400" dirty="0">
-                <a:solidFill>
-                  <a:schemeClr val="bg1"/>
-                </a:solidFill>
-              </a:rPr>
-              <a:t>New 13:00-14:00</a:t>
-            </a:r>
-            <a:endParaRPr lang="en-US" sz="1400" dirty="0"/>
-          </a:p>
-        </p:txBody>
-      </p:sp>
-      <p:sp>
-        <p:nvSpPr>
-          <p:cNvPr id="21" name="Shape 18"/>
-          <p:cNvSpPr/>
-          <p:nvPr/>
-        </p:nvSpPr>
-        <p:spPr>
-          <a:xfrm>
-            <a:off x="2651760" y="3749040"/>
-            <a:ext cx="8961120" cy="457200"/>
-          </a:xfrm>
-          <a:prstGeom prst="roundRect">
-            <a:avLst>
-              <a:gd name="adj" fmla="val 12000"/>
+              <a:gd name="adj" fmla="val 50000"/>
             </a:avLst>
           </a:prstGeom>
           <a:solidFill>
@@ -11802,26 +10452,65 @@
       </p:sp>
       <p:sp>
         <p:nvSpPr>
-          <p:cNvPr id="22" name="Shape 19"/>
+          <p:cNvPr id="10" name="Text 7"/>
+          <p:cNvSpPr txBox="1"/>
+          <p:nvPr/>
+        </p:nvSpPr>
+        <p:spPr>
+          <a:xfrm>
+            <a:off x="548640" y="2834640"/>
+            <a:ext cx="2423160" cy="457200"/>
+          </a:xfrm>
+          <a:prstGeom prst="rect">
+            <a:avLst/>
+          </a:prstGeom>
+          <a:noFill/>
+          <a:ln/>
+        </p:spPr>
+        <p:txBody>
+          <a:bodyPr wrap="square" lIns="0" tIns="0" rIns="0" bIns="0" rtlCol="0" anchor="ctr"/>
+          <a:lstStyle/>
+          <a:p>
+            <a:pPr algn="ctr" indent="0" marL="0">
+              <a:buNone/>
+            </a:pPr>
+            <a:r>
+              <a:rPr lang="en-US" sz="1200" dirty="0">
+                <a:solidFill>
+                  <a:schemeClr val="bg1"/>
+                </a:solidFill>
+                <a:latin typeface="Courier New" pitchFamily="34" charset="0"/>
+                <a:ea typeface="Courier New" pitchFamily="34" charset="-122"/>
+                <a:cs typeface="Courier New" pitchFamily="34" charset="-120"/>
+              </a:rPr>
+              <a:t>Monday-Friday</a:t>
+            </a:r>
+            <a:endParaRPr lang="en-US" sz="1200" dirty="0"/>
+          </a:p>
+        </p:txBody>
+      </p:sp>
+      <p:sp>
+        <p:nvSpPr>
+          <p:cNvPr id="11" name="Shape 8"/>
           <p:cNvSpPr/>
           <p:nvPr/>
         </p:nvSpPr>
         <p:spPr>
           <a:xfrm>
-            <a:off x="7523988" y="3794760"/>
-            <a:ext cx="336804" cy="365760"/>
+            <a:off x="3154680" y="2834640"/>
+            <a:ext cx="2423160" cy="457200"/>
           </a:xfrm>
           <a:prstGeom prst="roundRect">
             <a:avLst>
-              <a:gd name="adj" fmla="val 13575"/>
+              <a:gd name="adj" fmla="val 50000"/>
             </a:avLst>
           </a:prstGeom>
           <a:solidFill>
-            <a:schemeClr val="accent3"/>
+            <a:schemeClr val="accent4"/>
           </a:solidFill>
           <a:ln w="12700">
             <a:solidFill>
-              <a:schemeClr val="accent3"/>
+              <a:schemeClr val="accent4"/>
             </a:solidFill>
             <a:prstDash val="solid"/>
           </a:ln>
@@ -11829,90 +10518,435 @@
       </p:sp>
       <p:sp>
         <p:nvSpPr>
+          <p:cNvPr id="12" name="Text 9"/>
+          <p:cNvSpPr txBox="1"/>
+          <p:nvPr/>
+        </p:nvSpPr>
+        <p:spPr>
+          <a:xfrm>
+            <a:off x="3154680" y="2834640"/>
+            <a:ext cx="2423160" cy="457200"/>
+          </a:xfrm>
+          <a:prstGeom prst="rect">
+            <a:avLst/>
+          </a:prstGeom>
+          <a:noFill/>
+          <a:ln/>
+        </p:spPr>
+        <p:txBody>
+          <a:bodyPr wrap="square" lIns="0" tIns="0" rIns="0" bIns="0" rtlCol="0" anchor="ctr"/>
+          <a:lstStyle/>
+          <a:p>
+            <a:pPr algn="ctr" indent="0" marL="0">
+              <a:buNone/>
+            </a:pPr>
+            <a:r>
+              <a:rPr lang="en-US" sz="1200" dirty="0">
+                <a:solidFill>
+                  <a:schemeClr val="bg1"/>
+                </a:solidFill>
+                <a:latin typeface="Courier New" pitchFamily="34" charset="0"/>
+                <a:ea typeface="Courier New" pitchFamily="34" charset="-122"/>
+                <a:cs typeface="Courier New" pitchFamily="34" charset="-120"/>
+              </a:rPr>
+              <a:t>6:00 AM - 10:00 AM</a:t>
+            </a:r>
+            <a:endParaRPr lang="en-US" sz="1200" dirty="0"/>
+          </a:p>
+        </p:txBody>
+      </p:sp>
+      <p:sp>
+        <p:nvSpPr>
+          <p:cNvPr id="13" name="Shape 10"/>
+          <p:cNvSpPr/>
+          <p:nvPr/>
+        </p:nvSpPr>
+        <p:spPr>
+          <a:xfrm>
+            <a:off x="548640" y="3474720"/>
+            <a:ext cx="2423160" cy="457200"/>
+          </a:xfrm>
+          <a:prstGeom prst="roundRect">
+            <a:avLst>
+              <a:gd name="adj" fmla="val 50000"/>
+            </a:avLst>
+          </a:prstGeom>
+          <a:solidFill>
+            <a:schemeClr val="accent4"/>
+          </a:solidFill>
+          <a:ln w="12700">
+            <a:solidFill>
+              <a:schemeClr val="accent4"/>
+            </a:solidFill>
+            <a:prstDash val="solid"/>
+          </a:ln>
+        </p:spPr>
+      </p:sp>
+      <p:sp>
+        <p:nvSpPr>
+          <p:cNvPr id="14" name="Text 11"/>
+          <p:cNvSpPr txBox="1"/>
+          <p:nvPr/>
+        </p:nvSpPr>
+        <p:spPr>
+          <a:xfrm>
+            <a:off x="548640" y="3474720"/>
+            <a:ext cx="2423160" cy="457200"/>
+          </a:xfrm>
+          <a:prstGeom prst="rect">
+            <a:avLst/>
+          </a:prstGeom>
+          <a:noFill/>
+          <a:ln/>
+        </p:spPr>
+        <p:txBody>
+          <a:bodyPr wrap="square" lIns="0" tIns="0" rIns="0" bIns="0" rtlCol="0" anchor="ctr"/>
+          <a:lstStyle/>
+          <a:p>
+            <a:pPr algn="ctr" indent="0" marL="0">
+              <a:buNone/>
+            </a:pPr>
+            <a:r>
+              <a:rPr lang="en-US" sz="1200" dirty="0">
+                <a:solidFill>
+                  <a:schemeClr val="bg1"/>
+                </a:solidFill>
+                <a:latin typeface="Courier New" pitchFamily="34" charset="0"/>
+                <a:ea typeface="Courier New" pitchFamily="34" charset="-122"/>
+                <a:cs typeface="Courier New" pitchFamily="34" charset="-120"/>
+              </a:rPr>
+              <a:t>08.00-09.00</a:t>
+            </a:r>
+            <a:endParaRPr lang="en-US" sz="1200" dirty="0"/>
+          </a:p>
+        </p:txBody>
+      </p:sp>
+      <p:sp>
+        <p:nvSpPr>
+          <p:cNvPr id="15" name="Shape 12"/>
+          <p:cNvSpPr/>
+          <p:nvPr/>
+        </p:nvSpPr>
+        <p:spPr>
+          <a:xfrm>
+            <a:off x="3154680" y="3474720"/>
+            <a:ext cx="2423160" cy="457200"/>
+          </a:xfrm>
+          <a:prstGeom prst="roundRect">
+            <a:avLst>
+              <a:gd name="adj" fmla="val 50000"/>
+            </a:avLst>
+          </a:prstGeom>
+          <a:solidFill>
+            <a:schemeClr val="accent4"/>
+          </a:solidFill>
+          <a:ln w="12700">
+            <a:solidFill>
+              <a:schemeClr val="accent4"/>
+            </a:solidFill>
+            <a:prstDash val="solid"/>
+          </a:ln>
+        </p:spPr>
+      </p:sp>
+      <p:sp>
+        <p:nvSpPr>
+          <p:cNvPr id="16" name="Text 13"/>
+          <p:cNvSpPr txBox="1"/>
+          <p:nvPr/>
+        </p:nvSpPr>
+        <p:spPr>
+          <a:xfrm>
+            <a:off x="3154680" y="3474720"/>
+            <a:ext cx="2423160" cy="457200"/>
+          </a:xfrm>
+          <a:prstGeom prst="rect">
+            <a:avLst/>
+          </a:prstGeom>
+          <a:noFill/>
+          <a:ln/>
+        </p:spPr>
+        <p:txBody>
+          <a:bodyPr wrap="square" lIns="0" tIns="0" rIns="0" bIns="0" rtlCol="0" anchor="ctr"/>
+          <a:lstStyle/>
+          <a:p>
+            <a:pPr algn="ctr" indent="0" marL="0">
+              <a:buNone/>
+            </a:pPr>
+            <a:r>
+              <a:rPr lang="en-US" sz="1200" dirty="0">
+                <a:solidFill>
+                  <a:schemeClr val="bg1"/>
+                </a:solidFill>
+                <a:latin typeface="Courier New" pitchFamily="34" charset="0"/>
+                <a:ea typeface="Courier New" pitchFamily="34" charset="-122"/>
+                <a:cs typeface="Courier New" pitchFamily="34" charset="-120"/>
+              </a:rPr>
+              <a:t>20:00-24:00</a:t>
+            </a:r>
+            <a:endParaRPr lang="en-US" sz="1200" dirty="0"/>
+          </a:p>
+        </p:txBody>
+      </p:sp>
+      <p:sp>
+        <p:nvSpPr>
+          <p:cNvPr id="17" name="Shape 14"/>
+          <p:cNvSpPr/>
+          <p:nvPr/>
+        </p:nvSpPr>
+        <p:spPr>
+          <a:xfrm>
+            <a:off x="5852160" y="3108960"/>
+            <a:ext cx="822960" cy="914"/>
+          </a:xfrm>
+          <a:prstGeom prst="line">
+            <a:avLst/>
+          </a:prstGeom>
+          <a:noFill/>
+          <a:ln w="19050">
+            <a:solidFill>
+              <a:schemeClr val="accent5"/>
+            </a:solidFill>
+            <a:prstDash val="solid"/>
+            <a:tailEnd type="triangle"/>
+          </a:ln>
+        </p:spPr>
+      </p:sp>
+      <p:sp>
+        <p:nvSpPr>
+          <p:cNvPr id="18" name="Text 15"/>
+          <p:cNvSpPr txBox="1"/>
+          <p:nvPr/>
+        </p:nvSpPr>
+        <p:spPr>
+          <a:xfrm>
+            <a:off x="6949440" y="1691640"/>
+            <a:ext cx="4572000" cy="365760"/>
+          </a:xfrm>
+          <a:prstGeom prst="rect">
+            <a:avLst/>
+          </a:prstGeom>
+          <a:noFill/>
+          <a:ln/>
+        </p:spPr>
+        <p:txBody>
+          <a:bodyPr wrap="square" lIns="0" tIns="0" rIns="0" bIns="0" rtlCol="0" anchor="ctr"/>
+          <a:lstStyle/>
+          <a:p>
+            <a:pPr indent="0" marL="0">
+              <a:buNone/>
+            </a:pPr>
+            <a:r>
+              <a:rPr lang="en-US" sz="1600" b="1" dirty="0">
+                <a:solidFill>
+                  <a:schemeClr val="bg2"/>
+                </a:solidFill>
+              </a:rPr>
+              <a:t>In the demo</a:t>
+            </a:r>
+            <a:endParaRPr lang="en-US" sz="1600" dirty="0"/>
+          </a:p>
+        </p:txBody>
+      </p:sp>
+      <p:sp>
+        <p:nvSpPr>
+          <p:cNvPr id="19" name="Text 16"/>
+          <p:cNvSpPr txBox="1"/>
+          <p:nvPr/>
+        </p:nvSpPr>
+        <p:spPr>
+          <a:xfrm>
+            <a:off x="6949440" y="2148840"/>
+            <a:ext cx="2194560" cy="914400"/>
+          </a:xfrm>
+          <a:prstGeom prst="rect">
+            <a:avLst/>
+          </a:prstGeom>
+          <a:noFill/>
+          <a:ln/>
+        </p:spPr>
+        <p:txBody>
+          <a:bodyPr wrap="square" lIns="0" tIns="0" rIns="0" bIns="0" rtlCol="0" anchor="ctr"/>
+          <a:lstStyle/>
+          <a:p>
+            <a:pPr indent="0" marL="0">
+              <a:buNone/>
+            </a:pPr>
+            <a:r>
+              <a:rPr lang="en-US" sz="4800" b="1" dirty="0">
+                <a:solidFill>
+                  <a:schemeClr val="accent1"/>
+                </a:solidFill>
+                <a:latin typeface="+mj-lt" pitchFamily="34" charset="0"/>
+                <a:ea typeface="+mj-lt" pitchFamily="34" charset="-122"/>
+                <a:cs typeface="+mj-lt" pitchFamily="34" charset="-120"/>
+              </a:rPr>
+              <a:t>450</a:t>
+            </a:r>
+            <a:endParaRPr lang="en-US" sz="4800" dirty="0"/>
+          </a:p>
+        </p:txBody>
+      </p:sp>
+      <p:sp>
+        <p:nvSpPr>
+          <p:cNvPr id="20" name="Text 17"/>
+          <p:cNvSpPr txBox="1"/>
+          <p:nvPr/>
+        </p:nvSpPr>
+        <p:spPr>
+          <a:xfrm>
+            <a:off x="6949440" y="3063240"/>
+            <a:ext cx="2194560" cy="320040"/>
+          </a:xfrm>
+          <a:prstGeom prst="rect">
+            <a:avLst/>
+          </a:prstGeom>
+          <a:noFill/>
+          <a:ln/>
+        </p:spPr>
+        <p:txBody>
+          <a:bodyPr wrap="square" lIns="0" tIns="0" rIns="0" bIns="0" rtlCol="0" anchor="ctr"/>
+          <a:lstStyle/>
+          <a:p>
+            <a:pPr indent="0" marL="0">
+              <a:buNone/>
+            </a:pPr>
+            <a:r>
+              <a:rPr lang="en-US" sz="1400" dirty="0">
+                <a:solidFill>
+                  <a:schemeClr val="bg2"/>
+                </a:solidFill>
+              </a:rPr>
+              <a:t>minutes = 07:30</a:t>
+            </a:r>
+            <a:endParaRPr lang="en-US" sz="1400" dirty="0"/>
+          </a:p>
+        </p:txBody>
+      </p:sp>
+      <p:sp>
+        <p:nvSpPr>
+          <p:cNvPr id="21" name="Text 18"/>
+          <p:cNvSpPr txBox="1"/>
+          <p:nvPr/>
+        </p:nvSpPr>
+        <p:spPr>
+          <a:xfrm>
+            <a:off x="9326880" y="2148840"/>
+            <a:ext cx="2194560" cy="914400"/>
+          </a:xfrm>
+          <a:prstGeom prst="rect">
+            <a:avLst/>
+          </a:prstGeom>
+          <a:noFill/>
+          <a:ln/>
+        </p:spPr>
+        <p:txBody>
+          <a:bodyPr wrap="square" lIns="0" tIns="0" rIns="0" bIns="0" rtlCol="0" anchor="ctr"/>
+          <a:lstStyle/>
+          <a:p>
+            <a:pPr indent="0" marL="0">
+              <a:buNone/>
+            </a:pPr>
+            <a:r>
+              <a:rPr lang="en-US" sz="4800" b="1" dirty="0">
+                <a:solidFill>
+                  <a:schemeClr val="accent1"/>
+                </a:solidFill>
+                <a:latin typeface="+mj-lt" pitchFamily="34" charset="0"/>
+                <a:ea typeface="+mj-lt" pitchFamily="34" charset="-122"/>
+                <a:cs typeface="+mj-lt" pitchFamily="34" charset="-120"/>
+              </a:rPr>
+              <a:t>1440</a:t>
+            </a:r>
+            <a:endParaRPr lang="en-US" sz="4800" dirty="0"/>
+          </a:p>
+        </p:txBody>
+      </p:sp>
+      <p:sp>
+        <p:nvSpPr>
+          <p:cNvPr id="22" name="Text 19"/>
+          <p:cNvSpPr txBox="1"/>
+          <p:nvPr/>
+        </p:nvSpPr>
+        <p:spPr>
+          <a:xfrm>
+            <a:off x="9326880" y="3063240"/>
+            <a:ext cx="2194560" cy="320040"/>
+          </a:xfrm>
+          <a:prstGeom prst="rect">
+            <a:avLst/>
+          </a:prstGeom>
+          <a:noFill/>
+          <a:ln/>
+        </p:spPr>
+        <p:txBody>
+          <a:bodyPr wrap="square" lIns="0" tIns="0" rIns="0" bIns="0" rtlCol="0" anchor="ctr"/>
+          <a:lstStyle/>
+          <a:p>
+            <a:pPr indent="0" marL="0">
+              <a:buNone/>
+            </a:pPr>
+            <a:r>
+              <a:rPr lang="en-US" sz="1400" dirty="0">
+                <a:solidFill>
+                  <a:schemeClr val="bg2"/>
+                </a:solidFill>
+              </a:rPr>
+              <a:t>minutes = 24:00</a:t>
+            </a:r>
+            <a:endParaRPr lang="en-US" sz="1400" dirty="0"/>
+          </a:p>
+        </p:txBody>
+      </p:sp>
+      <p:sp>
+        <p:nvSpPr>
           <p:cNvPr id="23" name="Text 20"/>
           <p:cNvSpPr txBox="1"/>
           <p:nvPr/>
         </p:nvSpPr>
         <p:spPr>
           <a:xfrm>
-            <a:off x="7560564" y="3749040"/>
-            <a:ext cx="281940" cy="457200"/>
-          </a:xfrm>
-          <a:prstGeom prst="rect">
-            <a:avLst/>
-          </a:prstGeom>
-          <a:noFill/>
-          <a:ln/>
-        </p:spPr>
-        <p:txBody>
-          <a:bodyPr wrap="square" lIns="0" tIns="0" rIns="0" bIns="0" rtlCol="0" anchor="ctr"/>
-          <a:lstStyle/>
-          <a:p>
-            <a:pPr indent="0" marL="0">
-              <a:buNone/>
-            </a:pPr>
-            <a:r>
-              <a:rPr lang="en-US" sz="1000" dirty="0">
+            <a:off x="6949440" y="3566160"/>
+            <a:ext cx="4663440" cy="640080"/>
+          </a:xfrm>
+          <a:prstGeom prst="rect">
+            <a:avLst/>
+          </a:prstGeom>
+          <a:noFill/>
+          <a:ln/>
+        </p:spPr>
+        <p:txBody>
+          <a:bodyPr wrap="square" lIns="0" tIns="0" rIns="0" bIns="0" rtlCol="0" anchor="t"/>
+          <a:lstStyle/>
+          <a:p>
+            <a:pPr indent="0" marL="0">
+              <a:buNone/>
+            </a:pPr>
+            <a:r>
+              <a:rPr lang="en-US" sz="1400" dirty="0">
                 <a:solidFill>
                   <a:schemeClr val="bg1"/>
                 </a:solidFill>
               </a:rPr>
-              <a:t>OK</a:t>
-            </a:r>
-            <a:endParaRPr lang="en-US" sz="1000" dirty="0"/>
-          </a:p>
-        </p:txBody>
-      </p:sp>
-      <p:sp>
-        <p:nvSpPr>
-          <p:cNvPr id="24" name="Text 21"/>
-          <p:cNvSpPr txBox="1"/>
-          <p:nvPr/>
-        </p:nvSpPr>
-        <p:spPr>
-          <a:xfrm>
-            <a:off x="2651760" y="4279392"/>
-            <a:ext cx="8961120" cy="274320"/>
-          </a:xfrm>
-          <a:prstGeom prst="rect">
-            <a:avLst/>
-          </a:prstGeom>
-          <a:noFill/>
-          <a:ln/>
-        </p:spPr>
-        <p:txBody>
-          <a:bodyPr wrap="square" lIns="0" tIns="0" rIns="0" bIns="0" rtlCol="0" anchor="ctr"/>
-          <a:lstStyle/>
-          <a:p>
-            <a:pPr indent="0" marL="0">
-              <a:buNone/>
-            </a:pPr>
-            <a:r>
-              <a:rPr lang="en-US" sz="1300" dirty="0">
-                <a:solidFill>
-                  <a:schemeClr val="accent3"/>
-                </a:solidFill>
-              </a:rPr>
-              <a:t>Allowed: starts exactly when the previous show ends</a:t>
-            </a:r>
-            <a:endParaRPr lang="en-US" sz="1300" dirty="0"/>
-          </a:p>
-        </p:txBody>
-      </p:sp>
-      <p:sp>
-        <p:nvSpPr>
-          <p:cNvPr id="25" name="panel"/>
+              <a:t>day_of_week 1-7 (ISO), one row per day. The form takes HH:MM only.</a:t>
+            </a:r>
+            <a:endParaRPr lang="en-US" sz="1400" dirty="0"/>
+          </a:p>
+        </p:txBody>
+      </p:sp>
+      <p:sp>
+        <p:nvSpPr>
+          <p:cNvPr id="24" name="panel"/>
           <p:cNvSpPr/>
           <p:nvPr/>
         </p:nvSpPr>
         <p:spPr>
           <a:xfrm>
-            <a:off x="548640" y="4754880"/>
-            <a:ext cx="3520440" cy="1325880"/>
+            <a:off x="548640" y="4526280"/>
+            <a:ext cx="11064240" cy="1554480"/>
           </a:xfrm>
           <a:prstGeom prst="roundRect">
             <a:avLst>
-              <a:gd name="adj" fmla="val 5517"/>
+              <a:gd name="adj" fmla="val 4706"/>
             </a:avLst>
           </a:prstGeom>
           <a:solidFill>
@@ -11928,63 +10962,14 @@
       </p:sp>
       <p:sp>
         <p:nvSpPr>
-          <p:cNvPr id="26" name="Shape 23"/>
-          <p:cNvSpPr/>
-          <p:nvPr/>
-        </p:nvSpPr>
-        <p:spPr>
-          <a:xfrm>
-            <a:off x="777240" y="4983480"/>
-            <a:ext cx="502920" cy="502920"/>
-          </a:xfrm>
-          <a:prstGeom prst="ellipse">
-            <a:avLst/>
-          </a:prstGeom>
-          <a:solidFill>
-            <a:schemeClr val="accent1"/>
-          </a:solidFill>
-          <a:ln w="12700">
-            <a:solidFill>
-              <a:schemeClr val="accent1"/>
-            </a:solidFill>
-            <a:prstDash val="solid"/>
-          </a:ln>
-        </p:spPr>
-      </p:sp>
-      <p:pic>
-        <p:nvPicPr>
-          <p:cNvPr id="27" name="Image 0" descr="preencoded.png">    </p:cNvPr>
-          <p:cNvPicPr>
-            <a:picLocks noChangeAspect="1"/>
-          </p:cNvPicPr>
-          <p:nvPr/>
-        </p:nvPicPr>
-        <p:blipFill>
-          <a:blip r:embed="rId1"/>
-          <a:stretch>
-            <a:fillRect/>
-          </a:stretch>
-        </p:blipFill>
-        <p:spPr>
-          <a:xfrm>
-            <a:off x="897941" y="5104181"/>
-            <a:ext cx="261518" cy="261518"/>
-          </a:xfrm>
-          <a:prstGeom prst="rect">
-            <a:avLst/>
-          </a:prstGeom>
-        </p:spPr>
-      </p:pic>
-      <p:sp>
-        <p:nvSpPr>
-          <p:cNvPr id="28" name="Text 24"/>
+          <p:cNvPr id="25" name="Text 22"/>
           <p:cNvSpPr txBox="1"/>
           <p:nvPr/>
         </p:nvSpPr>
         <p:spPr>
           <a:xfrm>
-            <a:off x="1463040" y="4937760"/>
-            <a:ext cx="2468880" cy="365760"/>
+            <a:off x="822960" y="4709160"/>
+            <a:ext cx="10515600" cy="365760"/>
           </a:xfrm>
           <a:prstGeom prst="rect">
             <a:avLst/>
@@ -12000,346 +10985,89 @@
               <a:buNone/>
             </a:pPr>
             <a:r>
-              <a:rPr lang="en-US" sz="1500" b="1" dirty="0">
+              <a:rPr lang="en-US" sz="1600" b="1" dirty="0">
                 <a:solidFill>
                   <a:schemeClr val="bg1"/>
                 </a:solidFill>
               </a:rPr>
-              <a:t>A clear message</a:t>
-            </a:r>
-            <a:endParaRPr lang="en-US" sz="1500" dirty="0"/>
-          </a:p>
-        </p:txBody>
-      </p:sp>
-      <p:sp>
-        <p:nvSpPr>
-          <p:cNvPr id="29" name="Text 25"/>
+              <a:t>Two slots overlap when each starts before the other ends</a:t>
+            </a:r>
+            <a:endParaRPr lang="en-US" sz="1600" dirty="0"/>
+          </a:p>
+        </p:txBody>
+      </p:sp>
+      <p:sp>
+        <p:nvSpPr>
+          <p:cNvPr id="26" name="Text 23"/>
           <p:cNvSpPr txBox="1"/>
           <p:nvPr/>
         </p:nvSpPr>
         <p:spPr>
           <a:xfrm>
-            <a:off x="1463040" y="5321808"/>
-            <a:ext cx="2468880" cy="640080"/>
-          </a:xfrm>
-          <a:prstGeom prst="rect">
-            <a:avLst/>
-          </a:prstGeom>
-          <a:noFill/>
-          <a:ln/>
-        </p:spPr>
-        <p:txBody>
-          <a:bodyPr wrap="square" lIns="0" tIns="0" rIns="0" bIns="0" rtlCol="0" anchor="t"/>
-          <a:lstStyle/>
-          <a:p>
-            <a:pPr indent="0" marL="0">
-              <a:buNone/>
-            </a:pPr>
-            <a:r>
-              <a:rPr lang="en-US" sz="1300" dirty="0">
+            <a:off x="822960" y="5166360"/>
+            <a:ext cx="6400800" cy="411480"/>
+          </a:xfrm>
+          <a:prstGeom prst="rect">
+            <a:avLst/>
+          </a:prstGeom>
+          <a:noFill/>
+          <a:ln/>
+        </p:spPr>
+        <p:txBody>
+          <a:bodyPr wrap="square" lIns="0" tIns="0" rIns="0" bIns="0" rtlCol="0" anchor="ctr"/>
+          <a:lstStyle/>
+          <a:p>
+            <a:pPr indent="0" marL="0">
+              <a:buNone/>
+            </a:pPr>
+            <a:r>
+              <a:rPr lang="en-US" sz="1800" b="1" dirty="0">
+                <a:solidFill>
+                  <a:schemeClr val="accent1"/>
+                </a:solidFill>
+                <a:latin typeface="Courier New" pitchFamily="34" charset="0"/>
+                <a:ea typeface="Courier New" pitchFamily="34" charset="-122"/>
+                <a:cs typeface="Courier New" pitchFamily="34" charset="-120"/>
+              </a:rPr>
+              <a:t>starts_at &lt; :end  AND  ends_at &gt; :start</a:t>
+            </a:r>
+            <a:endParaRPr lang="en-US" sz="1800" dirty="0"/>
+          </a:p>
+        </p:txBody>
+      </p:sp>
+      <p:sp>
+        <p:nvSpPr>
+          <p:cNvPr id="27" name="Text 24"/>
+          <p:cNvSpPr txBox="1"/>
+          <p:nvPr/>
+        </p:nvSpPr>
+        <p:spPr>
+          <a:xfrm>
+            <a:off x="822960" y="5623560"/>
+            <a:ext cx="10058400" cy="320040"/>
+          </a:xfrm>
+          <a:prstGeom prst="rect">
+            <a:avLst/>
+          </a:prstGeom>
+          <a:noFill/>
+          <a:ln/>
+        </p:spPr>
+        <p:txBody>
+          <a:bodyPr wrap="square" lIns="0" tIns="0" rIns="0" bIns="0" rtlCol="0" anchor="ctr"/>
+          <a:lstStyle/>
+          <a:p>
+            <a:pPr indent="0" marL="0">
+              <a:buNone/>
+            </a:pPr>
+            <a:r>
+              <a:rPr lang="en-US" sz="1400" dirty="0">
                 <a:solidFill>
                   <a:schemeClr val="bg2"/>
                 </a:solidFill>
               </a:rPr>
-              <a:t>Day, time and the show in the way.</a:t>
-            </a:r>
-            <a:endParaRPr lang="en-US" sz="1300" dirty="0"/>
-          </a:p>
-        </p:txBody>
-      </p:sp>
-      <p:sp>
-        <p:nvSpPr>
-          <p:cNvPr id="30" name="panel"/>
-          <p:cNvSpPr/>
-          <p:nvPr/>
-        </p:nvSpPr>
-        <p:spPr>
-          <a:xfrm>
-            <a:off x="4297680" y="4754880"/>
-            <a:ext cx="3520440" cy="1325880"/>
-          </a:xfrm>
-          <a:prstGeom prst="roundRect">
-            <a:avLst>
-              <a:gd name="adj" fmla="val 5517"/>
-            </a:avLst>
-          </a:prstGeom>
-          <a:solidFill>
-            <a:schemeClr val="tx2"/>
-          </a:solidFill>
-          <a:ln w="12700">
-            <a:solidFill>
-              <a:schemeClr val="tx2"/>
-            </a:solidFill>
-            <a:prstDash val="solid"/>
-          </a:ln>
-        </p:spPr>
-      </p:sp>
-      <p:sp>
-        <p:nvSpPr>
-          <p:cNvPr id="31" name="Shape 27"/>
-          <p:cNvSpPr/>
-          <p:nvPr/>
-        </p:nvSpPr>
-        <p:spPr>
-          <a:xfrm>
-            <a:off x="4526280" y="4983480"/>
-            <a:ext cx="502920" cy="502920"/>
-          </a:xfrm>
-          <a:prstGeom prst="ellipse">
-            <a:avLst/>
-          </a:prstGeom>
-          <a:solidFill>
-            <a:schemeClr val="accent1"/>
-          </a:solidFill>
-          <a:ln w="12700">
-            <a:solidFill>
-              <a:schemeClr val="accent1"/>
-            </a:solidFill>
-            <a:prstDash val="solid"/>
-          </a:ln>
-        </p:spPr>
-      </p:sp>
-      <p:pic>
-        <p:nvPicPr>
-          <p:cNvPr id="32" name="Image 1" descr="preencoded.png">    </p:cNvPr>
-          <p:cNvPicPr>
-            <a:picLocks noChangeAspect="1"/>
-          </p:cNvPicPr>
-          <p:nvPr/>
-        </p:nvPicPr>
-        <p:blipFill>
-          <a:blip r:embed="rId2"/>
-          <a:stretch>
-            <a:fillRect/>
-          </a:stretch>
-        </p:blipFill>
-        <p:spPr>
-          <a:xfrm>
-            <a:off x="4646981" y="5104181"/>
-            <a:ext cx="261518" cy="261518"/>
-          </a:xfrm>
-          <a:prstGeom prst="rect">
-            <a:avLst/>
-          </a:prstGeom>
-        </p:spPr>
-      </p:pic>
-      <p:sp>
-        <p:nvSpPr>
-          <p:cNvPr id="33" name="Text 28"/>
-          <p:cNvSpPr txBox="1"/>
-          <p:nvPr/>
-        </p:nvSpPr>
-        <p:spPr>
-          <a:xfrm>
-            <a:off x="5212080" y="4937760"/>
-            <a:ext cx="2468880" cy="365760"/>
-          </a:xfrm>
-          <a:prstGeom prst="rect">
-            <a:avLst/>
-          </a:prstGeom>
-          <a:noFill/>
-          <a:ln/>
-        </p:spPr>
-        <p:txBody>
-          <a:bodyPr wrap="square" lIns="0" tIns="0" rIns="0" bIns="0" rtlCol="0" anchor="ctr"/>
-          <a:lstStyle/>
-          <a:p>
-            <a:pPr indent="0" marL="0">
-              <a:buNone/>
-            </a:pPr>
-            <a:r>
-              <a:rPr lang="en-US" sz="1500" b="1" dirty="0">
-                <a:solidFill>
-                  <a:schemeClr val="bg1"/>
-                </a:solidFill>
-              </a:rPr>
-              <a:t>All days or none</a:t>
-            </a:r>
-            <a:endParaRPr lang="en-US" sz="1500" dirty="0"/>
-          </a:p>
-        </p:txBody>
-      </p:sp>
-      <p:sp>
-        <p:nvSpPr>
-          <p:cNvPr id="34" name="Text 29"/>
-          <p:cNvSpPr txBox="1"/>
-          <p:nvPr/>
-        </p:nvSpPr>
-        <p:spPr>
-          <a:xfrm>
-            <a:off x="5212080" y="5321808"/>
-            <a:ext cx="2468880" cy="640080"/>
-          </a:xfrm>
-          <a:prstGeom prst="rect">
-            <a:avLst/>
-          </a:prstGeom>
-          <a:noFill/>
-          <a:ln/>
-        </p:spPr>
-        <p:txBody>
-          <a:bodyPr wrap="square" lIns="0" tIns="0" rIns="0" bIns="0" rtlCol="0" anchor="t"/>
-          <a:lstStyle/>
-          <a:p>
-            <a:pPr indent="0" marL="0">
-              <a:buNone/>
-            </a:pPr>
-            <a:r>
-              <a:rPr lang="en-US" sz="1300" dirty="0">
-                <a:solidFill>
-                  <a:schemeClr val="bg2"/>
-                </a:solidFill>
-              </a:rPr>
-              <a:t>Monday to Friday in one transaction.</a:t>
-            </a:r>
-            <a:endParaRPr lang="en-US" sz="1300" dirty="0"/>
-          </a:p>
-        </p:txBody>
-      </p:sp>
-      <p:sp>
-        <p:nvSpPr>
-          <p:cNvPr id="35" name="panel"/>
-          <p:cNvSpPr/>
-          <p:nvPr/>
-        </p:nvSpPr>
-        <p:spPr>
-          <a:xfrm>
-            <a:off x="8046720" y="4754880"/>
-            <a:ext cx="3520440" cy="1325880"/>
-          </a:xfrm>
-          <a:prstGeom prst="roundRect">
-            <a:avLst>
-              <a:gd name="adj" fmla="val 5517"/>
-            </a:avLst>
-          </a:prstGeom>
-          <a:solidFill>
-            <a:schemeClr val="tx2"/>
-          </a:solidFill>
-          <a:ln w="12700">
-            <a:solidFill>
-              <a:schemeClr val="tx2"/>
-            </a:solidFill>
-            <a:prstDash val="solid"/>
-          </a:ln>
-        </p:spPr>
-      </p:sp>
-      <p:sp>
-        <p:nvSpPr>
-          <p:cNvPr id="36" name="Shape 31"/>
-          <p:cNvSpPr/>
-          <p:nvPr/>
-        </p:nvSpPr>
-        <p:spPr>
-          <a:xfrm>
-            <a:off x="8275320" y="4983480"/>
-            <a:ext cx="502920" cy="502920"/>
-          </a:xfrm>
-          <a:prstGeom prst="ellipse">
-            <a:avLst/>
-          </a:prstGeom>
-          <a:solidFill>
-            <a:schemeClr val="accent1"/>
-          </a:solidFill>
-          <a:ln w="12700">
-            <a:solidFill>
-              <a:schemeClr val="accent1"/>
-            </a:solidFill>
-            <a:prstDash val="solid"/>
-          </a:ln>
-        </p:spPr>
-      </p:sp>
-      <p:pic>
-        <p:nvPicPr>
-          <p:cNvPr id="37" name="Image 2" descr="preencoded.png">    </p:cNvPr>
-          <p:cNvPicPr>
-            <a:picLocks noChangeAspect="1"/>
-          </p:cNvPicPr>
-          <p:nvPr/>
-        </p:nvPicPr>
-        <p:blipFill>
-          <a:blip r:embed="rId3"/>
-          <a:stretch>
-            <a:fillRect/>
-          </a:stretch>
-        </p:blipFill>
-        <p:spPr>
-          <a:xfrm>
-            <a:off x="8396021" y="5104181"/>
-            <a:ext cx="261518" cy="261518"/>
-          </a:xfrm>
-          <a:prstGeom prst="rect">
-            <a:avLst/>
-          </a:prstGeom>
-        </p:spPr>
-      </p:pic>
-      <p:sp>
-        <p:nvSpPr>
-          <p:cNvPr id="38" name="Text 32"/>
-          <p:cNvSpPr txBox="1"/>
-          <p:nvPr/>
-        </p:nvSpPr>
-        <p:spPr>
-          <a:xfrm>
-            <a:off x="8961120" y="4937760"/>
-            <a:ext cx="2468880" cy="365760"/>
-          </a:xfrm>
-          <a:prstGeom prst="rect">
-            <a:avLst/>
-          </a:prstGeom>
-          <a:noFill/>
-          <a:ln/>
-        </p:spPr>
-        <p:txBody>
-          <a:bodyPr wrap="square" lIns="0" tIns="0" rIns="0" bIns="0" rtlCol="0" anchor="ctr"/>
-          <a:lstStyle/>
-          <a:p>
-            <a:pPr indent="0" marL="0">
-              <a:buNone/>
-            </a:pPr>
-            <a:r>
-              <a:rPr lang="en-US" sz="1500" b="1" dirty="0">
-                <a:solidFill>
-                  <a:schemeClr val="bg1"/>
-                </a:solidFill>
-              </a:rPr>
-              <a:t>Past midnight</a:t>
-            </a:r>
-            <a:endParaRPr lang="en-US" sz="1500" dirty="0"/>
-          </a:p>
-        </p:txBody>
-      </p:sp>
-      <p:sp>
-        <p:nvSpPr>
-          <p:cNvPr id="39" name="Text 33"/>
-          <p:cNvSpPr txBox="1"/>
-          <p:nvPr/>
-        </p:nvSpPr>
-        <p:spPr>
-          <a:xfrm>
-            <a:off x="8961120" y="5321808"/>
-            <a:ext cx="2468880" cy="640080"/>
-          </a:xfrm>
-          <a:prstGeom prst="rect">
-            <a:avLst/>
-          </a:prstGeom>
-          <a:noFill/>
-          <a:ln/>
-        </p:spPr>
-        <p:txBody>
-          <a:bodyPr wrap="square" lIns="0" tIns="0" rIns="0" bIns="0" rtlCol="0" anchor="t"/>
-          <a:lstStyle/>
-          <a:p>
-            <a:pPr indent="0" marL="0">
-              <a:buNone/>
-            </a:pPr>
-            <a:r>
-              <a:rPr lang="en-US" sz="1300" dirty="0">
-                <a:solidFill>
-                  <a:schemeClr val="bg2"/>
-                </a:solidFill>
-              </a:rPr>
-              <a:t>Two slots: until 24:00, then from 00:00.</a:t>
-            </a:r>
-            <a:endParaRPr lang="en-US" sz="1300" dirty="0"/>
+              <a:t>Touching (10:00 then 10:00) is fine.</a:t>
+            </a:r>
+            <a:endParaRPr lang="en-US" sz="1400" dirty="0"/>
           </a:p>
         </p:txBody>
       </p:sp>
@@ -12445,7 +11173,7 @@
                   <a:schemeClr val="bg1"/>
                 </a:solidFill>
               </a:rPr>
-              <a:t>On air, up next, and empty hours</a:t>
+              <a:t>The overlap rule on save</a:t>
             </a:r>
             <a:endParaRPr lang="en-US" sz="3200" dirty="0"/>
           </a:p>
@@ -12459,7 +11187,7 @@
         </p:nvSpPr>
         <p:spPr>
           <a:xfrm>
-            <a:off x="548640" y="1691640"/>
+            <a:off x="2651760" y="1691640"/>
             <a:ext cx="731520" cy="228600"/>
           </a:xfrm>
           <a:prstGeom prst="rect">
@@ -12495,7 +11223,7 @@
         </p:nvSpPr>
         <p:spPr>
           <a:xfrm>
-            <a:off x="2948940" y="1691640"/>
+            <a:off x="4526280" y="1691640"/>
             <a:ext cx="731520" cy="228600"/>
           </a:xfrm>
           <a:prstGeom prst="rect">
@@ -12531,7 +11259,7 @@
         </p:nvSpPr>
         <p:spPr>
           <a:xfrm>
-            <a:off x="5715000" y="1691640"/>
+            <a:off x="6766560" y="1691640"/>
             <a:ext cx="731520" cy="228600"/>
           </a:xfrm>
           <a:prstGeom prst="rect">
@@ -12567,7 +11295,7 @@
         </p:nvSpPr>
         <p:spPr>
           <a:xfrm>
-            <a:off x="8481060" y="1691640"/>
+            <a:off x="9006840" y="1691640"/>
             <a:ext cx="731520" cy="228600"/>
           </a:xfrm>
           <a:prstGeom prst="rect">
@@ -12633,18 +11361,54 @@
       </p:sp>
       <p:sp>
         <p:nvSpPr>
-          <p:cNvPr id="9" name="Shape 6"/>
+          <p:cNvPr id="9" name="Text 6"/>
+          <p:cNvSpPr txBox="1"/>
+          <p:nvPr/>
+        </p:nvSpPr>
+        <p:spPr>
+          <a:xfrm>
+            <a:off x="548640" y="2011680"/>
+            <a:ext cx="2011680" cy="457200"/>
+          </a:xfrm>
+          <a:prstGeom prst="rect">
+            <a:avLst/>
+          </a:prstGeom>
+          <a:noFill/>
+          <a:ln/>
+        </p:spPr>
+        <p:txBody>
+          <a:bodyPr wrap="square" lIns="0" tIns="0" rIns="0" bIns="0" rtlCol="0" anchor="ctr"/>
+          <a:lstStyle/>
+          <a:p>
+            <a:pPr indent="0" marL="0">
+              <a:buNone/>
+            </a:pPr>
+            <a:r>
+              <a:rPr lang="en-US" sz="1400" dirty="0">
+                <a:solidFill>
+                  <a:schemeClr val="bg1"/>
+                </a:solidFill>
+              </a:rPr>
+              <a:t>Monday, Jakarta</a:t>
+            </a:r>
+            <a:endParaRPr lang="en-US" sz="1400" dirty="0"/>
+          </a:p>
+        </p:txBody>
+      </p:sp>
+      <p:sp>
+        <p:nvSpPr>
+          <p:cNvPr id="10" name="Shape 7"/>
           <p:cNvSpPr/>
           <p:nvPr/>
         </p:nvSpPr>
         <p:spPr>
           <a:xfrm>
-            <a:off x="548640" y="2011680"/>
-            <a:ext cx="11064240" cy="594360"/>
+            <a:off x="2651760" y="2011680"/>
+            <a:ext cx="8961120" cy="457200"/>
           </a:xfrm>
           <a:prstGeom prst="roundRect">
             <a:avLst>
-              <a:gd name="adj" fmla="val 9231"/>
+              <a:gd name="adj" fmla="val 12000"/>
             </a:avLst>
           </a:prstGeom>
           <a:solidFill>
@@ -12660,18 +11424,18 @@
       </p:sp>
       <p:sp>
         <p:nvSpPr>
-          <p:cNvPr id="10" name="Shape 7"/>
+          <p:cNvPr id="11" name="Shape 8"/>
           <p:cNvSpPr/>
           <p:nvPr/>
         </p:nvSpPr>
         <p:spPr>
           <a:xfrm>
-            <a:off x="3332988" y="2057400"/>
-            <a:ext cx="1807464" cy="502920"/>
+            <a:off x="4910328" y="2057400"/>
+            <a:ext cx="1456944" cy="365760"/>
           </a:xfrm>
           <a:prstGeom prst="roundRect">
             <a:avLst>
-              <a:gd name="adj" fmla="val 9091"/>
+              <a:gd name="adj" fmla="val 12500"/>
             </a:avLst>
           </a:prstGeom>
           <a:solidFill>
@@ -12687,14 +11451,14 @@
       </p:sp>
       <p:sp>
         <p:nvSpPr>
-          <p:cNvPr id="11" name="Text 8"/>
+          <p:cNvPr id="12" name="Text 9"/>
           <p:cNvSpPr txBox="1"/>
           <p:nvPr/>
         </p:nvSpPr>
         <p:spPr>
           <a:xfrm>
-            <a:off x="3369564" y="2011680"/>
-            <a:ext cx="1752600" cy="594360"/>
+            <a:off x="4946904" y="2011680"/>
+            <a:ext cx="1402080" cy="457200"/>
           </a:xfrm>
           <a:prstGeom prst="rect">
             <a:avLst/>
@@ -12715,7 +11479,7 @@
                   <a:schemeClr val="tx1"/>
                 </a:solidFill>
               </a:rPr>
-              <a:t>Pagi Banten</a:t>
+              <a:t>Pagi Jakarta</a:t>
             </a:r>
             <a:endParaRPr lang="en-US" sz="1000" dirty="0"/>
           </a:p>
@@ -12723,18 +11487,18 @@
       </p:sp>
       <p:sp>
         <p:nvSpPr>
-          <p:cNvPr id="12" name="Shape 9"/>
+          <p:cNvPr id="13" name="Shape 10"/>
           <p:cNvSpPr/>
           <p:nvPr/>
         </p:nvSpPr>
         <p:spPr>
           <a:xfrm>
-            <a:off x="7943088" y="2057400"/>
-            <a:ext cx="1346454" cy="502920"/>
+            <a:off x="6403848" y="2057400"/>
+            <a:ext cx="1083564" cy="365760"/>
           </a:xfrm>
           <a:prstGeom prst="roundRect">
             <a:avLst>
-              <a:gd name="adj" fmla="val 9091"/>
+              <a:gd name="adj" fmla="val 12500"/>
             </a:avLst>
           </a:prstGeom>
           <a:solidFill>
@@ -12750,14 +11514,14 @@
       </p:sp>
       <p:sp>
         <p:nvSpPr>
-          <p:cNvPr id="13" name="Text 10"/>
+          <p:cNvPr id="14" name="Text 11"/>
           <p:cNvSpPr txBox="1"/>
           <p:nvPr/>
         </p:nvSpPr>
         <p:spPr>
           <a:xfrm>
-            <a:off x="7979664" y="2011680"/>
-            <a:ext cx="1291590" cy="594360"/>
+            <a:off x="6440424" y="2011680"/>
+            <a:ext cx="1028700" cy="457200"/>
           </a:xfrm>
           <a:prstGeom prst="rect">
             <a:avLst/>
@@ -12778,7 +11542,7 @@
                   <a:schemeClr val="tx1"/>
                 </a:solidFill>
               </a:rPr>
-              <a:t>Jalan Pulang</a:t>
+              <a:t>Jam Makan Siang</a:t>
             </a:r>
             <a:endParaRPr lang="en-US" sz="1000" dirty="0"/>
           </a:p>
@@ -12786,22 +11550,62 @@
       </p:sp>
       <p:sp>
         <p:nvSpPr>
-          <p:cNvPr id="14" name="Shape 11"/>
+          <p:cNvPr id="15" name="Text 12"/>
+          <p:cNvSpPr txBox="1"/>
+          <p:nvPr/>
+        </p:nvSpPr>
+        <p:spPr>
+          <a:xfrm>
+            <a:off x="548640" y="2788920"/>
+            <a:ext cx="2011680" cy="457200"/>
+          </a:xfrm>
+          <a:prstGeom prst="rect">
+            <a:avLst/>
+          </a:prstGeom>
+          <a:noFill/>
+          <a:ln/>
+        </p:spPr>
+        <p:txBody>
+          <a:bodyPr wrap="square" lIns="0" tIns="0" rIns="0" bIns="0" rtlCol="0" anchor="ctr"/>
+          <a:lstStyle/>
+          <a:p>
+            <a:pPr indent="0" marL="0">
+              <a:buNone/>
+            </a:pPr>
+            <a:r>
+              <a:rPr lang="en-US" sz="1400" dirty="0">
+                <a:solidFill>
+                  <a:schemeClr val="bg1"/>
+                </a:solidFill>
+              </a:rPr>
+              <a:t>New 09:00-11:00</a:t>
+            </a:r>
+            <a:endParaRPr lang="en-US" sz="1400" dirty="0"/>
+          </a:p>
+        </p:txBody>
+      </p:sp>
+      <p:sp>
+        <p:nvSpPr>
+          <p:cNvPr id="16" name="Shape 13"/>
           <p:cNvSpPr/>
           <p:nvPr/>
         </p:nvSpPr>
         <p:spPr>
           <a:xfrm>
-            <a:off x="4467225" y="1901952"/>
-            <a:ext cx="914" cy="813816"/>
-          </a:xfrm>
-          <a:prstGeom prst="line">
-            <a:avLst/>
-          </a:prstGeom>
-          <a:noFill/>
-          <a:ln w="31750">
+            <a:off x="2651760" y="2788920"/>
+            <a:ext cx="8961120" cy="457200"/>
+          </a:xfrm>
+          <a:prstGeom prst="roundRect">
+            <a:avLst>
+              <a:gd name="adj" fmla="val 12000"/>
+            </a:avLst>
+          </a:prstGeom>
+          <a:solidFill>
+            <a:schemeClr val="accent4"/>
+          </a:solidFill>
+          <a:ln w="12700">
             <a:solidFill>
-              <a:schemeClr val="accent1"/>
+              <a:schemeClr val="accent4"/>
             </a:solidFill>
             <a:prstDash val="solid"/>
           </a:ln>
@@ -12809,53 +11613,19 @@
       </p:sp>
       <p:sp>
         <p:nvSpPr>
-          <p:cNvPr id="15" name="Text 12"/>
-          <p:cNvSpPr txBox="1"/>
-          <p:nvPr/>
-        </p:nvSpPr>
-        <p:spPr>
-          <a:xfrm>
-            <a:off x="548640" y="2743200"/>
-            <a:ext cx="11064240" cy="320040"/>
-          </a:xfrm>
-          <a:prstGeom prst="rect">
-            <a:avLst/>
-          </a:prstGeom>
-          <a:noFill/>
-          <a:ln/>
-        </p:spPr>
-        <p:txBody>
-          <a:bodyPr wrap="square" lIns="0" tIns="0" rIns="0" bIns="0" rtlCol="0" anchor="ctr"/>
-          <a:lstStyle/>
-          <a:p>
-            <a:pPr indent="0" marL="0">
-              <a:buNone/>
-            </a:pPr>
-            <a:r>
-              <a:rPr lang="en-US" sz="1300" dirty="0">
-                <a:solidFill>
-                  <a:schemeClr val="bg2"/>
-                </a:solidFill>
-              </a:rPr>
-              <a:t>XChannel Banten, Monday 08:30. Red line = now; grey = automated music.</a:t>
-            </a:r>
-            <a:endParaRPr lang="en-US" sz="1300" dirty="0"/>
-          </a:p>
-        </p:txBody>
-      </p:sp>
-      <p:sp>
-        <p:nvSpPr>
-          <p:cNvPr id="16" name="Shape 13"/>
+          <p:cNvPr id="17" name="Shape 14"/>
           <p:cNvSpPr/>
           <p:nvPr/>
         </p:nvSpPr>
         <p:spPr>
           <a:xfrm>
-            <a:off x="548640" y="3657600"/>
-            <a:ext cx="640080" cy="640080"/>
-          </a:xfrm>
-          <a:prstGeom prst="ellipse">
-            <a:avLst/>
+            <a:off x="6030468" y="2834640"/>
+            <a:ext cx="710184" cy="365760"/>
+          </a:xfrm>
+          <a:prstGeom prst="roundRect">
+            <a:avLst>
+              <a:gd name="adj" fmla="val 12500"/>
+            </a:avLst>
           </a:prstGeom>
           <a:solidFill>
             <a:schemeClr val="accent1"/>
@@ -12868,40 +11638,16 @@
           </a:ln>
         </p:spPr>
       </p:sp>
-      <p:pic>
-        <p:nvPicPr>
-          <p:cNvPr id="17" name="Image 0" descr="preencoded.png">    </p:cNvPr>
-          <p:cNvPicPr>
-            <a:picLocks noChangeAspect="1"/>
-          </p:cNvPicPr>
-          <p:nvPr/>
-        </p:nvPicPr>
-        <p:blipFill>
-          <a:blip r:embed="rId1"/>
-          <a:stretch>
-            <a:fillRect/>
-          </a:stretch>
-        </p:blipFill>
-        <p:spPr>
-          <a:xfrm>
-            <a:off x="702259" y="3811219"/>
-            <a:ext cx="332842" cy="332842"/>
-          </a:xfrm>
-          <a:prstGeom prst="rect">
-            <a:avLst/>
-          </a:prstGeom>
-        </p:spPr>
-      </p:pic>
-      <p:sp>
-        <p:nvSpPr>
-          <p:cNvPr id="18" name="Text 14"/>
+      <p:sp>
+        <p:nvSpPr>
+          <p:cNvPr id="18" name="Text 15"/>
           <p:cNvSpPr txBox="1"/>
           <p:nvPr/>
         </p:nvSpPr>
         <p:spPr>
           <a:xfrm>
-            <a:off x="548640" y="4526280"/>
-            <a:ext cx="3474720" cy="411480"/>
+            <a:off x="6067044" y="2788920"/>
+            <a:ext cx="655320" cy="457200"/>
           </a:xfrm>
           <a:prstGeom prst="rect">
             <a:avLst/>
@@ -12917,63 +11663,252 @@
               <a:buNone/>
             </a:pPr>
             <a:r>
-              <a:rPr lang="en-US" sz="1800" b="1" dirty="0">
+              <a:rPr lang="en-US" sz="1000" dirty="0">
                 <a:solidFill>
                   <a:schemeClr val="bg1"/>
                 </a:solidFill>
               </a:rPr>
-              <a:t>On air</a:t>
-            </a:r>
-            <a:endParaRPr lang="en-US" sz="1800" dirty="0"/>
-          </a:p>
-        </p:txBody>
-      </p:sp>
-      <p:sp>
-        <p:nvSpPr>
-          <p:cNvPr id="19" name="Text 15"/>
+              <a:t>Ngobrol</a:t>
+            </a:r>
+            <a:endParaRPr lang="en-US" sz="1000" dirty="0"/>
+          </a:p>
+        </p:txBody>
+      </p:sp>
+      <p:sp>
+        <p:nvSpPr>
+          <p:cNvPr id="19" name="Text 16"/>
           <p:cNvSpPr txBox="1"/>
           <p:nvPr/>
         </p:nvSpPr>
         <p:spPr>
           <a:xfrm>
-            <a:off x="548640" y="4983480"/>
-            <a:ext cx="3474720" cy="1097280"/>
-          </a:xfrm>
-          <a:prstGeom prst="rect">
-            <a:avLst/>
-          </a:prstGeom>
-          <a:noFill/>
-          <a:ln/>
-        </p:spPr>
-        <p:txBody>
-          <a:bodyPr wrap="square" lIns="0" tIns="0" rIns="0" bIns="0" rtlCol="0" anchor="t"/>
-          <a:lstStyle/>
-          <a:p>
-            <a:pPr indent="0" marL="0">
-              <a:buNone/>
-            </a:pPr>
-            <a:r>
-              <a:rPr lang="en-US" sz="1500" dirty="0">
-                <a:solidFill>
-                  <a:schemeClr val="bg2"/>
-                </a:solidFill>
-              </a:rPr>
-              <a:t>Today's slot with start &lt;= now &lt; end. One indexed query.</a:t>
-            </a:r>
-            <a:endParaRPr lang="en-US" sz="1500" dirty="0"/>
-          </a:p>
-        </p:txBody>
-      </p:sp>
-      <p:sp>
-        <p:nvSpPr>
-          <p:cNvPr id="20" name="Shape 16"/>
+            <a:off x="2651760" y="3319272"/>
+            <a:ext cx="8961120" cy="274320"/>
+          </a:xfrm>
+          <a:prstGeom prst="rect">
+            <a:avLst/>
+          </a:prstGeom>
+          <a:noFill/>
+          <a:ln/>
+        </p:spPr>
+        <p:txBody>
+          <a:bodyPr wrap="square" lIns="0" tIns="0" rIns="0" bIns="0" rtlCol="0" anchor="ctr"/>
+          <a:lstStyle/>
+          <a:p>
+            <a:pPr indent="0" marL="0">
+              <a:buNone/>
+            </a:pPr>
+            <a:r>
+              <a:rPr lang="en-US" sz="1300" dirty="0">
+                <a:solidFill>
+                  <a:schemeClr val="accent1"/>
+                </a:solidFill>
+              </a:rPr>
+              <a:t>Refused: clashes with "Pagi Jakarta" (06:00 - 10:00)</a:t>
+            </a:r>
+            <a:endParaRPr lang="en-US" sz="1300" dirty="0"/>
+          </a:p>
+        </p:txBody>
+      </p:sp>
+      <p:sp>
+        <p:nvSpPr>
+          <p:cNvPr id="20" name="Text 17"/>
+          <p:cNvSpPr txBox="1"/>
+          <p:nvPr/>
+        </p:nvSpPr>
+        <p:spPr>
+          <a:xfrm>
+            <a:off x="548640" y="3749040"/>
+            <a:ext cx="2011680" cy="457200"/>
+          </a:xfrm>
+          <a:prstGeom prst="rect">
+            <a:avLst/>
+          </a:prstGeom>
+          <a:noFill/>
+          <a:ln/>
+        </p:spPr>
+        <p:txBody>
+          <a:bodyPr wrap="square" lIns="0" tIns="0" rIns="0" bIns="0" rtlCol="0" anchor="ctr"/>
+          <a:lstStyle/>
+          <a:p>
+            <a:pPr indent="0" marL="0">
+              <a:buNone/>
+            </a:pPr>
+            <a:r>
+              <a:rPr lang="en-US" sz="1400" dirty="0">
+                <a:solidFill>
+                  <a:schemeClr val="bg1"/>
+                </a:solidFill>
+              </a:rPr>
+              <a:t>New 13:00-14:00</a:t>
+            </a:r>
+            <a:endParaRPr lang="en-US" sz="1400" dirty="0"/>
+          </a:p>
+        </p:txBody>
+      </p:sp>
+      <p:sp>
+        <p:nvSpPr>
+          <p:cNvPr id="21" name="Shape 18"/>
           <p:cNvSpPr/>
           <p:nvPr/>
         </p:nvSpPr>
         <p:spPr>
           <a:xfrm>
-            <a:off x="4297680" y="3657600"/>
-            <a:ext cx="640080" cy="640080"/>
+            <a:off x="2651760" y="3749040"/>
+            <a:ext cx="8961120" cy="457200"/>
+          </a:xfrm>
+          <a:prstGeom prst="roundRect">
+            <a:avLst>
+              <a:gd name="adj" fmla="val 12000"/>
+            </a:avLst>
+          </a:prstGeom>
+          <a:solidFill>
+            <a:schemeClr val="accent4"/>
+          </a:solidFill>
+          <a:ln w="12700">
+            <a:solidFill>
+              <a:schemeClr val="accent4"/>
+            </a:solidFill>
+            <a:prstDash val="solid"/>
+          </a:ln>
+        </p:spPr>
+      </p:sp>
+      <p:sp>
+        <p:nvSpPr>
+          <p:cNvPr id="22" name="Shape 19"/>
+          <p:cNvSpPr/>
+          <p:nvPr/>
+        </p:nvSpPr>
+        <p:spPr>
+          <a:xfrm>
+            <a:off x="7523988" y="3794760"/>
+            <a:ext cx="336804" cy="365760"/>
+          </a:xfrm>
+          <a:prstGeom prst="roundRect">
+            <a:avLst>
+              <a:gd name="adj" fmla="val 13575"/>
+            </a:avLst>
+          </a:prstGeom>
+          <a:solidFill>
+            <a:schemeClr val="accent3"/>
+          </a:solidFill>
+          <a:ln w="12700">
+            <a:solidFill>
+              <a:schemeClr val="accent3"/>
+            </a:solidFill>
+            <a:prstDash val="solid"/>
+          </a:ln>
+        </p:spPr>
+      </p:sp>
+      <p:sp>
+        <p:nvSpPr>
+          <p:cNvPr id="23" name="Text 20"/>
+          <p:cNvSpPr txBox="1"/>
+          <p:nvPr/>
+        </p:nvSpPr>
+        <p:spPr>
+          <a:xfrm>
+            <a:off x="7560564" y="3749040"/>
+            <a:ext cx="281940" cy="457200"/>
+          </a:xfrm>
+          <a:prstGeom prst="rect">
+            <a:avLst/>
+          </a:prstGeom>
+          <a:noFill/>
+          <a:ln/>
+        </p:spPr>
+        <p:txBody>
+          <a:bodyPr wrap="square" lIns="0" tIns="0" rIns="0" bIns="0" rtlCol="0" anchor="ctr"/>
+          <a:lstStyle/>
+          <a:p>
+            <a:pPr indent="0" marL="0">
+              <a:buNone/>
+            </a:pPr>
+            <a:r>
+              <a:rPr lang="en-US" sz="1000" dirty="0">
+                <a:solidFill>
+                  <a:schemeClr val="bg1"/>
+                </a:solidFill>
+              </a:rPr>
+              <a:t>OK</a:t>
+            </a:r>
+            <a:endParaRPr lang="en-US" sz="1000" dirty="0"/>
+          </a:p>
+        </p:txBody>
+      </p:sp>
+      <p:sp>
+        <p:nvSpPr>
+          <p:cNvPr id="24" name="Text 21"/>
+          <p:cNvSpPr txBox="1"/>
+          <p:nvPr/>
+        </p:nvSpPr>
+        <p:spPr>
+          <a:xfrm>
+            <a:off x="2651760" y="4279392"/>
+            <a:ext cx="8961120" cy="274320"/>
+          </a:xfrm>
+          <a:prstGeom prst="rect">
+            <a:avLst/>
+          </a:prstGeom>
+          <a:noFill/>
+          <a:ln/>
+        </p:spPr>
+        <p:txBody>
+          <a:bodyPr wrap="square" lIns="0" tIns="0" rIns="0" bIns="0" rtlCol="0" anchor="ctr"/>
+          <a:lstStyle/>
+          <a:p>
+            <a:pPr indent="0" marL="0">
+              <a:buNone/>
+            </a:pPr>
+            <a:r>
+              <a:rPr lang="en-US" sz="1300" dirty="0">
+                <a:solidFill>
+                  <a:schemeClr val="accent3"/>
+                </a:solidFill>
+              </a:rPr>
+              <a:t>Allowed: starts exactly when the previous show ends</a:t>
+            </a:r>
+            <a:endParaRPr lang="en-US" sz="1300" dirty="0"/>
+          </a:p>
+        </p:txBody>
+      </p:sp>
+      <p:sp>
+        <p:nvSpPr>
+          <p:cNvPr id="25" name="panel"/>
+          <p:cNvSpPr/>
+          <p:nvPr/>
+        </p:nvSpPr>
+        <p:spPr>
+          <a:xfrm>
+            <a:off x="548640" y="4754880"/>
+            <a:ext cx="3520440" cy="1325880"/>
+          </a:xfrm>
+          <a:prstGeom prst="roundRect">
+            <a:avLst>
+              <a:gd name="adj" fmla="val 5517"/>
+            </a:avLst>
+          </a:prstGeom>
+          <a:solidFill>
+            <a:schemeClr val="tx2"/>
+          </a:solidFill>
+          <a:ln w="12700">
+            <a:solidFill>
+              <a:schemeClr val="tx2"/>
+            </a:solidFill>
+            <a:prstDash val="solid"/>
+          </a:ln>
+        </p:spPr>
+      </p:sp>
+      <p:sp>
+        <p:nvSpPr>
+          <p:cNvPr id="26" name="Shape 23"/>
+          <p:cNvSpPr/>
+          <p:nvPr/>
+        </p:nvSpPr>
+        <p:spPr>
+          <a:xfrm>
+            <a:off x="777240" y="4983480"/>
+            <a:ext cx="502920" cy="502920"/>
           </a:xfrm>
           <a:prstGeom prst="ellipse">
             <a:avLst/>
@@ -12991,22 +11926,22 @@
       </p:sp>
       <p:pic>
         <p:nvPicPr>
-          <p:cNvPr id="21" name="Image 1" descr="preencoded.png">    </p:cNvPr>
+          <p:cNvPr id="27" name="Image 0" descr="preencoded.png">    </p:cNvPr>
           <p:cNvPicPr>
             <a:picLocks noChangeAspect="1"/>
           </p:cNvPicPr>
           <p:nvPr/>
         </p:nvPicPr>
         <p:blipFill>
-          <a:blip r:embed="rId2"/>
+          <a:blip r:embed="rId1"/>
           <a:stretch>
             <a:fillRect/>
           </a:stretch>
         </p:blipFill>
         <p:spPr>
           <a:xfrm>
-            <a:off x="4451299" y="3811219"/>
-            <a:ext cx="332842" cy="332842"/>
+            <a:off x="897941" y="5104181"/>
+            <a:ext cx="261518" cy="261518"/>
           </a:xfrm>
           <a:prstGeom prst="rect">
             <a:avLst/>
@@ -13015,14 +11950,14 @@
       </p:pic>
       <p:sp>
         <p:nvSpPr>
-          <p:cNvPr id="22" name="Text 17"/>
+          <p:cNvPr id="28" name="Text 24"/>
           <p:cNvSpPr txBox="1"/>
           <p:nvPr/>
         </p:nvSpPr>
         <p:spPr>
           <a:xfrm>
-            <a:off x="4297680" y="4526280"/>
-            <a:ext cx="3474720" cy="411480"/>
+            <a:off x="1463040" y="4937760"/>
+            <a:ext cx="2468880" cy="365760"/>
           </a:xfrm>
           <a:prstGeom prst="rect">
             <a:avLst/>
@@ -13038,27 +11973,27 @@
               <a:buNone/>
             </a:pPr>
             <a:r>
-              <a:rPr lang="en-US" sz="1800" b="1" dirty="0">
+              <a:rPr lang="en-US" sz="1500" b="1" dirty="0">
                 <a:solidFill>
                   <a:schemeClr val="bg1"/>
                 </a:solidFill>
               </a:rPr>
-              <a:t>Up next</a:t>
-            </a:r>
-            <a:endParaRPr lang="en-US" sz="1800" dirty="0"/>
-          </a:p>
-        </p:txBody>
-      </p:sp>
-      <p:sp>
-        <p:nvSpPr>
-          <p:cNvPr id="23" name="Text 18"/>
+              <a:t>A clear message</a:t>
+            </a:r>
+            <a:endParaRPr lang="en-US" sz="1500" dirty="0"/>
+          </a:p>
+        </p:txBody>
+      </p:sp>
+      <p:sp>
+        <p:nvSpPr>
+          <p:cNvPr id="29" name="Text 25"/>
           <p:cNvSpPr txBox="1"/>
           <p:nvPr/>
         </p:nvSpPr>
         <p:spPr>
           <a:xfrm>
-            <a:off x="4297680" y="4983480"/>
-            <a:ext cx="3474720" cy="1097280"/>
+            <a:off x="1463040" y="5321808"/>
+            <a:ext cx="2468880" cy="640080"/>
           </a:xfrm>
           <a:prstGeom prst="rect">
             <a:avLst/>
@@ -13074,27 +12009,54 @@
               <a:buNone/>
             </a:pPr>
             <a:r>
-              <a:rPr lang="en-US" sz="1500" dirty="0">
+              <a:rPr lang="en-US" sz="1300" dirty="0">
                 <a:solidFill>
                   <a:schemeClr val="bg2"/>
                 </a:solidFill>
               </a:rPr>
-              <a:t>The first slot after now, rolling into the next days for up to a week.</a:t>
-            </a:r>
-            <a:endParaRPr lang="en-US" sz="1500" dirty="0"/>
-          </a:p>
-        </p:txBody>
-      </p:sp>
-      <p:sp>
-        <p:nvSpPr>
-          <p:cNvPr id="24" name="Shape 19"/>
+              <a:t>Day, time and the show in the way.</a:t>
+            </a:r>
+            <a:endParaRPr lang="en-US" sz="1300" dirty="0"/>
+          </a:p>
+        </p:txBody>
+      </p:sp>
+      <p:sp>
+        <p:nvSpPr>
+          <p:cNvPr id="30" name="panel"/>
           <p:cNvSpPr/>
           <p:nvPr/>
         </p:nvSpPr>
         <p:spPr>
           <a:xfrm>
-            <a:off x="8046720" y="3657600"/>
-            <a:ext cx="640080" cy="640080"/>
+            <a:off x="4297680" y="4754880"/>
+            <a:ext cx="3520440" cy="1325880"/>
+          </a:xfrm>
+          <a:prstGeom prst="roundRect">
+            <a:avLst>
+              <a:gd name="adj" fmla="val 5517"/>
+            </a:avLst>
+          </a:prstGeom>
+          <a:solidFill>
+            <a:schemeClr val="tx2"/>
+          </a:solidFill>
+          <a:ln w="12700">
+            <a:solidFill>
+              <a:schemeClr val="tx2"/>
+            </a:solidFill>
+            <a:prstDash val="solid"/>
+          </a:ln>
+        </p:spPr>
+      </p:sp>
+      <p:sp>
+        <p:nvSpPr>
+          <p:cNvPr id="31" name="Shape 27"/>
+          <p:cNvSpPr/>
+          <p:nvPr/>
+        </p:nvSpPr>
+        <p:spPr>
+          <a:xfrm>
+            <a:off x="4526280" y="4983480"/>
+            <a:ext cx="502920" cy="502920"/>
           </a:xfrm>
           <a:prstGeom prst="ellipse">
             <a:avLst/>
@@ -13112,7 +12074,155 @@
       </p:sp>
       <p:pic>
         <p:nvPicPr>
-          <p:cNvPr id="25" name="Image 2" descr="preencoded.png">    </p:cNvPr>
+          <p:cNvPr id="32" name="Image 1" descr="preencoded.png">    </p:cNvPr>
+          <p:cNvPicPr>
+            <a:picLocks noChangeAspect="1"/>
+          </p:cNvPicPr>
+          <p:nvPr/>
+        </p:nvPicPr>
+        <p:blipFill>
+          <a:blip r:embed="rId2"/>
+          <a:stretch>
+            <a:fillRect/>
+          </a:stretch>
+        </p:blipFill>
+        <p:spPr>
+          <a:xfrm>
+            <a:off x="4646981" y="5104181"/>
+            <a:ext cx="261518" cy="261518"/>
+          </a:xfrm>
+          <a:prstGeom prst="rect">
+            <a:avLst/>
+          </a:prstGeom>
+        </p:spPr>
+      </p:pic>
+      <p:sp>
+        <p:nvSpPr>
+          <p:cNvPr id="33" name="Text 28"/>
+          <p:cNvSpPr txBox="1"/>
+          <p:nvPr/>
+        </p:nvSpPr>
+        <p:spPr>
+          <a:xfrm>
+            <a:off x="5212080" y="4937760"/>
+            <a:ext cx="2468880" cy="365760"/>
+          </a:xfrm>
+          <a:prstGeom prst="rect">
+            <a:avLst/>
+          </a:prstGeom>
+          <a:noFill/>
+          <a:ln/>
+        </p:spPr>
+        <p:txBody>
+          <a:bodyPr wrap="square" lIns="0" tIns="0" rIns="0" bIns="0" rtlCol="0" anchor="ctr"/>
+          <a:lstStyle/>
+          <a:p>
+            <a:pPr indent="0" marL="0">
+              <a:buNone/>
+            </a:pPr>
+            <a:r>
+              <a:rPr lang="en-US" sz="1500" b="1" dirty="0">
+                <a:solidFill>
+                  <a:schemeClr val="bg1"/>
+                </a:solidFill>
+              </a:rPr>
+              <a:t>All days or none</a:t>
+            </a:r>
+            <a:endParaRPr lang="en-US" sz="1500" dirty="0"/>
+          </a:p>
+        </p:txBody>
+      </p:sp>
+      <p:sp>
+        <p:nvSpPr>
+          <p:cNvPr id="34" name="Text 29"/>
+          <p:cNvSpPr txBox="1"/>
+          <p:nvPr/>
+        </p:nvSpPr>
+        <p:spPr>
+          <a:xfrm>
+            <a:off x="5212080" y="5321808"/>
+            <a:ext cx="2468880" cy="640080"/>
+          </a:xfrm>
+          <a:prstGeom prst="rect">
+            <a:avLst/>
+          </a:prstGeom>
+          <a:noFill/>
+          <a:ln/>
+        </p:spPr>
+        <p:txBody>
+          <a:bodyPr wrap="square" lIns="0" tIns="0" rIns="0" bIns="0" rtlCol="0" anchor="t"/>
+          <a:lstStyle/>
+          <a:p>
+            <a:pPr indent="0" marL="0">
+              <a:buNone/>
+            </a:pPr>
+            <a:r>
+              <a:rPr lang="en-US" sz="1300" dirty="0">
+                <a:solidFill>
+                  <a:schemeClr val="bg2"/>
+                </a:solidFill>
+              </a:rPr>
+              <a:t>Monday to Friday in one transaction.</a:t>
+            </a:r>
+            <a:endParaRPr lang="en-US" sz="1300" dirty="0"/>
+          </a:p>
+        </p:txBody>
+      </p:sp>
+      <p:sp>
+        <p:nvSpPr>
+          <p:cNvPr id="35" name="panel"/>
+          <p:cNvSpPr/>
+          <p:nvPr/>
+        </p:nvSpPr>
+        <p:spPr>
+          <a:xfrm>
+            <a:off x="8046720" y="4754880"/>
+            <a:ext cx="3520440" cy="1325880"/>
+          </a:xfrm>
+          <a:prstGeom prst="roundRect">
+            <a:avLst>
+              <a:gd name="adj" fmla="val 5517"/>
+            </a:avLst>
+          </a:prstGeom>
+          <a:solidFill>
+            <a:schemeClr val="tx2"/>
+          </a:solidFill>
+          <a:ln w="12700">
+            <a:solidFill>
+              <a:schemeClr val="tx2"/>
+            </a:solidFill>
+            <a:prstDash val="solid"/>
+          </a:ln>
+        </p:spPr>
+      </p:sp>
+      <p:sp>
+        <p:nvSpPr>
+          <p:cNvPr id="36" name="Shape 31"/>
+          <p:cNvSpPr/>
+          <p:nvPr/>
+        </p:nvSpPr>
+        <p:spPr>
+          <a:xfrm>
+            <a:off x="8275320" y="4983480"/>
+            <a:ext cx="502920" cy="502920"/>
+          </a:xfrm>
+          <a:prstGeom prst="ellipse">
+            <a:avLst/>
+          </a:prstGeom>
+          <a:solidFill>
+            <a:schemeClr val="accent1"/>
+          </a:solidFill>
+          <a:ln w="12700">
+            <a:solidFill>
+              <a:schemeClr val="accent1"/>
+            </a:solidFill>
+            <a:prstDash val="solid"/>
+          </a:ln>
+        </p:spPr>
+      </p:sp>
+      <p:pic>
+        <p:nvPicPr>
+          <p:cNvPr id="37" name="Image 2" descr="preencoded.png">    </p:cNvPr>
           <p:cNvPicPr>
             <a:picLocks noChangeAspect="1"/>
           </p:cNvPicPr>
@@ -13126,8 +12236,8 @@
         </p:blipFill>
         <p:spPr>
           <a:xfrm>
-            <a:off x="8200339" y="3811219"/>
-            <a:ext cx="332842" cy="332842"/>
+            <a:off x="8396021" y="5104181"/>
+            <a:ext cx="261518" cy="261518"/>
           </a:xfrm>
           <a:prstGeom prst="rect">
             <a:avLst/>
@@ -13136,14 +12246,14 @@
       </p:pic>
       <p:sp>
         <p:nvSpPr>
-          <p:cNvPr id="26" name="Text 20"/>
+          <p:cNvPr id="38" name="Text 32"/>
           <p:cNvSpPr txBox="1"/>
           <p:nvPr/>
         </p:nvSpPr>
         <p:spPr>
           <a:xfrm>
-            <a:off x="8046720" y="4526280"/>
-            <a:ext cx="3474720" cy="411480"/>
+            <a:off x="8961120" y="4937760"/>
+            <a:ext cx="2468880" cy="365760"/>
           </a:xfrm>
           <a:prstGeom prst="rect">
             <a:avLst/>
@@ -13159,27 +12269,27 @@
               <a:buNone/>
             </a:pPr>
             <a:r>
-              <a:rPr lang="en-US" sz="1800" b="1" dirty="0">
+              <a:rPr lang="en-US" sz="1500" b="1" dirty="0">
                 <a:solidFill>
                   <a:schemeClr val="bg1"/>
                 </a:solidFill>
               </a:rPr>
-              <a:t>Empty hours</a:t>
-            </a:r>
-            <a:endParaRPr lang="en-US" sz="1800" dirty="0"/>
-          </a:p>
-        </p:txBody>
-      </p:sp>
-      <p:sp>
-        <p:nvSpPr>
-          <p:cNvPr id="27" name="Text 21"/>
+              <a:t>Past midnight</a:t>
+            </a:r>
+            <a:endParaRPr lang="en-US" sz="1500" dirty="0"/>
+          </a:p>
+        </p:txBody>
+      </p:sp>
+      <p:sp>
+        <p:nvSpPr>
+          <p:cNvPr id="39" name="Text 33"/>
           <p:cNvSpPr txBox="1"/>
           <p:nvPr/>
         </p:nvSpPr>
         <p:spPr>
           <a:xfrm>
-            <a:off x="8046720" y="4983480"/>
-            <a:ext cx="3474720" cy="1097280"/>
+            <a:off x="8961120" y="5321808"/>
+            <a:ext cx="2468880" cy="640080"/>
           </a:xfrm>
           <a:prstGeom prst="rect">
             <a:avLst/>
@@ -13195,14 +12305,14 @@
               <a:buNone/>
             </a:pPr>
             <a:r>
-              <a:rPr lang="en-US" sz="1500" dirty="0">
+              <a:rPr lang="en-US" sz="1300" dirty="0">
                 <a:solidFill>
                   <a:schemeClr val="bg2"/>
                 </a:solidFill>
               </a:rPr>
-              <a:t>Worked out from the schedule, not stored. Airtime per station out of 168 hours.</a:t>
-            </a:r>
-            <a:endParaRPr lang="en-US" sz="1500" dirty="0"/>
+              <a:t>Two slots: until 24:00, then from 00:00.</a:t>
+            </a:r>
+            <a:endParaRPr lang="en-US" sz="1300" dirty="0"/>
           </a:p>
         </p:txBody>
       </p:sp>

--- a/docs/XChannel-walkthrough.pptx
+++ b/docs/XChannel-walkthrough.pptx
@@ -19,10 +19,9 @@
     <p:sldId id="267" r:id="rId13"/>
     <p:sldId id="268" r:id="rId14"/>
     <p:sldId id="269" r:id="rId15"/>
-    <p:sldId id="270" r:id="rId16"/>
   </p:sldIdLst>
   <p:notesMasterIdLst>
-    <p:notesMasterId r:id="rId17"/>
+    <p:notesMasterId r:id="rId16"/>
   </p:notesMasterIdLst>
   <p:sldSz cx="12192000" cy="6858000"/>
   <p:notesSz cx="6858000" cy="12192000"/>
@@ -121,18 +120,18 @@
   <p:extLst>
     <p:ext uri="{521415D9-36F7-43E2-AB2F-B90AF26B5E84}">
       <p14:sectionLst xmlns:p14="http://schemas.microsoft.com/office/powerpoint/2010/main">
-        <p14:section name="Opening" id="{f6a7ed72-e5b5-0501-3fc1-be2b9e56f63e}">
+        <p14:section name="Opening" id="{60e8fe06-0b6a-fb60-e693-9286a57fdcf4}">
           <p14:sldIdLst>
             <p14:sldId id="256"/>
           </p14:sldIdLst>
         </p14:section>
-        <p14:section name="Product" id="{d94b0b27-ab31-8271-4ce5-09013e79a9cf}">
+        <p14:section name="Product" id="{1aba2f6a-0564-35c6-0b15-c6e8902619d4}">
           <p14:sldIdLst>
             <p14:sldId id="257"/>
             <p14:sldId id="258"/>
           </p14:sldIdLst>
         </p14:section>
-        <p14:section name="System design" id="{c0b9dafc-736f-63ef-97ca-f66ba86c25ab}">
+        <p14:section name="System design" id="{1512f466-6089-6823-4ae9-b1ce5a7b1fa1}">
           <p14:sldIdLst>
             <p14:sldId id="259"/>
             <p14:sldId id="260"/>
@@ -140,24 +139,23 @@
             <p14:sldId id="262"/>
           </p14:sldIdLst>
         </p14:section>
-        <p14:section name="Schedule rules" id="{aaf41059-291d-78d8-c62e-5beefc77e9c7}">
+        <p14:section name="Schedule rules" id="{27480c34-b82f-5e98-bed2-5e66cf588772}">
           <p14:sldIdLst>
             <p14:sldId id="263"/>
             <p14:sldId id="264"/>
             <p14:sldId id="265"/>
           </p14:sldIdLst>
         </p14:section>
-        <p14:section name="Code" id="{40fab4f8-d5e3-ad9b-f0ee-adf57c09b7e6}">
+        <p14:section name="Code" id="{742d8a1d-dca9-b517-609b-ab8db5725529}">
           <p14:sldIdLst>
             <p14:sldId id="266"/>
             <p14:sldId id="267"/>
             <p14:sldId id="268"/>
           </p14:sldIdLst>
         </p14:section>
-        <p14:section name="Closing" id="{019a90b4-8a99-f078-f93b-faba9df13188}">
+        <p14:section name="Closing" id="{93b85473-00bd-f22e-c176-a9213ed365ac}">
           <p14:sldIdLst>
             <p14:sldId id="269"/>
-            <p14:sldId id="270"/>
           </p14:sldIdLst>
         </p14:section>
       </p14:sectionLst>
@@ -1004,7 +1002,7 @@
           <a:p>
             <a:r>
               <a:rPr lang="en-US" dirty="0"/>
-              <a:t>Naming what is not done shows I know where the system is thin. Pick one to discuss.</a:t>
+              <a:t>Close with the links. Offer to open the demo or the code on screen.</a:t>
             </a:r>
             <a:endParaRPr lang="en-US" dirty="0"/>
           </a:p>
@@ -1028,94 +1026,6 @@
             <a:fld id="{F7021451-1387-4CA6-816F-3879F97B5CBC}" type="slidenum">
               <a:rPr lang="en-US"/>
               <a:t>14</a:t>
-            </a:fld>
-            <a:endParaRPr lang="en-US"/>
-          </a:p>
-        </p:txBody>
-      </p:sp>
-    </p:spTree>
-    <p:extLst>
-      <p:ext uri="{BB962C8B-B14F-4D97-AF65-F5344CB8AC3E}">
-        <p14:creationId xmlns:p14="http://schemas.microsoft.com/office/powerpoint/2010/main" val="1024086991"/>
-      </p:ext>
-    </p:extLst>
-  </p:cSld>
-  <p:clrMapOvr>
-    <a:masterClrMapping/>
-  </p:clrMapOvr>
-</p:notes>
-</file>
-
-<file path=ppt/notesSlides/notesSlide15.xml><?xml version="1.0" encoding="utf-8"?>
-<p:notes xmlns:a="http://schemas.openxmlformats.org/drawingml/2006/main" xmlns:r="http://schemas.openxmlformats.org/officeDocument/2006/relationships" xmlns:p="http://schemas.openxmlformats.org/presentationml/2006/main">
-  <p:cSld>
-    <p:spTree>
-      <p:nvGrpSpPr>
-        <p:cNvPr id="1" name=""/>
-        <p:cNvGrpSpPr/>
-        <p:nvPr/>
-      </p:nvGrpSpPr>
-      <p:grpSpPr>
-        <a:xfrm>
-          <a:off x="0" y="0"/>
-          <a:ext cx="0" cy="0"/>
-          <a:chOff x="0" y="0"/>
-          <a:chExt cx="0" cy="0"/>
-        </a:xfrm>
-      </p:grpSpPr>
-      <p:sp>
-        <p:nvSpPr>
-          <p:cNvPr id="2" name="Slide Image Placeholder 1"/>
-          <p:cNvSpPr>
-            <a:spLocks noGrp="1" noRot="1" noChangeAspect="1"/>
-          </p:cNvSpPr>
-          <p:nvPr>
-            <p:ph type="sldImg"/>
-          </p:nvPr>
-        </p:nvSpPr>
-        <p:spPr/>
-      </p:sp>
-      <p:sp>
-        <p:nvSpPr>
-          <p:cNvPr id="3" name="Notes Placeholder 2"/>
-          <p:cNvSpPr>
-            <a:spLocks noGrp="1"/>
-          </p:cNvSpPr>
-          <p:nvPr>
-            <p:ph type="body" idx="1"/>
-          </p:nvPr>
-        </p:nvSpPr>
-        <p:spPr/>
-        <p:txBody>
-          <a:bodyPr/>
-          <a:lstStyle/>
-          <a:p>
-            <a:r>
-              <a:rPr lang="en-US" dirty="0"/>
-              <a:t>Close with the links. Offer to open the demo or the code on screen.</a:t>
-            </a:r>
-            <a:endParaRPr lang="en-US" dirty="0"/>
-          </a:p>
-        </p:txBody>
-      </p:sp>
-      <p:sp>
-        <p:nvSpPr>
-          <p:cNvPr id="4" name="Slide Number Placeholder 3"/>
-          <p:cNvSpPr>
-            <a:spLocks noGrp="1"/>
-          </p:cNvSpPr>
-          <p:nvPr>
-            <p:ph type="sldNum" sz="quarter" idx="10"/>
-          </p:nvPr>
-        </p:nvSpPr>
-        <p:spPr/>
-        <p:txBody>
-          <a:bodyPr/>
-          <a:lstStyle/>
-          <a:p>
-            <a:fld id="{F7021451-1387-4CA6-816F-3879F97B5CBC}" type="slidenum">
-              <a:rPr lang="en-US"/>
-              <a:t>15</a:t>
             </a:fld>
             <a:endParaRPr lang="en-US"/>
           </a:p>
@@ -5172,740 +5082,6 @@
                   <a:schemeClr val="bg1"/>
                 </a:solidFill>
               </a:rPr>
-              <a:t>What is not done yet</a:t>
-            </a:r>
-            <a:endParaRPr lang="en-US" sz="3200" dirty="0"/>
-          </a:p>
-        </p:txBody>
-      </p:sp>
-      <p:graphicFrame>
-        <p:nvGraphicFramePr>
-          <p:cNvPr id="15" name="Table 0"/>
-          <p:cNvGraphicFramePr>
-            <a:graphicFrameLocks noGrp="1"/>
-          </p:cNvGraphicFramePr>
-          <p:nvPr>
-            <p:extLst>
-              <p:ext uri="{D42A27DB-BD31-4B8C-83A1-F6EECF244321}">
-                <p14:modId xmlns:p14="http://schemas.microsoft.com/office/powerpoint/2010/main" val="1579011935"/>
-              </p:ext>
-            </p:extLst>
-          </p:nvPr>
-        </p:nvGraphicFramePr>
-        <p:xfrm>
-          <a:off x="548640" y="1463040"/>
-          <a:ext cx="11064240" cy="914400"/>
-        </p:xfrm>
-        <a:graphic>
-          <a:graphicData uri="http://schemas.openxmlformats.org/drawingml/2006/table">
-            <a:tbl>
-              <a:tblPr/>
-              <a:tblGrid>
-                <a:gridCol w="4023360"/>
-                <a:gridCol w="7040880"/>
-              </a:tblGrid>
-              <a:tr h="0">
-                <a:tc>
-                  <a:txBody>
-                    <a:bodyPr/>
-                    <a:lstStyle/>
-                    <a:p>
-                      <a:pPr indent="0" marL="0">
-                        <a:buNone/>
-                      </a:pPr>
-                      <a:r>
-                        <a:rPr lang="en-US" sz="1500" b="1" dirty="0">
-                          <a:solidFill>
-                            <a:srgbClr val="E0313E"/>
-                          </a:solidFill>
-                        </a:rPr>
-                        <a:t>Not done yet</a:t>
-                      </a:r>
-                      <a:endParaRPr lang="en-US" sz="1500" dirty="0"/>
-                    </a:p>
-                  </a:txBody>
-                  <a:tcPr marL="164592" marR="164592" marT="182880" marB="182880" anchor="t">
-                    <a:lnL w="9525" cap="flat" cmpd="sng" algn="ctr">
-                      <a:solidFill>
-                        <a:srgbClr val="3A3D46"/>
-                      </a:solidFill>
-                      <a:prstDash val="solid"/>
-                      <a:round/>
-                      <a:headEnd type="none" w="med" len="med"/>
-                      <a:tailEnd type="none" w="med" len="med"/>
-                    </a:lnL>
-                    <a:lnR w="9525" cap="flat" cmpd="sng" algn="ctr">
-                      <a:solidFill>
-                        <a:srgbClr val="3A3D46"/>
-                      </a:solidFill>
-                      <a:prstDash val="solid"/>
-                      <a:round/>
-                      <a:headEnd type="none" w="med" len="med"/>
-                      <a:tailEnd type="none" w="med" len="med"/>
-                    </a:lnR>
-                    <a:lnT w="9525" cap="flat" cmpd="sng" algn="ctr">
-                      <a:solidFill>
-                        <a:srgbClr val="3A3D46"/>
-                      </a:solidFill>
-                      <a:prstDash val="solid"/>
-                      <a:round/>
-                      <a:headEnd type="none" w="med" len="med"/>
-                      <a:tailEnd type="none" w="med" len="med"/>
-                    </a:lnT>
-                    <a:lnB w="9525" cap="flat" cmpd="sng" algn="ctr">
-                      <a:solidFill>
-                        <a:srgbClr val="3A3D46"/>
-                      </a:solidFill>
-                      <a:prstDash val="solid"/>
-                      <a:round/>
-                      <a:headEnd type="none" w="med" len="med"/>
-                      <a:tailEnd type="none" w="med" len="med"/>
-                    </a:lnB>
-                    <a:solidFill>
-                      <a:srgbClr val="25272E"/>
-                    </a:solidFill>
-                  </a:tcPr>
-                </a:tc>
-                <a:tc>
-                  <a:txBody>
-                    <a:bodyPr/>
-                    <a:lstStyle/>
-                    <a:p>
-                      <a:pPr indent="0" marL="0">
-                        <a:buNone/>
-                      </a:pPr>
-                      <a:r>
-                        <a:rPr lang="en-US" sz="1500" b="1" dirty="0">
-                          <a:solidFill>
-                            <a:srgbClr val="E0313E"/>
-                          </a:solidFill>
-                        </a:rPr>
-                        <a:t>First step</a:t>
-                      </a:r>
-                      <a:endParaRPr lang="en-US" sz="1500" dirty="0"/>
-                    </a:p>
-                  </a:txBody>
-                  <a:tcPr marL="164592" marR="164592" marT="182880" marB="182880" anchor="t">
-                    <a:lnL w="9525" cap="flat" cmpd="sng" algn="ctr">
-                      <a:solidFill>
-                        <a:srgbClr val="3A3D46"/>
-                      </a:solidFill>
-                      <a:prstDash val="solid"/>
-                      <a:round/>
-                      <a:headEnd type="none" w="med" len="med"/>
-                      <a:tailEnd type="none" w="med" len="med"/>
-                    </a:lnL>
-                    <a:lnR w="9525" cap="flat" cmpd="sng" algn="ctr">
-                      <a:solidFill>
-                        <a:srgbClr val="3A3D46"/>
-                      </a:solidFill>
-                      <a:prstDash val="solid"/>
-                      <a:round/>
-                      <a:headEnd type="none" w="med" len="med"/>
-                      <a:tailEnd type="none" w="med" len="med"/>
-                    </a:lnR>
-                    <a:lnT w="9525" cap="flat" cmpd="sng" algn="ctr">
-                      <a:solidFill>
-                        <a:srgbClr val="3A3D46"/>
-                      </a:solidFill>
-                      <a:prstDash val="solid"/>
-                      <a:round/>
-                      <a:headEnd type="none" w="med" len="med"/>
-                      <a:tailEnd type="none" w="med" len="med"/>
-                    </a:lnT>
-                    <a:lnB w="9525" cap="flat" cmpd="sng" algn="ctr">
-                      <a:solidFill>
-                        <a:srgbClr val="3A3D46"/>
-                      </a:solidFill>
-                      <a:prstDash val="solid"/>
-                      <a:round/>
-                      <a:headEnd type="none" w="med" len="med"/>
-                      <a:tailEnd type="none" w="med" len="med"/>
-                    </a:lnB>
-                    <a:solidFill>
-                      <a:srgbClr val="25272E"/>
-                    </a:solidFill>
-                  </a:tcPr>
-                </a:tc>
-              </a:tr>
-              <a:tr h="0">
-                <a:tc>
-                  <a:txBody>
-                    <a:bodyPr/>
-                    <a:lstStyle/>
-                    <a:p>
-                      <a:pPr indent="0" marL="0">
-                        <a:buNone/>
-                      </a:pPr>
-                      <a:r>
-                        <a:rPr lang="en-US" sz="1700" b="1" dirty="0">
-                          <a:solidFill>
-                            <a:srgbClr val="FFFFFF"/>
-                          </a:solidFill>
-                        </a:rPr>
-                        <a:t>Production still has a table per city</a:t>
-                      </a:r>
-                      <a:endParaRPr lang="en-US" sz="1700" dirty="0"/>
-                    </a:p>
-                  </a:txBody>
-                  <a:tcPr marL="164592" marR="164592" marT="182880" marB="182880" anchor="t">
-                    <a:lnL w="9525" cap="flat" cmpd="sng" algn="ctr">
-                      <a:solidFill>
-                        <a:srgbClr val="3A3D46"/>
-                      </a:solidFill>
-                      <a:prstDash val="solid"/>
-                      <a:round/>
-                      <a:headEnd type="none" w="med" len="med"/>
-                      <a:tailEnd type="none" w="med" len="med"/>
-                    </a:lnL>
-                    <a:lnR w="9525" cap="flat" cmpd="sng" algn="ctr">
-                      <a:solidFill>
-                        <a:srgbClr val="3A3D46"/>
-                      </a:solidFill>
-                      <a:prstDash val="solid"/>
-                      <a:round/>
-                      <a:headEnd type="none" w="med" len="med"/>
-                      <a:tailEnd type="none" w="med" len="med"/>
-                    </a:lnR>
-                    <a:lnT w="9525" cap="flat" cmpd="sng" algn="ctr">
-                      <a:solidFill>
-                        <a:srgbClr val="3A3D46"/>
-                      </a:solidFill>
-                      <a:prstDash val="solid"/>
-                      <a:round/>
-                      <a:headEnd type="none" w="med" len="med"/>
-                      <a:tailEnd type="none" w="med" len="med"/>
-                    </a:lnT>
-                    <a:lnB w="9525" cap="flat" cmpd="sng" algn="ctr">
-                      <a:solidFill>
-                        <a:srgbClr val="3A3D46"/>
-                      </a:solidFill>
-                      <a:prstDash val="solid"/>
-                      <a:round/>
-                      <a:headEnd type="none" w="med" len="med"/>
-                      <a:tailEnd type="none" w="med" len="med"/>
-                    </a:lnB>
-                  </a:tcPr>
-                </a:tc>
-                <a:tc>
-                  <a:txBody>
-                    <a:bodyPr/>
-                    <a:lstStyle/>
-                    <a:p>
-                      <a:pPr indent="0" marL="0">
-                        <a:buNone/>
-                      </a:pPr>
-                      <a:r>
-                        <a:rPr lang="en-US" sz="1700" dirty="0">
-                          <a:solidFill>
-                            <a:srgbClr val="AEB2BC"/>
-                          </a:solidFill>
-                        </a:rPr>
-                        <a:t>Fill schedule_slots from the old tables, keep a view per city for the old API, then move readers over gradually</a:t>
-                      </a:r>
-                      <a:endParaRPr lang="en-US" sz="1700" dirty="0"/>
-                    </a:p>
-                  </a:txBody>
-                  <a:tcPr marL="164592" marR="164592" marT="182880" marB="182880" anchor="t">
-                    <a:lnL w="9525" cap="flat" cmpd="sng" algn="ctr">
-                      <a:solidFill>
-                        <a:srgbClr val="3A3D46"/>
-                      </a:solidFill>
-                      <a:prstDash val="solid"/>
-                      <a:round/>
-                      <a:headEnd type="none" w="med" len="med"/>
-                      <a:tailEnd type="none" w="med" len="med"/>
-                    </a:lnL>
-                    <a:lnR w="9525" cap="flat" cmpd="sng" algn="ctr">
-                      <a:solidFill>
-                        <a:srgbClr val="3A3D46"/>
-                      </a:solidFill>
-                      <a:prstDash val="solid"/>
-                      <a:round/>
-                      <a:headEnd type="none" w="med" len="med"/>
-                      <a:tailEnd type="none" w="med" len="med"/>
-                    </a:lnR>
-                    <a:lnT w="9525" cap="flat" cmpd="sng" algn="ctr">
-                      <a:solidFill>
-                        <a:srgbClr val="3A3D46"/>
-                      </a:solidFill>
-                      <a:prstDash val="solid"/>
-                      <a:round/>
-                      <a:headEnd type="none" w="med" len="med"/>
-                      <a:tailEnd type="none" w="med" len="med"/>
-                    </a:lnT>
-                    <a:lnB w="9525" cap="flat" cmpd="sng" algn="ctr">
-                      <a:solidFill>
-                        <a:srgbClr val="3A3D46"/>
-                      </a:solidFill>
-                      <a:prstDash val="solid"/>
-                      <a:round/>
-                      <a:headEnd type="none" w="med" len="med"/>
-                      <a:tailEnd type="none" w="med" len="med"/>
-                    </a:lnB>
-                  </a:tcPr>
-                </a:tc>
-              </a:tr>
-              <a:tr h="0">
-                <a:tc>
-                  <a:txBody>
-                    <a:bodyPr/>
-                    <a:lstStyle/>
-                    <a:p>
-                      <a:pPr indent="0" marL="0">
-                        <a:buNone/>
-                      </a:pPr>
-                      <a:r>
-                        <a:rPr lang="en-US" sz="1700" b="1" dirty="0">
-                          <a:solidFill>
-                            <a:srgbClr val="FFFFFF"/>
-                          </a:solidFill>
-                        </a:rPr>
-                        <a:t>Every time is assumed to be WIB</a:t>
-                      </a:r>
-                      <a:endParaRPr lang="en-US" sz="1700" dirty="0"/>
-                    </a:p>
-                  </a:txBody>
-                  <a:tcPr marL="164592" marR="164592" marT="182880" marB="182880" anchor="t">
-                    <a:lnL w="9525" cap="flat" cmpd="sng" algn="ctr">
-                      <a:solidFill>
-                        <a:srgbClr val="3A3D46"/>
-                      </a:solidFill>
-                      <a:prstDash val="solid"/>
-                      <a:round/>
-                      <a:headEnd type="none" w="med" len="med"/>
-                      <a:tailEnd type="none" w="med" len="med"/>
-                    </a:lnL>
-                    <a:lnR w="9525" cap="flat" cmpd="sng" algn="ctr">
-                      <a:solidFill>
-                        <a:srgbClr val="3A3D46"/>
-                      </a:solidFill>
-                      <a:prstDash val="solid"/>
-                      <a:round/>
-                      <a:headEnd type="none" w="med" len="med"/>
-                      <a:tailEnd type="none" w="med" len="med"/>
-                    </a:lnR>
-                    <a:lnT w="9525" cap="flat" cmpd="sng" algn="ctr">
-                      <a:solidFill>
-                        <a:srgbClr val="3A3D46"/>
-                      </a:solidFill>
-                      <a:prstDash val="solid"/>
-                      <a:round/>
-                      <a:headEnd type="none" w="med" len="med"/>
-                      <a:tailEnd type="none" w="med" len="med"/>
-                    </a:lnT>
-                    <a:lnB w="9525" cap="flat" cmpd="sng" algn="ctr">
-                      <a:solidFill>
-                        <a:srgbClr val="3A3D46"/>
-                      </a:solidFill>
-                      <a:prstDash val="solid"/>
-                      <a:round/>
-                      <a:headEnd type="none" w="med" len="med"/>
-                      <a:tailEnd type="none" w="med" len="med"/>
-                    </a:lnB>
-                  </a:tcPr>
-                </a:tc>
-                <a:tc>
-                  <a:txBody>
-                    <a:bodyPr/>
-                    <a:lstStyle/>
-                    <a:p>
-                      <a:pPr indent="0" marL="0">
-                        <a:buNone/>
-                      </a:pPr>
-                      <a:r>
-                        <a:rPr lang="en-US" sz="1700" dirty="0">
-                          <a:solidFill>
-                            <a:srgbClr val="AEB2BC"/>
-                          </a:solidFill>
-                        </a:rPr>
-                        <a:t>A time zone column on stations, for stations in WITA or WIT</a:t>
-                      </a:r>
-                      <a:endParaRPr lang="en-US" sz="1700" dirty="0"/>
-                    </a:p>
-                  </a:txBody>
-                  <a:tcPr marL="164592" marR="164592" marT="182880" marB="182880" anchor="t">
-                    <a:lnL w="9525" cap="flat" cmpd="sng" algn="ctr">
-                      <a:solidFill>
-                        <a:srgbClr val="3A3D46"/>
-                      </a:solidFill>
-                      <a:prstDash val="solid"/>
-                      <a:round/>
-                      <a:headEnd type="none" w="med" len="med"/>
-                      <a:tailEnd type="none" w="med" len="med"/>
-                    </a:lnL>
-                    <a:lnR w="9525" cap="flat" cmpd="sng" algn="ctr">
-                      <a:solidFill>
-                        <a:srgbClr val="3A3D46"/>
-                      </a:solidFill>
-                      <a:prstDash val="solid"/>
-                      <a:round/>
-                      <a:headEnd type="none" w="med" len="med"/>
-                      <a:tailEnd type="none" w="med" len="med"/>
-                    </a:lnR>
-                    <a:lnT w="9525" cap="flat" cmpd="sng" algn="ctr">
-                      <a:solidFill>
-                        <a:srgbClr val="3A3D46"/>
-                      </a:solidFill>
-                      <a:prstDash val="solid"/>
-                      <a:round/>
-                      <a:headEnd type="none" w="med" len="med"/>
-                      <a:tailEnd type="none" w="med" len="med"/>
-                    </a:lnT>
-                    <a:lnB w="9525" cap="flat" cmpd="sng" algn="ctr">
-                      <a:solidFill>
-                        <a:srgbClr val="3A3D46"/>
-                      </a:solidFill>
-                      <a:prstDash val="solid"/>
-                      <a:round/>
-                      <a:headEnd type="none" w="med" len="med"/>
-                      <a:tailEnd type="none" w="med" len="med"/>
-                    </a:lnB>
-                  </a:tcPr>
-                </a:tc>
-              </a:tr>
-              <a:tr h="0">
-                <a:tc>
-                  <a:txBody>
-                    <a:bodyPr/>
-                    <a:lstStyle/>
-                    <a:p>
-                      <a:pPr indent="0" marL="0">
-                        <a:buNone/>
-                      </a:pPr>
-                      <a:r>
-                        <a:rPr lang="en-US" sz="1700" b="1" dirty="0">
-                          <a:solidFill>
-                            <a:srgbClr val="FFFFFF"/>
-                          </a:solidFill>
-                        </a:rPr>
-                        <a:t>No one-off changes yet</a:t>
-                      </a:r>
-                      <a:endParaRPr lang="en-US" sz="1700" dirty="0"/>
-                    </a:p>
-                  </a:txBody>
-                  <a:tcPr marL="164592" marR="164592" marT="182880" marB="182880" anchor="t">
-                    <a:lnL w="9525" cap="flat" cmpd="sng" algn="ctr">
-                      <a:solidFill>
-                        <a:srgbClr val="3A3D46"/>
-                      </a:solidFill>
-                      <a:prstDash val="solid"/>
-                      <a:round/>
-                      <a:headEnd type="none" w="med" len="med"/>
-                      <a:tailEnd type="none" w="med" len="med"/>
-                    </a:lnL>
-                    <a:lnR w="9525" cap="flat" cmpd="sng" algn="ctr">
-                      <a:solidFill>
-                        <a:srgbClr val="3A3D46"/>
-                      </a:solidFill>
-                      <a:prstDash val="solid"/>
-                      <a:round/>
-                      <a:headEnd type="none" w="med" len="med"/>
-                      <a:tailEnd type="none" w="med" len="med"/>
-                    </a:lnR>
-                    <a:lnT w="9525" cap="flat" cmpd="sng" algn="ctr">
-                      <a:solidFill>
-                        <a:srgbClr val="3A3D46"/>
-                      </a:solidFill>
-                      <a:prstDash val="solid"/>
-                      <a:round/>
-                      <a:headEnd type="none" w="med" len="med"/>
-                      <a:tailEnd type="none" w="med" len="med"/>
-                    </a:lnT>
-                    <a:lnB w="9525" cap="flat" cmpd="sng" algn="ctr">
-                      <a:solidFill>
-                        <a:srgbClr val="3A3D46"/>
-                      </a:solidFill>
-                      <a:prstDash val="solid"/>
-                      <a:round/>
-                      <a:headEnd type="none" w="med" len="med"/>
-                      <a:tailEnd type="none" w="med" len="med"/>
-                    </a:lnB>
-                  </a:tcPr>
-                </a:tc>
-                <a:tc>
-                  <a:txBody>
-                    <a:bodyPr/>
-                    <a:lstStyle/>
-                    <a:p>
-                      <a:pPr indent="0" marL="0">
-                        <a:buNone/>
-                      </a:pPr>
-                      <a:r>
-                        <a:rPr lang="en-US" sz="1700" dirty="0">
-                          <a:solidFill>
-                            <a:srgbClr val="AEB2BC"/>
-                          </a:solidFill>
-                        </a:rPr>
-                        <a:t>A per-date override table (holidays, specials) on top of the weekly pattern</a:t>
-                      </a:r>
-                      <a:endParaRPr lang="en-US" sz="1700" dirty="0"/>
-                    </a:p>
-                  </a:txBody>
-                  <a:tcPr marL="164592" marR="164592" marT="182880" marB="182880" anchor="t">
-                    <a:lnL w="9525" cap="flat" cmpd="sng" algn="ctr">
-                      <a:solidFill>
-                        <a:srgbClr val="3A3D46"/>
-                      </a:solidFill>
-                      <a:prstDash val="solid"/>
-                      <a:round/>
-                      <a:headEnd type="none" w="med" len="med"/>
-                      <a:tailEnd type="none" w="med" len="med"/>
-                    </a:lnL>
-                    <a:lnR w="9525" cap="flat" cmpd="sng" algn="ctr">
-                      <a:solidFill>
-                        <a:srgbClr val="3A3D46"/>
-                      </a:solidFill>
-                      <a:prstDash val="solid"/>
-                      <a:round/>
-                      <a:headEnd type="none" w="med" len="med"/>
-                      <a:tailEnd type="none" w="med" len="med"/>
-                    </a:lnR>
-                    <a:lnT w="9525" cap="flat" cmpd="sng" algn="ctr">
-                      <a:solidFill>
-                        <a:srgbClr val="3A3D46"/>
-                      </a:solidFill>
-                      <a:prstDash val="solid"/>
-                      <a:round/>
-                      <a:headEnd type="none" w="med" len="med"/>
-                      <a:tailEnd type="none" w="med" len="med"/>
-                    </a:lnT>
-                    <a:lnB w="9525" cap="flat" cmpd="sng" algn="ctr">
-                      <a:solidFill>
-                        <a:srgbClr val="3A3D46"/>
-                      </a:solidFill>
-                      <a:prstDash val="solid"/>
-                      <a:round/>
-                      <a:headEnd type="none" w="med" len="med"/>
-                      <a:tailEnd type="none" w="med" len="med"/>
-                    </a:lnB>
-                  </a:tcPr>
-                </a:tc>
-              </a:tr>
-              <a:tr h="0">
-                <a:tc>
-                  <a:txBody>
-                    <a:bodyPr/>
-                    <a:lstStyle/>
-                    <a:p>
-                      <a:pPr indent="0" marL="0">
-                        <a:buNone/>
-                      </a:pPr>
-                      <a:r>
-                        <a:rPr lang="en-US" sz="1700" b="1" dirty="0">
-                          <a:solidFill>
-                            <a:srgbClr val="FFFFFF"/>
-                          </a:solidFill>
-                        </a:rPr>
-                        <a:t>Stream status is set by hand</a:t>
-                      </a:r>
-                      <a:endParaRPr lang="en-US" sz="1700" dirty="0"/>
-                    </a:p>
-                  </a:txBody>
-                  <a:tcPr marL="164592" marR="164592" marT="182880" marB="182880" anchor="t">
-                    <a:lnL w="9525" cap="flat" cmpd="sng" algn="ctr">
-                      <a:solidFill>
-                        <a:srgbClr val="3A3D46"/>
-                      </a:solidFill>
-                      <a:prstDash val="solid"/>
-                      <a:round/>
-                      <a:headEnd type="none" w="med" len="med"/>
-                      <a:tailEnd type="none" w="med" len="med"/>
-                    </a:lnL>
-                    <a:lnR w="9525" cap="flat" cmpd="sng" algn="ctr">
-                      <a:solidFill>
-                        <a:srgbClr val="3A3D46"/>
-                      </a:solidFill>
-                      <a:prstDash val="solid"/>
-                      <a:round/>
-                      <a:headEnd type="none" w="med" len="med"/>
-                      <a:tailEnd type="none" w="med" len="med"/>
-                    </a:lnR>
-                    <a:lnT w="9525" cap="flat" cmpd="sng" algn="ctr">
-                      <a:solidFill>
-                        <a:srgbClr val="3A3D46"/>
-                      </a:solidFill>
-                      <a:prstDash val="solid"/>
-                      <a:round/>
-                      <a:headEnd type="none" w="med" len="med"/>
-                      <a:tailEnd type="none" w="med" len="med"/>
-                    </a:lnT>
-                    <a:lnB w="9525" cap="flat" cmpd="sng" algn="ctr">
-                      <a:solidFill>
-                        <a:srgbClr val="3A3D46"/>
-                      </a:solidFill>
-                      <a:prstDash val="solid"/>
-                      <a:round/>
-                      <a:headEnd type="none" w="med" len="med"/>
-                      <a:tailEnd type="none" w="med" len="med"/>
-                    </a:lnB>
-                  </a:tcPr>
-                </a:tc>
-                <a:tc>
-                  <a:txBody>
-                    <a:bodyPr/>
-                    <a:lstStyle/>
-                    <a:p>
-                      <a:pPr indent="0" marL="0">
-                        <a:buNone/>
-                      </a:pPr>
-                      <a:r>
-                        <a:rPr lang="en-US" sz="1700" dirty="0">
-                          <a:solidFill>
-                            <a:srgbClr val="AEB2BC"/>
-                          </a:solidFill>
-                        </a:rPr>
-                        <a:t>A stream health check that sets live / idle / offline</a:t>
-                      </a:r>
-                      <a:endParaRPr lang="en-US" sz="1700" dirty="0"/>
-                    </a:p>
-                  </a:txBody>
-                  <a:tcPr marL="164592" marR="164592" marT="182880" marB="182880" anchor="t">
-                    <a:lnL w="9525" cap="flat" cmpd="sng" algn="ctr">
-                      <a:solidFill>
-                        <a:srgbClr val="3A3D46"/>
-                      </a:solidFill>
-                      <a:prstDash val="solid"/>
-                      <a:round/>
-                      <a:headEnd type="none" w="med" len="med"/>
-                      <a:tailEnd type="none" w="med" len="med"/>
-                    </a:lnL>
-                    <a:lnR w="9525" cap="flat" cmpd="sng" algn="ctr">
-                      <a:solidFill>
-                        <a:srgbClr val="3A3D46"/>
-                      </a:solidFill>
-                      <a:prstDash val="solid"/>
-                      <a:round/>
-                      <a:headEnd type="none" w="med" len="med"/>
-                      <a:tailEnd type="none" w="med" len="med"/>
-                    </a:lnR>
-                    <a:lnT w="9525" cap="flat" cmpd="sng" algn="ctr">
-                      <a:solidFill>
-                        <a:srgbClr val="3A3D46"/>
-                      </a:solidFill>
-                      <a:prstDash val="solid"/>
-                      <a:round/>
-                      <a:headEnd type="none" w="med" len="med"/>
-                      <a:tailEnd type="none" w="med" len="med"/>
-                    </a:lnT>
-                    <a:lnB w="9525" cap="flat" cmpd="sng" algn="ctr">
-                      <a:solidFill>
-                        <a:srgbClr val="3A3D46"/>
-                      </a:solidFill>
-                      <a:prstDash val="solid"/>
-                      <a:round/>
-                      <a:headEnd type="none" w="med" len="med"/>
-                      <a:tailEnd type="none" w="med" len="med"/>
-                    </a:lnB>
-                  </a:tcPr>
-                </a:tc>
-              </a:tr>
-            </a:tbl>
-          </a:graphicData>
-        </a:graphic>
-      </p:graphicFrame>
-      <p:sp>
-        <p:nvSpPr>
-          <p:cNvPr id="25" name="Slide Number Placeholder 0"/>
-          <p:cNvSpPr>
-            <a:spLocks noGrp="1"/>
-          </p:cNvSpPr>
-          <p:nvPr>
-            <p:ph type="sldNum" sz="quarter" idx="4294967295"/>
-          </p:nvPr>
-        </p:nvSpPr>
-        <p:spPr>
-          <a:xfrm>
-            <a:off x="11155680" y="6355080"/>
-            <a:ext cx="457200" cy="274320"/>
-          </a:xfrm>
-          <a:prstGeom prst="rect">
-            <a:avLst/>
-          </a:prstGeom>
-          <a:extLst>
-            <a:ext uri="{C572A759-6A51-4108-AA02-DFA0A04FC94B}">
-              <ma14:wrappingTextBoxFlag xmlns:ma14="http://schemas.microsoft.com/office/mac/drawingml/2011/main" val="0"/>
-            </a:ext>
-          </a:extLst>
-        </p:spPr>
-        <p:txBody>
-          <a:bodyPr/>
-          <a:lstStyle>
-            <a:lvl1pPr>
-              <a:defRPr sz="1000">
-                <a:solidFill>
-                  <a:schemeClr val="accent5"/>
-                </a:solidFill>
-              </a:defRPr>
-            </a:lvl1pPr>
-          </a:lstStyle>
-          <a:p>
-            <a:pPr algn="r"/>
-            <a:fld id="{F7021451-1387-4CA6-816F-3879F97B5CBC}" type="slidenum">
-              <a:rPr b="0" lang="en-US"/>
-              <a:t>14</a:t>
-            </a:fld>
-            <a:endParaRPr lang="en-US"/>
-          </a:p>
-        </p:txBody>
-      </p:sp>
-    </p:spTree>
-  </p:cSld>
-  <p:clrMapOvr>
-    <a:masterClrMapping/>
-  </p:clrMapOvr>
-</p:sld>
-</file>
-
-<file path=ppt/slides/slide15.xml><?xml version="1.0" encoding="utf-8"?>
-<p:sld xmlns:a="http://schemas.openxmlformats.org/drawingml/2006/main" xmlns:r="http://schemas.openxmlformats.org/officeDocument/2006/relationships" xmlns:p="http://schemas.openxmlformats.org/presentationml/2006/main">
-  <p:cSld name="Slide 15">
-    <p:spTree>
-      <p:nvGrpSpPr>
-        <p:cNvPr id="1" name=""/>
-        <p:cNvGrpSpPr/>
-        <p:nvPr/>
-      </p:nvGrpSpPr>
-      <p:grpSpPr>
-        <a:xfrm>
-          <a:off x="0" y="0"/>
-          <a:ext cx="0" cy="0"/>
-          <a:chOff x="0" y="0"/>
-          <a:chExt cx="0" cy="0"/>
-        </a:xfrm>
-      </p:grpSpPr>
-      <p:sp>
-        <p:nvSpPr>
-          <p:cNvPr id="2" name="Text 0"/>
-          <p:cNvSpPr/>
-          <p:nvPr>
-            <p:ph idx="100" type="title" hasCustomPrompt="1"/>
-          </p:nvPr>
-        </p:nvSpPr>
-        <p:spPr>
-          <a:xfrm>
-            <a:off x="548640" y="457200"/>
-            <a:ext cx="11064240" cy="777240"/>
-          </a:xfrm>
-          <a:prstGeom prst="rect">
-            <a:avLst/>
-          </a:prstGeom>
-          <a:noFill/>
-          <a:ln/>
-        </p:spPr>
-        <p:txBody>
-          <a:bodyPr wrap="square" lIns="0" tIns="0" rIns="0" bIns="0" rtlCol="0" anchor="t"/>
-          <a:lstStyle/>
-          <a:p>
-            <a:pPr algn="l" indent="0" marL="0">
-              <a:buNone/>
-            </a:pPr>
-            <a:r>
-              <a:rPr lang="en-US" sz="3200" b="1" dirty="0">
-                <a:solidFill>
-                  <a:schemeClr val="bg1"/>
-                </a:solidFill>
-              </a:rPr>
               <a:t>Demo, slides and the real product</a:t>
             </a:r>
             <a:endParaRPr lang="en-US" sz="3200" dirty="0"/>
@@ -6411,7 +5587,7 @@
             <a:pPr algn="r"/>
             <a:fld id="{F7021451-1387-4CA6-816F-3879F97B5CBC}" type="slidenum">
               <a:rPr b="0" lang="en-US"/>
-              <a:t>15</a:t>
+              <a:t>14</a:t>
             </a:fld>
             <a:endParaRPr lang="en-US"/>
           </a:p>
@@ -9128,8 +8304,8 @@
         </p:blipFill>
         <p:spPr>
           <a:xfrm>
-            <a:off x="548640" y="1417320"/>
-            <a:ext cx="4793673" cy="4800600"/>
+            <a:off x="548640" y="1280160"/>
+            <a:ext cx="5113251" cy="5120640"/>
           </a:xfrm>
           <a:prstGeom prst="rect">
             <a:avLst/>
@@ -9144,8 +8320,8 @@
         </p:nvSpPr>
         <p:spPr>
           <a:xfrm>
-            <a:off x="5753793" y="1417320"/>
-            <a:ext cx="5859087" cy="365760"/>
+            <a:off x="6073371" y="1417320"/>
+            <a:ext cx="5539509" cy="365760"/>
           </a:xfrm>
           <a:prstGeom prst="rect">
             <a:avLst/>
@@ -9183,8 +8359,8 @@
         </p:nvSpPr>
         <p:spPr>
           <a:xfrm>
-            <a:off x="5753793" y="1801368"/>
-            <a:ext cx="5859087" cy="731520"/>
+            <a:off x="6073371" y="1801368"/>
+            <a:ext cx="5539509" cy="731520"/>
           </a:xfrm>
           <a:prstGeom prst="rect">
             <a:avLst/>
@@ -9219,8 +8395,8 @@
         </p:nvSpPr>
         <p:spPr>
           <a:xfrm>
-            <a:off x="5753793" y="2606040"/>
-            <a:ext cx="5859087" cy="365760"/>
+            <a:off x="6073371" y="2606040"/>
+            <a:ext cx="5539509" cy="365760"/>
           </a:xfrm>
           <a:prstGeom prst="rect">
             <a:avLst/>
@@ -9258,8 +8434,8 @@
         </p:nvSpPr>
         <p:spPr>
           <a:xfrm>
-            <a:off x="5753793" y="2990088"/>
-            <a:ext cx="5859087" cy="731520"/>
+            <a:off x="6073371" y="2990088"/>
+            <a:ext cx="5539509" cy="731520"/>
           </a:xfrm>
           <a:prstGeom prst="rect">
             <a:avLst/>
@@ -9294,8 +8470,8 @@
         </p:nvSpPr>
         <p:spPr>
           <a:xfrm>
-            <a:off x="5753793" y="3794760"/>
-            <a:ext cx="5859087" cy="365760"/>
+            <a:off x="6073371" y="3794760"/>
+            <a:ext cx="5539509" cy="365760"/>
           </a:xfrm>
           <a:prstGeom prst="rect">
             <a:avLst/>
@@ -9333,8 +8509,8 @@
         </p:nvSpPr>
         <p:spPr>
           <a:xfrm>
-            <a:off x="5753793" y="4178808"/>
-            <a:ext cx="5859087" cy="731520"/>
+            <a:off x="6073371" y="4178808"/>
+            <a:ext cx="5539509" cy="731520"/>
           </a:xfrm>
           <a:prstGeom prst="rect">
             <a:avLst/>
@@ -9369,8 +8545,8 @@
         </p:nvSpPr>
         <p:spPr>
           <a:xfrm>
-            <a:off x="5753793" y="4983480"/>
-            <a:ext cx="5859087" cy="365760"/>
+            <a:off x="6073371" y="4983480"/>
+            <a:ext cx="5539509" cy="365760"/>
           </a:xfrm>
           <a:prstGeom prst="rect">
             <a:avLst/>
@@ -9408,8 +8584,8 @@
         </p:nvSpPr>
         <p:spPr>
           <a:xfrm>
-            <a:off x="5753793" y="5367528"/>
-            <a:ext cx="5859087" cy="731520"/>
+            <a:off x="6073371" y="5367528"/>
+            <a:ext cx="5539509" cy="731520"/>
           </a:xfrm>
           <a:prstGeom prst="rect">
             <a:avLst/>

--- a/docs/XChannel-walkthrough.pptx
+++ b/docs/XChannel-walkthrough.pptx
@@ -122,12 +122,12 @@
   <p:extLst>
     <p:ext uri="{521415D9-36F7-43E2-AB2F-B90AF26B5E84}">
       <p14:sectionLst xmlns:p14="http://schemas.microsoft.com/office/powerpoint/2010/main">
-        <p14:section name="Opening" id="{f53417bd-0e11-e0cd-7dad-5b189dba7f84}">
+        <p14:section name="Opening" id="{21879c08-943d-559b-9f41-5f8ebac59b7e}">
           <p14:sldIdLst>
             <p14:sldId id="256"/>
           </p14:sldIdLst>
         </p14:section>
-        <p14:section name="Product" id="{bf09dcae-eb45-b4ff-ffdb-69d122692dea}">
+        <p14:section name="Product" id="{7de5a7be-345d-ca94-c482-07bd3b27e644}">
           <p14:sldIdLst>
             <p14:sldId id="257"/>
             <p14:sldId id="258"/>
@@ -135,7 +135,7 @@
             <p14:sldId id="260"/>
           </p14:sldIdLst>
         </p14:section>
-        <p14:section name="System design" id="{d21d0a71-1de8-f84b-6b6e-1cac9d5da5aa}">
+        <p14:section name="System design" id="{51832cde-1aed-39db-a857-475a5b68f43b}">
           <p14:sldIdLst>
             <p14:sldId id="261"/>
             <p14:sldId id="262"/>
@@ -143,21 +143,21 @@
             <p14:sldId id="264"/>
           </p14:sldIdLst>
         </p14:section>
-        <p14:section name="Schedule rules" id="{440ef6f3-0bba-a886-8734-e1fa4c9db5e1}">
+        <p14:section name="Schedule rules" id="{e501a996-0891-25c5-e474-34cb46b6ba7a}">
           <p14:sldIdLst>
             <p14:sldId id="265"/>
             <p14:sldId id="266"/>
             <p14:sldId id="267"/>
           </p14:sldIdLst>
         </p14:section>
-        <p14:section name="Code" id="{e710a1a9-5742-144c-6e07-119cbbb0391a}">
+        <p14:section name="Code" id="{19346dbe-2b8f-5ae5-6b0c-d1315a2b4e5f}">
           <p14:sldIdLst>
             <p14:sldId id="268"/>
             <p14:sldId id="269"/>
             <p14:sldId id="270"/>
           </p14:sldIdLst>
         </p14:section>
-        <p14:section name="Closing" id="{095bd436-9b19-4864-e486-28bc0b916d57}">
+        <p14:section name="Closing" id="{0642d079-6191-be20-4484-b567e60e64be}">
           <p14:sldIdLst>
             <p14:sldId id="271"/>
           </p14:sldIdLst>
